--- a/output/presentation/PSUB-Operator-Guide.pptx
+++ b/output/presentation/PSUB-Operator-Guide.pptx
@@ -13,8 +13,6 @@
     <p:sldId id="261" r:id="rId12"/>
     <p:sldId id="262" r:id="rId13"/>
     <p:sldId id="263" r:id="rId14"/>
-    <p:sldId id="264" r:id="rId15"/>
-    <p:sldId id="265" r:id="rId16"/>
   </p:sldIdLst>
   <p:sldSz cx="12191695" cy="6858000" type="screen4x3"/>
   <p:notesSz cx="6858000" cy="9144000"/>
@@ -3265,13 +3263,13 @@
           <a:lstStyle/>
           <a:p>
             <a:r>
-              <a:rPr sz="1400">
+              <a:rPr sz="1300">
                 <a:solidFill>
                   <a:srgbClr val="E8EEF4"/>
                 </a:solidFill>
                 <a:latin typeface="Aptos"/>
               </a:rPr>
-              <a:t>Building Python security releases on Windows with the PSUB web UI</a:t>
+              <a:t>A faster, safer path for Windows Python security release builds</a:t>
             </a:r>
           </a:p>
         </p:txBody>
@@ -3322,7 +3320,7 @@
                   <a:srgbClr val="121B26"/>
                 </a:solidFill>
               </a:rPr>
-              <a:t>Supported versions: 3.10.x, 3.11.x, 3.12.x</a:t>
+              <a:t>Validated on Python 3.10.x, 3.11.x, and 3.12.x</a:t>
             </a:r>
           </a:p>
         </p:txBody>
@@ -3391,1086 +3389,6 @@
                 </a:solidFill>
               </a:rPr>
               <a:t>1</a:t>
-            </a:r>
-          </a:p>
-        </p:txBody>
-      </p:sp>
-    </p:spTree>
-  </p:cSld>
-  <p:clrMapOvr>
-    <a:masterClrMapping/>
-  </p:clrMapOvr>
-</p:sld>
-</file>
-
-<file path=ppt/slides/slide10.xml><?xml version="1.0" encoding="utf-8"?>
-<p:sld xmlns:a="http://schemas.openxmlformats.org/drawingml/2006/main" xmlns:p="http://schemas.openxmlformats.org/presentationml/2006/main" xmlns:r="http://schemas.openxmlformats.org/officeDocument/2006/relationships">
-  <p:cSld>
-    <p:spTree>
-      <p:nvGrpSpPr>
-        <p:cNvPr id="1" name=""/>
-        <p:cNvGrpSpPr/>
-        <p:nvPr/>
-      </p:nvGrpSpPr>
-      <p:grpSpPr/>
-      <p:sp>
-        <p:nvSpPr>
-          <p:cNvPr id="2" name="Rectangle 1"/>
-          <p:cNvSpPr/>
-          <p:nvPr/>
-        </p:nvSpPr>
-        <p:spPr>
-          <a:xfrm>
-            <a:off x="0" y="0"/>
-            <a:ext cx="12191695" cy="6858000"/>
-          </a:xfrm>
-          <a:prstGeom prst="rect">
-            <a:avLst/>
-          </a:prstGeom>
-          <a:solidFill>
-            <a:srgbClr val="0D1B2A"/>
-          </a:solidFill>
-          <a:ln>
-            <a:noFill/>
-          </a:ln>
-        </p:spPr>
-        <p:style>
-          <a:lnRef idx="1">
-            <a:schemeClr val="accent1"/>
-          </a:lnRef>
-          <a:fillRef idx="3">
-            <a:schemeClr val="accent1"/>
-          </a:fillRef>
-          <a:effectRef idx="2">
-            <a:schemeClr val="accent1"/>
-          </a:effectRef>
-          <a:fontRef idx="minor">
-            <a:schemeClr val="lt1"/>
-          </a:fontRef>
-        </p:style>
-        <p:txBody>
-          <a:bodyPr rtlCol="0" anchor="ctr"/>
-          <a:lstStyle/>
-          <a:p>
-            <a:pPr algn="ctr"/>
-          </a:p>
-        </p:txBody>
-      </p:sp>
-      <p:sp>
-        <p:nvSpPr>
-          <p:cNvPr id="3" name="Rectangle 2"/>
-          <p:cNvSpPr/>
-          <p:nvPr/>
-        </p:nvSpPr>
-        <p:spPr>
-          <a:xfrm>
-            <a:off x="0" y="0"/>
-            <a:ext cx="12191695" cy="292608"/>
-          </a:xfrm>
-          <a:prstGeom prst="rect">
-            <a:avLst/>
-          </a:prstGeom>
-          <a:solidFill>
-            <a:srgbClr val="3F72AF"/>
-          </a:solidFill>
-          <a:ln>
-            <a:noFill/>
-          </a:ln>
-        </p:spPr>
-        <p:style>
-          <a:lnRef idx="1">
-            <a:schemeClr val="accent1"/>
-          </a:lnRef>
-          <a:fillRef idx="3">
-            <a:schemeClr val="accent1"/>
-          </a:fillRef>
-          <a:effectRef idx="2">
-            <a:schemeClr val="accent1"/>
-          </a:effectRef>
-          <a:fontRef idx="minor">
-            <a:schemeClr val="lt1"/>
-          </a:fontRef>
-        </p:style>
-        <p:txBody>
-          <a:bodyPr rtlCol="0" anchor="ctr"/>
-          <a:lstStyle/>
-          <a:p>
-            <a:pPr algn="ctr"/>
-          </a:p>
-        </p:txBody>
-      </p:sp>
-      <p:sp>
-        <p:nvSpPr>
-          <p:cNvPr id="4" name="TextBox 3"/>
-          <p:cNvSpPr txBox="1"/>
-          <p:nvPr/>
-        </p:nvSpPr>
-        <p:spPr>
-          <a:xfrm>
-            <a:off x="548640" y="502920"/>
-            <a:ext cx="8138160" cy="822960"/>
-          </a:xfrm>
-          <a:prstGeom prst="rect">
-            <a:avLst/>
-          </a:prstGeom>
-          <a:noFill/>
-        </p:spPr>
-        <p:txBody>
-          <a:bodyPr wrap="none">
-            <a:spAutoFit/>
-          </a:bodyPr>
-          <a:lstStyle/>
-          <a:p>
-            <a:r>
-              <a:rPr sz="2800" b="1">
-                <a:solidFill>
-                  <a:srgbClr val="E7EEF7"/>
-                </a:solidFill>
-                <a:latin typeface="Aptos Display"/>
-              </a:rPr>
-              <a:t>Standard Operator Workflow</a:t>
-            </a:r>
-          </a:p>
-        </p:txBody>
-      </p:sp>
-      <p:sp>
-        <p:nvSpPr>
-          <p:cNvPr id="5" name="TextBox 4"/>
-          <p:cNvSpPr txBox="1"/>
-          <p:nvPr/>
-        </p:nvSpPr>
-        <p:spPr>
-          <a:xfrm>
-            <a:off x="594360" y="1170432"/>
-            <a:ext cx="7680960" cy="457200"/>
-          </a:xfrm>
-          <a:prstGeom prst="rect">
-            <a:avLst/>
-          </a:prstGeom>
-          <a:noFill/>
-        </p:spPr>
-        <p:txBody>
-          <a:bodyPr wrap="none">
-            <a:spAutoFit/>
-          </a:bodyPr>
-          <a:lstStyle/>
-          <a:p>
-            <a:r>
-              <a:rPr sz="1400">
-                <a:solidFill>
-                  <a:srgbClr val="E8EEF4"/>
-                </a:solidFill>
-                <a:latin typeface="Aptos"/>
-              </a:rPr>
-              <a:t>The repeatable PSUB sequence for a clean release run</a:t>
-            </a:r>
-          </a:p>
-        </p:txBody>
-      </p:sp>
-      <p:sp>
-        <p:nvSpPr>
-          <p:cNvPr id="6" name="Rectangle 5"/>
-          <p:cNvSpPr/>
-          <p:nvPr/>
-        </p:nvSpPr>
-        <p:spPr>
-          <a:xfrm>
-            <a:off x="1097280" y="2880360"/>
-            <a:ext cx="9966960" cy="54864"/>
-          </a:xfrm>
-          <a:prstGeom prst="rect">
-            <a:avLst/>
-          </a:prstGeom>
-          <a:solidFill>
-            <a:srgbClr val="415A77"/>
-          </a:solidFill>
-          <a:ln>
-            <a:noFill/>
-          </a:ln>
-        </p:spPr>
-        <p:style>
-          <a:lnRef idx="1">
-            <a:schemeClr val="accent1"/>
-          </a:lnRef>
-          <a:fillRef idx="3">
-            <a:schemeClr val="accent1"/>
-          </a:fillRef>
-          <a:effectRef idx="2">
-            <a:schemeClr val="accent1"/>
-          </a:effectRef>
-          <a:fontRef idx="minor">
-            <a:schemeClr val="lt1"/>
-          </a:fontRef>
-        </p:style>
-        <p:txBody>
-          <a:bodyPr rtlCol="0" anchor="ctr"/>
-          <a:lstStyle/>
-          <a:p>
-            <a:pPr algn="ctr"/>
-          </a:p>
-        </p:txBody>
-      </p:sp>
-      <p:sp>
-        <p:nvSpPr>
-          <p:cNvPr id="7" name="Rounded Rectangle 6"/>
-          <p:cNvSpPr/>
-          <p:nvPr/>
-        </p:nvSpPr>
-        <p:spPr>
-          <a:xfrm>
-            <a:off x="685800" y="2331720"/>
-            <a:ext cx="1051560" cy="1051560"/>
-          </a:xfrm>
-          <a:prstGeom prst="roundRect">
-            <a:avLst/>
-          </a:prstGeom>
-          <a:solidFill>
-            <a:srgbClr val="3F72AF"/>
-          </a:solidFill>
-          <a:ln>
-            <a:noFill/>
-          </a:ln>
-        </p:spPr>
-        <p:style>
-          <a:lnRef idx="1">
-            <a:schemeClr val="accent1"/>
-          </a:lnRef>
-          <a:fillRef idx="3">
-            <a:schemeClr val="accent1"/>
-          </a:fillRef>
-          <a:effectRef idx="2">
-            <a:schemeClr val="accent1"/>
-          </a:effectRef>
-          <a:fontRef idx="minor">
-            <a:schemeClr val="lt1"/>
-          </a:fontRef>
-        </p:style>
-        <p:txBody>
-          <a:bodyPr rtlCol="0" anchor="ctr"/>
-          <a:lstStyle/>
-          <a:p>
-            <a:pPr algn="ctr"/>
-            <a:r>
-              <a:rPr sz="2000" b="1">
-                <a:solidFill>
-                  <a:srgbClr val="E7EEF7"/>
-                </a:solidFill>
-              </a:rPr>
-              <a:t>1</a:t>
-            </a:r>
-          </a:p>
-        </p:txBody>
-      </p:sp>
-      <p:sp>
-        <p:nvSpPr>
-          <p:cNvPr id="8" name="TextBox 7"/>
-          <p:cNvSpPr txBox="1"/>
-          <p:nvPr/>
-        </p:nvSpPr>
-        <p:spPr>
-          <a:xfrm>
-            <a:off x="548640" y="3520440"/>
-            <a:ext cx="1325880" cy="1188720"/>
-          </a:xfrm>
-          <a:prstGeom prst="rect">
-            <a:avLst/>
-          </a:prstGeom>
-          <a:noFill/>
-        </p:spPr>
-        <p:txBody>
-          <a:bodyPr wrap="none">
-            <a:spAutoFit/>
-          </a:bodyPr>
-          <a:lstStyle/>
-          <a:p>
-            <a:pPr algn="ctr"/>
-            <a:r>
-              <a:rPr sz="1200">
-                <a:solidFill>
-                  <a:srgbClr val="E7EEF7"/>
-                </a:solidFill>
-              </a:rPr>
-              <a:t>Verify prerequisites</a:t>
-            </a:r>
-          </a:p>
-        </p:txBody>
-      </p:sp>
-      <p:sp>
-        <p:nvSpPr>
-          <p:cNvPr id="9" name="Rounded Rectangle 8"/>
-          <p:cNvSpPr/>
-          <p:nvPr/>
-        </p:nvSpPr>
-        <p:spPr>
-          <a:xfrm>
-            <a:off x="1993392" y="2331720"/>
-            <a:ext cx="1051560" cy="1051560"/>
-          </a:xfrm>
-          <a:prstGeom prst="roundRect">
-            <a:avLst/>
-          </a:prstGeom>
-          <a:solidFill>
-            <a:srgbClr val="415A77"/>
-          </a:solidFill>
-          <a:ln>
-            <a:noFill/>
-          </a:ln>
-        </p:spPr>
-        <p:style>
-          <a:lnRef idx="1">
-            <a:schemeClr val="accent1"/>
-          </a:lnRef>
-          <a:fillRef idx="3">
-            <a:schemeClr val="accent1"/>
-          </a:fillRef>
-          <a:effectRef idx="2">
-            <a:schemeClr val="accent1"/>
-          </a:effectRef>
-          <a:fontRef idx="minor">
-            <a:schemeClr val="lt1"/>
-          </a:fontRef>
-        </p:style>
-        <p:txBody>
-          <a:bodyPr rtlCol="0" anchor="ctr"/>
-          <a:lstStyle/>
-          <a:p>
-            <a:pPr algn="ctr"/>
-            <a:r>
-              <a:rPr sz="2000" b="1">
-                <a:solidFill>
-                  <a:srgbClr val="E7EEF7"/>
-                </a:solidFill>
-              </a:rPr>
-              <a:t>2</a:t>
-            </a:r>
-          </a:p>
-        </p:txBody>
-      </p:sp>
-      <p:sp>
-        <p:nvSpPr>
-          <p:cNvPr id="10" name="TextBox 9"/>
-          <p:cNvSpPr txBox="1"/>
-          <p:nvPr/>
-        </p:nvSpPr>
-        <p:spPr>
-          <a:xfrm>
-            <a:off x="1856232" y="3520440"/>
-            <a:ext cx="1325880" cy="1188720"/>
-          </a:xfrm>
-          <a:prstGeom prst="rect">
-            <a:avLst/>
-          </a:prstGeom>
-          <a:noFill/>
-        </p:spPr>
-        <p:txBody>
-          <a:bodyPr wrap="none">
-            <a:spAutoFit/>
-          </a:bodyPr>
-          <a:lstStyle/>
-          <a:p>
-            <a:pPr algn="ctr"/>
-            <a:r>
-              <a:rPr sz="1200">
-                <a:solidFill>
-                  <a:srgbClr val="E7EEF7"/>
-                </a:solidFill>
-              </a:rPr>
-              <a:t>Open the UI</a:t>
-            </a:r>
-          </a:p>
-        </p:txBody>
-      </p:sp>
-      <p:sp>
-        <p:nvSpPr>
-          <p:cNvPr id="11" name="Rounded Rectangle 10"/>
-          <p:cNvSpPr/>
-          <p:nvPr/>
-        </p:nvSpPr>
-        <p:spPr>
-          <a:xfrm>
-            <a:off x="3300984" y="2331720"/>
-            <a:ext cx="1051560" cy="1051560"/>
-          </a:xfrm>
-          <a:prstGeom prst="roundRect">
-            <a:avLst/>
-          </a:prstGeom>
-          <a:solidFill>
-            <a:srgbClr val="3F72AF"/>
-          </a:solidFill>
-          <a:ln>
-            <a:noFill/>
-          </a:ln>
-        </p:spPr>
-        <p:style>
-          <a:lnRef idx="1">
-            <a:schemeClr val="accent1"/>
-          </a:lnRef>
-          <a:fillRef idx="3">
-            <a:schemeClr val="accent1"/>
-          </a:fillRef>
-          <a:effectRef idx="2">
-            <a:schemeClr val="accent1"/>
-          </a:effectRef>
-          <a:fontRef idx="minor">
-            <a:schemeClr val="lt1"/>
-          </a:fontRef>
-        </p:style>
-        <p:txBody>
-          <a:bodyPr rtlCol="0" anchor="ctr"/>
-          <a:lstStyle/>
-          <a:p>
-            <a:pPr algn="ctr"/>
-            <a:r>
-              <a:rPr sz="2000" b="1">
-                <a:solidFill>
-                  <a:srgbClr val="E7EEF7"/>
-                </a:solidFill>
-              </a:rPr>
-              <a:t>3</a:t>
-            </a:r>
-          </a:p>
-        </p:txBody>
-      </p:sp>
-      <p:sp>
-        <p:nvSpPr>
-          <p:cNvPr id="12" name="TextBox 11"/>
-          <p:cNvSpPr txBox="1"/>
-          <p:nvPr/>
-        </p:nvSpPr>
-        <p:spPr>
-          <a:xfrm>
-            <a:off x="3163824" y="3520440"/>
-            <a:ext cx="1325880" cy="1188720"/>
-          </a:xfrm>
-          <a:prstGeom prst="rect">
-            <a:avLst/>
-          </a:prstGeom>
-          <a:noFill/>
-        </p:spPr>
-        <p:txBody>
-          <a:bodyPr wrap="none">
-            <a:spAutoFit/>
-          </a:bodyPr>
-          <a:lstStyle/>
-          <a:p>
-            <a:pPr algn="ctr"/>
-            <a:r>
-              <a:rPr sz="1200">
-                <a:solidFill>
-                  <a:srgbClr val="E7EEF7"/>
-                </a:solidFill>
-              </a:rPr>
-              <a:t>Confirm environment health</a:t>
-            </a:r>
-          </a:p>
-        </p:txBody>
-      </p:sp>
-      <p:sp>
-        <p:nvSpPr>
-          <p:cNvPr id="13" name="Rounded Rectangle 12"/>
-          <p:cNvSpPr/>
-          <p:nvPr/>
-        </p:nvSpPr>
-        <p:spPr>
-          <a:xfrm>
-            <a:off x="4608576" y="2331720"/>
-            <a:ext cx="1051560" cy="1051560"/>
-          </a:xfrm>
-          <a:prstGeom prst="roundRect">
-            <a:avLst/>
-          </a:prstGeom>
-          <a:solidFill>
-            <a:srgbClr val="415A77"/>
-          </a:solidFill>
-          <a:ln>
-            <a:noFill/>
-          </a:ln>
-        </p:spPr>
-        <p:style>
-          <a:lnRef idx="1">
-            <a:schemeClr val="accent1"/>
-          </a:lnRef>
-          <a:fillRef idx="3">
-            <a:schemeClr val="accent1"/>
-          </a:fillRef>
-          <a:effectRef idx="2">
-            <a:schemeClr val="accent1"/>
-          </a:effectRef>
-          <a:fontRef idx="minor">
-            <a:schemeClr val="lt1"/>
-          </a:fontRef>
-        </p:style>
-        <p:txBody>
-          <a:bodyPr rtlCol="0" anchor="ctr"/>
-          <a:lstStyle/>
-          <a:p>
-            <a:pPr algn="ctr"/>
-            <a:r>
-              <a:rPr sz="2000" b="1">
-                <a:solidFill>
-                  <a:srgbClr val="E7EEF7"/>
-                </a:solidFill>
-              </a:rPr>
-              <a:t>4</a:t>
-            </a:r>
-          </a:p>
-        </p:txBody>
-      </p:sp>
-      <p:sp>
-        <p:nvSpPr>
-          <p:cNvPr id="14" name="TextBox 13"/>
-          <p:cNvSpPr txBox="1"/>
-          <p:nvPr/>
-        </p:nvSpPr>
-        <p:spPr>
-          <a:xfrm>
-            <a:off x="4471416" y="3520440"/>
-            <a:ext cx="1325880" cy="1188720"/>
-          </a:xfrm>
-          <a:prstGeom prst="rect">
-            <a:avLst/>
-          </a:prstGeom>
-          <a:noFill/>
-        </p:spPr>
-        <p:txBody>
-          <a:bodyPr wrap="none">
-            <a:spAutoFit/>
-          </a:bodyPr>
-          <a:lstStyle/>
-          <a:p>
-            <a:pPr algn="ctr"/>
-            <a:r>
-              <a:rPr sz="1200">
-                <a:solidFill>
-                  <a:srgbClr val="E7EEF7"/>
-                </a:solidFill>
-              </a:rPr>
-              <a:t>Set SourcePath and BootstrapPython</a:t>
-            </a:r>
-          </a:p>
-        </p:txBody>
-      </p:sp>
-      <p:sp>
-        <p:nvSpPr>
-          <p:cNvPr id="15" name="Rounded Rectangle 14"/>
-          <p:cNvSpPr/>
-          <p:nvPr/>
-        </p:nvSpPr>
-        <p:spPr>
-          <a:xfrm>
-            <a:off x="5916168" y="2331720"/>
-            <a:ext cx="1051560" cy="1051560"/>
-          </a:xfrm>
-          <a:prstGeom prst="roundRect">
-            <a:avLst/>
-          </a:prstGeom>
-          <a:solidFill>
-            <a:srgbClr val="3F72AF"/>
-          </a:solidFill>
-          <a:ln>
-            <a:noFill/>
-          </a:ln>
-        </p:spPr>
-        <p:style>
-          <a:lnRef idx="1">
-            <a:schemeClr val="accent1"/>
-          </a:lnRef>
-          <a:fillRef idx="3">
-            <a:schemeClr val="accent1"/>
-          </a:fillRef>
-          <a:effectRef idx="2">
-            <a:schemeClr val="accent1"/>
-          </a:effectRef>
-          <a:fontRef idx="minor">
-            <a:schemeClr val="lt1"/>
-          </a:fontRef>
-        </p:style>
-        <p:txBody>
-          <a:bodyPr rtlCol="0" anchor="ctr"/>
-          <a:lstStyle/>
-          <a:p>
-            <a:pPr algn="ctr"/>
-            <a:r>
-              <a:rPr sz="2000" b="1">
-                <a:solidFill>
-                  <a:srgbClr val="E7EEF7"/>
-                </a:solidFill>
-              </a:rPr>
-              <a:t>5</a:t>
-            </a:r>
-          </a:p>
-        </p:txBody>
-      </p:sp>
-      <p:sp>
-        <p:nvSpPr>
-          <p:cNvPr id="16" name="TextBox 15"/>
-          <p:cNvSpPr txBox="1"/>
-          <p:nvPr/>
-        </p:nvSpPr>
-        <p:spPr>
-          <a:xfrm>
-            <a:off x="5779008" y="3520440"/>
-            <a:ext cx="1325880" cy="1188720"/>
-          </a:xfrm>
-          <a:prstGeom prst="rect">
-            <a:avLst/>
-          </a:prstGeom>
-          <a:noFill/>
-        </p:spPr>
-        <p:txBody>
-          <a:bodyPr wrap="none">
-            <a:spAutoFit/>
-          </a:bodyPr>
-          <a:lstStyle/>
-          <a:p>
-            <a:pPr algn="ctr"/>
-            <a:r>
-              <a:rPr sz="1200">
-                <a:solidFill>
-                  <a:srgbClr val="E7EEF7"/>
-                </a:solidFill>
-              </a:rPr>
-              <a:t>Create or refresh doc-venv</a:t>
-            </a:r>
-          </a:p>
-        </p:txBody>
-      </p:sp>
-      <p:sp>
-        <p:nvSpPr>
-          <p:cNvPr id="17" name="Rounded Rectangle 16"/>
-          <p:cNvSpPr/>
-          <p:nvPr/>
-        </p:nvSpPr>
-        <p:spPr>
-          <a:xfrm>
-            <a:off x="7223760" y="2331720"/>
-            <a:ext cx="1051560" cy="1051560"/>
-          </a:xfrm>
-          <a:prstGeom prst="roundRect">
-            <a:avLst/>
-          </a:prstGeom>
-          <a:solidFill>
-            <a:srgbClr val="415A77"/>
-          </a:solidFill>
-          <a:ln>
-            <a:noFill/>
-          </a:ln>
-        </p:spPr>
-        <p:style>
-          <a:lnRef idx="1">
-            <a:schemeClr val="accent1"/>
-          </a:lnRef>
-          <a:fillRef idx="3">
-            <a:schemeClr val="accent1"/>
-          </a:fillRef>
-          <a:effectRef idx="2">
-            <a:schemeClr val="accent1"/>
-          </a:effectRef>
-          <a:fontRef idx="minor">
-            <a:schemeClr val="lt1"/>
-          </a:fontRef>
-        </p:style>
-        <p:txBody>
-          <a:bodyPr rtlCol="0" anchor="ctr"/>
-          <a:lstStyle/>
-          <a:p>
-            <a:pPr algn="ctr"/>
-            <a:r>
-              <a:rPr sz="2000" b="1">
-                <a:solidFill>
-                  <a:srgbClr val="E7EEF7"/>
-                </a:solidFill>
-              </a:rPr>
-              <a:t>6</a:t>
-            </a:r>
-          </a:p>
-        </p:txBody>
-      </p:sp>
-      <p:sp>
-        <p:nvSpPr>
-          <p:cNvPr id="18" name="TextBox 17"/>
-          <p:cNvSpPr txBox="1"/>
-          <p:nvPr/>
-        </p:nvSpPr>
-        <p:spPr>
-          <a:xfrm>
-            <a:off x="7086600" y="3520440"/>
-            <a:ext cx="1325880" cy="1188720"/>
-          </a:xfrm>
-          <a:prstGeom prst="rect">
-            <a:avLst/>
-          </a:prstGeom>
-          <a:noFill/>
-        </p:spPr>
-        <p:txBody>
-          <a:bodyPr wrap="none">
-            <a:spAutoFit/>
-          </a:bodyPr>
-          <a:lstStyle/>
-          <a:p>
-            <a:pPr algn="ctr"/>
-            <a:r>
-              <a:rPr sz="1200">
-                <a:solidFill>
-                  <a:srgbClr val="E7EEF7"/>
-                </a:solidFill>
-              </a:rPr>
-              <a:t>Start the build</a:t>
-            </a:r>
-          </a:p>
-        </p:txBody>
-      </p:sp>
-      <p:sp>
-        <p:nvSpPr>
-          <p:cNvPr id="19" name="Rounded Rectangle 18"/>
-          <p:cNvSpPr/>
-          <p:nvPr/>
-        </p:nvSpPr>
-        <p:spPr>
-          <a:xfrm>
-            <a:off x="8531352" y="2331720"/>
-            <a:ext cx="1051560" cy="1051560"/>
-          </a:xfrm>
-          <a:prstGeom prst="roundRect">
-            <a:avLst/>
-          </a:prstGeom>
-          <a:solidFill>
-            <a:srgbClr val="3F72AF"/>
-          </a:solidFill>
-          <a:ln>
-            <a:noFill/>
-          </a:ln>
-        </p:spPr>
-        <p:style>
-          <a:lnRef idx="1">
-            <a:schemeClr val="accent1"/>
-          </a:lnRef>
-          <a:fillRef idx="3">
-            <a:schemeClr val="accent1"/>
-          </a:fillRef>
-          <a:effectRef idx="2">
-            <a:schemeClr val="accent1"/>
-          </a:effectRef>
-          <a:fontRef idx="minor">
-            <a:schemeClr val="lt1"/>
-          </a:fontRef>
-        </p:style>
-        <p:txBody>
-          <a:bodyPr rtlCol="0" anchor="ctr"/>
-          <a:lstStyle/>
-          <a:p>
-            <a:pPr algn="ctr"/>
-            <a:r>
-              <a:rPr sz="2000" b="1">
-                <a:solidFill>
-                  <a:srgbClr val="E7EEF7"/>
-                </a:solidFill>
-              </a:rPr>
-              <a:t>7</a:t>
-            </a:r>
-          </a:p>
-        </p:txBody>
-      </p:sp>
-      <p:sp>
-        <p:nvSpPr>
-          <p:cNvPr id="20" name="TextBox 19"/>
-          <p:cNvSpPr txBox="1"/>
-          <p:nvPr/>
-        </p:nvSpPr>
-        <p:spPr>
-          <a:xfrm>
-            <a:off x="8394192" y="3520440"/>
-            <a:ext cx="1325880" cy="1188720"/>
-          </a:xfrm>
-          <a:prstGeom prst="rect">
-            <a:avLst/>
-          </a:prstGeom>
-          <a:noFill/>
-        </p:spPr>
-        <p:txBody>
-          <a:bodyPr wrap="none">
-            <a:spAutoFit/>
-          </a:bodyPr>
-          <a:lstStyle/>
-          <a:p>
-            <a:pPr algn="ctr"/>
-            <a:r>
-              <a:rPr sz="1200">
-                <a:solidFill>
-                  <a:srgbClr val="E7EEF7"/>
-                </a:solidFill>
-              </a:rPr>
-              <a:t>Review the log</a:t>
-            </a:r>
-          </a:p>
-        </p:txBody>
-      </p:sp>
-      <p:sp>
-        <p:nvSpPr>
-          <p:cNvPr id="21" name="Rounded Rectangle 20"/>
-          <p:cNvSpPr/>
-          <p:nvPr/>
-        </p:nvSpPr>
-        <p:spPr>
-          <a:xfrm>
-            <a:off x="9838944" y="2331720"/>
-            <a:ext cx="1051560" cy="1051560"/>
-          </a:xfrm>
-          <a:prstGeom prst="roundRect">
-            <a:avLst/>
-          </a:prstGeom>
-          <a:solidFill>
-            <a:srgbClr val="415A77"/>
-          </a:solidFill>
-          <a:ln>
-            <a:noFill/>
-          </a:ln>
-        </p:spPr>
-        <p:style>
-          <a:lnRef idx="1">
-            <a:schemeClr val="accent1"/>
-          </a:lnRef>
-          <a:fillRef idx="3">
-            <a:schemeClr val="accent1"/>
-          </a:fillRef>
-          <a:effectRef idx="2">
-            <a:schemeClr val="accent1"/>
-          </a:effectRef>
-          <a:fontRef idx="minor">
-            <a:schemeClr val="lt1"/>
-          </a:fontRef>
-        </p:style>
-        <p:txBody>
-          <a:bodyPr rtlCol="0" anchor="ctr"/>
-          <a:lstStyle/>
-          <a:p>
-            <a:pPr algn="ctr"/>
-            <a:r>
-              <a:rPr sz="2000" b="1">
-                <a:solidFill>
-                  <a:srgbClr val="E7EEF7"/>
-                </a:solidFill>
-              </a:rPr>
-              <a:t>8</a:t>
-            </a:r>
-          </a:p>
-        </p:txBody>
-      </p:sp>
-      <p:sp>
-        <p:nvSpPr>
-          <p:cNvPr id="22" name="TextBox 21"/>
-          <p:cNvSpPr txBox="1"/>
-          <p:nvPr/>
-        </p:nvSpPr>
-        <p:spPr>
-          <a:xfrm>
-            <a:off x="9701784" y="3520440"/>
-            <a:ext cx="1325880" cy="1188720"/>
-          </a:xfrm>
-          <a:prstGeom prst="rect">
-            <a:avLst/>
-          </a:prstGeom>
-          <a:noFill/>
-        </p:spPr>
-        <p:txBody>
-          <a:bodyPr wrap="none">
-            <a:spAutoFit/>
-          </a:bodyPr>
-          <a:lstStyle/>
-          <a:p>
-            <a:pPr algn="ctr"/>
-            <a:r>
-              <a:rPr sz="1200">
-                <a:solidFill>
-                  <a:srgbClr val="E7EEF7"/>
-                </a:solidFill>
-              </a:rPr>
-              <a:t>Collect the final artifacts</a:t>
-            </a:r>
-          </a:p>
-        </p:txBody>
-      </p:sp>
-      <p:sp>
-        <p:nvSpPr>
-          <p:cNvPr id="23" name="Rounded Rectangle 22"/>
-          <p:cNvSpPr/>
-          <p:nvPr/>
-        </p:nvSpPr>
-        <p:spPr>
-          <a:xfrm>
-            <a:off x="8823960" y="1097280"/>
-            <a:ext cx="2743200" cy="4937760"/>
-          </a:xfrm>
-          <a:prstGeom prst="roundRect">
-            <a:avLst/>
-          </a:prstGeom>
-          <a:solidFill>
-            <a:srgbClr val="1B263B"/>
-          </a:solidFill>
-          <a:ln>
-            <a:solidFill>
-              <a:srgbClr val="415A77"/>
-            </a:solidFill>
-          </a:ln>
-        </p:spPr>
-        <p:style>
-          <a:lnRef idx="1">
-            <a:schemeClr val="accent1"/>
-          </a:lnRef>
-          <a:fillRef idx="3">
-            <a:schemeClr val="accent1"/>
-          </a:fillRef>
-          <a:effectRef idx="2">
-            <a:schemeClr val="accent1"/>
-          </a:effectRef>
-          <a:fontRef idx="minor">
-            <a:schemeClr val="lt1"/>
-          </a:fontRef>
-        </p:style>
-        <p:txBody>
-          <a:bodyPr rtlCol="0" anchor="ctr"/>
-          <a:lstStyle/>
-          <a:p>
-            <a:pPr algn="ctr"/>
-          </a:p>
-        </p:txBody>
-      </p:sp>
-      <p:sp>
-        <p:nvSpPr>
-          <p:cNvPr id="24" name="TextBox 23"/>
-          <p:cNvSpPr txBox="1"/>
-          <p:nvPr/>
-        </p:nvSpPr>
-        <p:spPr>
-          <a:xfrm>
-            <a:off x="9098280" y="1325880"/>
-            <a:ext cx="2194560" cy="320040"/>
-          </a:xfrm>
-          <a:prstGeom prst="rect">
-            <a:avLst/>
-          </a:prstGeom>
-          <a:noFill/>
-        </p:spPr>
-        <p:txBody>
-          <a:bodyPr wrap="none">
-            <a:spAutoFit/>
-          </a:bodyPr>
-          <a:lstStyle/>
-          <a:p>
-            <a:r>
-              <a:rPr b="1" sz="1500">
-                <a:solidFill>
-                  <a:srgbClr val="E6BE5A"/>
-                </a:solidFill>
-              </a:rPr>
-              <a:t>Operator Tips</a:t>
-            </a:r>
-          </a:p>
-        </p:txBody>
-      </p:sp>
-      <p:sp>
-        <p:nvSpPr>
-          <p:cNvPr id="25" name="TextBox 24"/>
-          <p:cNvSpPr txBox="1"/>
-          <p:nvPr/>
-        </p:nvSpPr>
-        <p:spPr>
-          <a:xfrm>
-            <a:off x="9098280" y="1737360"/>
-            <a:ext cx="2148840" cy="4023360"/>
-          </a:xfrm>
-          <a:prstGeom prst="rect">
-            <a:avLst/>
-          </a:prstGeom>
-          <a:noFill/>
-        </p:spPr>
-        <p:txBody>
-          <a:bodyPr wrap="square">
-            <a:spAutoFit/>
-          </a:bodyPr>
-          <a:lstStyle/>
-          <a:p>
-            <a:pPr>
-              <a:spcAft>
-                <a:spcPts val="800"/>
-              </a:spcAft>
-            </a:pPr>
-            <a:r>
-              <a:rPr sz="1400">
-                <a:solidFill>
-                  <a:srgbClr val="E7EEF7"/>
-                </a:solidFill>
-                <a:latin typeface="Aptos"/>
-              </a:rPr>
-              <a:t>This sequence aligns with the repo runbook and keeps failures visible early.</a:t>
-            </a:r>
-          </a:p>
-        </p:txBody>
-      </p:sp>
-      <p:sp>
-        <p:nvSpPr>
-          <p:cNvPr id="26" name="TextBox 25"/>
-          <p:cNvSpPr txBox="1"/>
-          <p:nvPr/>
-        </p:nvSpPr>
-        <p:spPr>
-          <a:xfrm>
-            <a:off x="411480" y="6446520"/>
-            <a:ext cx="6949440" cy="228600"/>
-          </a:xfrm>
-          <a:prstGeom prst="rect">
-            <a:avLst/>
-          </a:prstGeom>
-          <a:noFill/>
-        </p:spPr>
-        <p:txBody>
-          <a:bodyPr wrap="none">
-            <a:spAutoFit/>
-          </a:bodyPr>
-          <a:lstStyle/>
-          <a:p>
-            <a:pPr algn="l"/>
-            <a:r>
-              <a:rPr sz="1100">
-                <a:solidFill>
-                  <a:srgbClr val="E8EEF4"/>
-                </a:solidFill>
-              </a:rPr>
-              <a:t>PSUB | Operator Guide</a:t>
-            </a:r>
-          </a:p>
-        </p:txBody>
-      </p:sp>
-      <p:sp>
-        <p:nvSpPr>
-          <p:cNvPr id="27" name="TextBox 26"/>
-          <p:cNvSpPr txBox="1"/>
-          <p:nvPr/>
-        </p:nvSpPr>
-        <p:spPr>
-          <a:xfrm>
-            <a:off x="11155680" y="6400800"/>
-            <a:ext cx="457200" cy="228600"/>
-          </a:xfrm>
-          <a:prstGeom prst="rect">
-            <a:avLst/>
-          </a:prstGeom>
-          <a:noFill/>
-        </p:spPr>
-        <p:txBody>
-          <a:bodyPr wrap="none">
-            <a:spAutoFit/>
-          </a:bodyPr>
-          <a:lstStyle/>
-          <a:p>
-            <a:pPr algn="r"/>
-            <a:r>
-              <a:rPr sz="1100" b="1">
-                <a:solidFill>
-                  <a:srgbClr val="E8EEF4"/>
-                </a:solidFill>
-              </a:rPr>
-              <a:t>10</a:t>
             </a:r>
           </a:p>
         </p:txBody>
@@ -4608,7 +3526,7 @@
                 </a:solidFill>
                 <a:latin typeface="Aptos Display"/>
               </a:rPr>
-              <a:t>What PSUB Does</a:t>
+              <a:t>Why PSUB</a:t>
             </a:r>
           </a:p>
         </p:txBody>
@@ -4636,495 +3554,27 @@
           <a:lstStyle/>
           <a:p>
             <a:r>
-              <a:rPr sz="1400">
+              <a:rPr sz="1300">
                 <a:solidFill>
                   <a:srgbClr val="E8EEF4"/>
                 </a:solidFill>
                 <a:latin typeface="Aptos"/>
               </a:rPr>
-              <a:t>A practical operator workflow from preflight to deliverables</a:t>
-            </a:r>
-          </a:p>
-        </p:txBody>
-      </p:sp>
-      <p:sp>
-        <p:nvSpPr>
-          <p:cNvPr id="6" name="Rectangle 5"/>
+              <a:t>The operator problem it solves on a Windows build machine</a:t>
+            </a:r>
+          </a:p>
+        </p:txBody>
+      </p:sp>
+      <p:sp>
+        <p:nvSpPr>
+          <p:cNvPr id="6" name="Rounded Rectangle 5"/>
           <p:cNvSpPr/>
           <p:nvPr/>
         </p:nvSpPr>
         <p:spPr>
           <a:xfrm>
-            <a:off x="1097280" y="2880360"/>
-            <a:ext cx="9966960" cy="54864"/>
-          </a:xfrm>
-          <a:prstGeom prst="rect">
-            <a:avLst/>
-          </a:prstGeom>
-          <a:solidFill>
-            <a:srgbClr val="415A77"/>
-          </a:solidFill>
-          <a:ln>
-            <a:noFill/>
-          </a:ln>
-        </p:spPr>
-        <p:style>
-          <a:lnRef idx="1">
-            <a:schemeClr val="accent1"/>
-          </a:lnRef>
-          <a:fillRef idx="3">
-            <a:schemeClr val="accent1"/>
-          </a:fillRef>
-          <a:effectRef idx="2">
-            <a:schemeClr val="accent1"/>
-          </a:effectRef>
-          <a:fontRef idx="minor">
-            <a:schemeClr val="lt1"/>
-          </a:fontRef>
-        </p:style>
-        <p:txBody>
-          <a:bodyPr rtlCol="0" anchor="ctr"/>
-          <a:lstStyle/>
-          <a:p>
-            <a:pPr algn="ctr"/>
-          </a:p>
-        </p:txBody>
-      </p:sp>
-      <p:sp>
-        <p:nvSpPr>
-          <p:cNvPr id="7" name="Rounded Rectangle 6"/>
-          <p:cNvSpPr/>
-          <p:nvPr/>
-        </p:nvSpPr>
-        <p:spPr>
-          <a:xfrm>
-            <a:off x="685800" y="2331720"/>
-            <a:ext cx="1051560" cy="1051560"/>
-          </a:xfrm>
-          <a:prstGeom prst="roundRect">
-            <a:avLst/>
-          </a:prstGeom>
-          <a:solidFill>
-            <a:srgbClr val="3F72AF"/>
-          </a:solidFill>
-          <a:ln>
-            <a:noFill/>
-          </a:ln>
-        </p:spPr>
-        <p:style>
-          <a:lnRef idx="1">
-            <a:schemeClr val="accent1"/>
-          </a:lnRef>
-          <a:fillRef idx="3">
-            <a:schemeClr val="accent1"/>
-          </a:fillRef>
-          <a:effectRef idx="2">
-            <a:schemeClr val="accent1"/>
-          </a:effectRef>
-          <a:fontRef idx="minor">
-            <a:schemeClr val="lt1"/>
-          </a:fontRef>
-        </p:style>
-        <p:txBody>
-          <a:bodyPr rtlCol="0" anchor="ctr"/>
-          <a:lstStyle/>
-          <a:p>
-            <a:pPr algn="ctr"/>
-            <a:r>
-              <a:rPr sz="2000" b="1">
-                <a:solidFill>
-                  <a:srgbClr val="E7EEF7"/>
-                </a:solidFill>
-              </a:rPr>
-              <a:t>1</a:t>
-            </a:r>
-          </a:p>
-        </p:txBody>
-      </p:sp>
-      <p:sp>
-        <p:nvSpPr>
-          <p:cNvPr id="8" name="TextBox 7"/>
-          <p:cNvSpPr txBox="1"/>
-          <p:nvPr/>
-        </p:nvSpPr>
-        <p:spPr>
-          <a:xfrm>
-            <a:off x="548640" y="3520440"/>
-            <a:ext cx="1325880" cy="1188720"/>
-          </a:xfrm>
-          <a:prstGeom prst="rect">
-            <a:avLst/>
-          </a:prstGeom>
-          <a:noFill/>
-        </p:spPr>
-        <p:txBody>
-          <a:bodyPr wrap="none">
-            <a:spAutoFit/>
-          </a:bodyPr>
-          <a:lstStyle/>
-          <a:p>
-            <a:pPr algn="ctr"/>
-            <a:r>
-              <a:rPr sz="1200">
-                <a:solidFill>
-                  <a:srgbClr val="E7EEF7"/>
-                </a:solidFill>
-              </a:rPr>
-              <a:t>Validate prerequisites</a:t>
-            </a:r>
-          </a:p>
-        </p:txBody>
-      </p:sp>
-      <p:sp>
-        <p:nvSpPr>
-          <p:cNvPr id="9" name="Rounded Rectangle 8"/>
-          <p:cNvSpPr/>
-          <p:nvPr/>
-        </p:nvSpPr>
-        <p:spPr>
-          <a:xfrm>
-            <a:off x="1993392" y="2331720"/>
-            <a:ext cx="1051560" cy="1051560"/>
-          </a:xfrm>
-          <a:prstGeom prst="roundRect">
-            <a:avLst/>
-          </a:prstGeom>
-          <a:solidFill>
-            <a:srgbClr val="415A77"/>
-          </a:solidFill>
-          <a:ln>
-            <a:noFill/>
-          </a:ln>
-        </p:spPr>
-        <p:style>
-          <a:lnRef idx="1">
-            <a:schemeClr val="accent1"/>
-          </a:lnRef>
-          <a:fillRef idx="3">
-            <a:schemeClr val="accent1"/>
-          </a:fillRef>
-          <a:effectRef idx="2">
-            <a:schemeClr val="accent1"/>
-          </a:effectRef>
-          <a:fontRef idx="minor">
-            <a:schemeClr val="lt1"/>
-          </a:fontRef>
-        </p:style>
-        <p:txBody>
-          <a:bodyPr rtlCol="0" anchor="ctr"/>
-          <a:lstStyle/>
-          <a:p>
-            <a:pPr algn="ctr"/>
-            <a:r>
-              <a:rPr sz="2000" b="1">
-                <a:solidFill>
-                  <a:srgbClr val="E7EEF7"/>
-                </a:solidFill>
-              </a:rPr>
-              <a:t>2</a:t>
-            </a:r>
-          </a:p>
-        </p:txBody>
-      </p:sp>
-      <p:sp>
-        <p:nvSpPr>
-          <p:cNvPr id="10" name="TextBox 9"/>
-          <p:cNvSpPr txBox="1"/>
-          <p:nvPr/>
-        </p:nvSpPr>
-        <p:spPr>
-          <a:xfrm>
-            <a:off x="1856232" y="3520440"/>
-            <a:ext cx="1325880" cy="1188720"/>
-          </a:xfrm>
-          <a:prstGeom prst="rect">
-            <a:avLst/>
-          </a:prstGeom>
-          <a:noFill/>
-        </p:spPr>
-        <p:txBody>
-          <a:bodyPr wrap="none">
-            <a:spAutoFit/>
-          </a:bodyPr>
-          <a:lstStyle/>
-          <a:p>
-            <a:pPr algn="ctr"/>
-            <a:r>
-              <a:rPr sz="1200">
-                <a:solidFill>
-                  <a:srgbClr val="E7EEF7"/>
-                </a:solidFill>
-              </a:rPr>
-              <a:t>Point PSUB at extracted CPython source</a:t>
-            </a:r>
-          </a:p>
-        </p:txBody>
-      </p:sp>
-      <p:sp>
-        <p:nvSpPr>
-          <p:cNvPr id="11" name="Rounded Rectangle 10"/>
-          <p:cNvSpPr/>
-          <p:nvPr/>
-        </p:nvSpPr>
-        <p:spPr>
-          <a:xfrm>
-            <a:off x="3300984" y="2331720"/>
-            <a:ext cx="1051560" cy="1051560"/>
-          </a:xfrm>
-          <a:prstGeom prst="roundRect">
-            <a:avLst/>
-          </a:prstGeom>
-          <a:solidFill>
-            <a:srgbClr val="3F72AF"/>
-          </a:solidFill>
-          <a:ln>
-            <a:noFill/>
-          </a:ln>
-        </p:spPr>
-        <p:style>
-          <a:lnRef idx="1">
-            <a:schemeClr val="accent1"/>
-          </a:lnRef>
-          <a:fillRef idx="3">
-            <a:schemeClr val="accent1"/>
-          </a:fillRef>
-          <a:effectRef idx="2">
-            <a:schemeClr val="accent1"/>
-          </a:effectRef>
-          <a:fontRef idx="minor">
-            <a:schemeClr val="lt1"/>
-          </a:fontRef>
-        </p:style>
-        <p:txBody>
-          <a:bodyPr rtlCol="0" anchor="ctr"/>
-          <a:lstStyle/>
-          <a:p>
-            <a:pPr algn="ctr"/>
-            <a:r>
-              <a:rPr sz="2000" b="1">
-                <a:solidFill>
-                  <a:srgbClr val="E7EEF7"/>
-                </a:solidFill>
-              </a:rPr>
-              <a:t>3</a:t>
-            </a:r>
-          </a:p>
-        </p:txBody>
-      </p:sp>
-      <p:sp>
-        <p:nvSpPr>
-          <p:cNvPr id="12" name="TextBox 11"/>
-          <p:cNvSpPr txBox="1"/>
-          <p:nvPr/>
-        </p:nvSpPr>
-        <p:spPr>
-          <a:xfrm>
-            <a:off x="3163824" y="3520440"/>
-            <a:ext cx="1325880" cy="1188720"/>
-          </a:xfrm>
-          <a:prstGeom prst="rect">
-            <a:avLst/>
-          </a:prstGeom>
-          <a:noFill/>
-        </p:spPr>
-        <p:txBody>
-          <a:bodyPr wrap="none">
-            <a:spAutoFit/>
-          </a:bodyPr>
-          <a:lstStyle/>
-          <a:p>
-            <a:pPr algn="ctr"/>
-            <a:r>
-              <a:rPr sz="1200">
-                <a:solidFill>
-                  <a:srgbClr val="E7EEF7"/>
-                </a:solidFill>
-              </a:rPr>
-              <a:t>Prepare the documentation virtual environment</a:t>
-            </a:r>
-          </a:p>
-        </p:txBody>
-      </p:sp>
-      <p:sp>
-        <p:nvSpPr>
-          <p:cNvPr id="13" name="Rounded Rectangle 12"/>
-          <p:cNvSpPr/>
-          <p:nvPr/>
-        </p:nvSpPr>
-        <p:spPr>
-          <a:xfrm>
-            <a:off x="4608576" y="2331720"/>
-            <a:ext cx="1051560" cy="1051560"/>
-          </a:xfrm>
-          <a:prstGeom prst="roundRect">
-            <a:avLst/>
-          </a:prstGeom>
-          <a:solidFill>
-            <a:srgbClr val="415A77"/>
-          </a:solidFill>
-          <a:ln>
-            <a:noFill/>
-          </a:ln>
-        </p:spPr>
-        <p:style>
-          <a:lnRef idx="1">
-            <a:schemeClr val="accent1"/>
-          </a:lnRef>
-          <a:fillRef idx="3">
-            <a:schemeClr val="accent1"/>
-          </a:fillRef>
-          <a:effectRef idx="2">
-            <a:schemeClr val="accent1"/>
-          </a:effectRef>
-          <a:fontRef idx="minor">
-            <a:schemeClr val="lt1"/>
-          </a:fontRef>
-        </p:style>
-        <p:txBody>
-          <a:bodyPr rtlCol="0" anchor="ctr"/>
-          <a:lstStyle/>
-          <a:p>
-            <a:pPr algn="ctr"/>
-            <a:r>
-              <a:rPr sz="2000" b="1">
-                <a:solidFill>
-                  <a:srgbClr val="E7EEF7"/>
-                </a:solidFill>
-              </a:rPr>
-              <a:t>4</a:t>
-            </a:r>
-          </a:p>
-        </p:txBody>
-      </p:sp>
-      <p:sp>
-        <p:nvSpPr>
-          <p:cNvPr id="14" name="TextBox 13"/>
-          <p:cNvSpPr txBox="1"/>
-          <p:nvPr/>
-        </p:nvSpPr>
-        <p:spPr>
-          <a:xfrm>
-            <a:off x="4471416" y="3520440"/>
-            <a:ext cx="1325880" cy="1188720"/>
-          </a:xfrm>
-          <a:prstGeom prst="rect">
-            <a:avLst/>
-          </a:prstGeom>
-          <a:noFill/>
-        </p:spPr>
-        <p:txBody>
-          <a:bodyPr wrap="none">
-            <a:spAutoFit/>
-          </a:bodyPr>
-          <a:lstStyle/>
-          <a:p>
-            <a:pPr algn="ctr"/>
-            <a:r>
-              <a:rPr sz="1200">
-                <a:solidFill>
-                  <a:srgbClr val="E7EEF7"/>
-                </a:solidFill>
-              </a:rPr>
-              <a:t>Launch the build in a dedicated terminal</a:t>
-            </a:r>
-          </a:p>
-        </p:txBody>
-      </p:sp>
-      <p:sp>
-        <p:nvSpPr>
-          <p:cNvPr id="15" name="Rounded Rectangle 14"/>
-          <p:cNvSpPr/>
-          <p:nvPr/>
-        </p:nvSpPr>
-        <p:spPr>
-          <a:xfrm>
-            <a:off x="5916168" y="2331720"/>
-            <a:ext cx="1051560" cy="1051560"/>
-          </a:xfrm>
-          <a:prstGeom prst="roundRect">
-            <a:avLst/>
-          </a:prstGeom>
-          <a:solidFill>
-            <a:srgbClr val="3F72AF"/>
-          </a:solidFill>
-          <a:ln>
-            <a:noFill/>
-          </a:ln>
-        </p:spPr>
-        <p:style>
-          <a:lnRef idx="1">
-            <a:schemeClr val="accent1"/>
-          </a:lnRef>
-          <a:fillRef idx="3">
-            <a:schemeClr val="accent1"/>
-          </a:fillRef>
-          <a:effectRef idx="2">
-            <a:schemeClr val="accent1"/>
-          </a:effectRef>
-          <a:fontRef idx="minor">
-            <a:schemeClr val="lt1"/>
-          </a:fontRef>
-        </p:style>
-        <p:txBody>
-          <a:bodyPr rtlCol="0" anchor="ctr"/>
-          <a:lstStyle/>
-          <a:p>
-            <a:pPr algn="ctr"/>
-            <a:r>
-              <a:rPr sz="2000" b="1">
-                <a:solidFill>
-                  <a:srgbClr val="E7EEF7"/>
-                </a:solidFill>
-              </a:rPr>
-              <a:t>5</a:t>
-            </a:r>
-          </a:p>
-        </p:txBody>
-      </p:sp>
-      <p:sp>
-        <p:nvSpPr>
-          <p:cNvPr id="16" name="TextBox 15"/>
-          <p:cNvSpPr txBox="1"/>
-          <p:nvPr/>
-        </p:nvSpPr>
-        <p:spPr>
-          <a:xfrm>
-            <a:off x="5779008" y="3520440"/>
-            <a:ext cx="1325880" cy="1188720"/>
-          </a:xfrm>
-          <a:prstGeom prst="rect">
-            <a:avLst/>
-          </a:prstGeom>
-          <a:noFill/>
-        </p:spPr>
-        <p:txBody>
-          <a:bodyPr wrap="none">
-            <a:spAutoFit/>
-          </a:bodyPr>
-          <a:lstStyle/>
-          <a:p>
-            <a:pPr algn="ctr"/>
-            <a:r>
-              <a:rPr sz="1200">
-                <a:solidFill>
-                  <a:srgbClr val="E7EEF7"/>
-                </a:solidFill>
-              </a:rPr>
-              <a:t>Review logs and collect EXE, MSI, and embed artifacts</a:t>
-            </a:r>
-          </a:p>
-        </p:txBody>
-      </p:sp>
-      <p:sp>
-        <p:nvSpPr>
-          <p:cNvPr id="17" name="Rounded Rectangle 16"/>
-          <p:cNvSpPr/>
-          <p:nvPr/>
-        </p:nvSpPr>
-        <p:spPr>
-          <a:xfrm>
-            <a:off x="8823960" y="1097280"/>
-            <a:ext cx="2743200" cy="4937760"/>
+            <a:off x="658368" y="1874519"/>
+            <a:ext cx="2148840" cy="1280160"/>
           </a:xfrm>
           <a:prstGeom prst="roundRect">
             <a:avLst/>
@@ -5162,14 +3612,353 @@
       </p:sp>
       <p:sp>
         <p:nvSpPr>
-          <p:cNvPr id="18" name="TextBox 17"/>
+          <p:cNvPr id="7" name="TextBox 6"/>
           <p:cNvSpPr txBox="1"/>
           <p:nvPr/>
         </p:nvSpPr>
         <p:spPr>
           <a:xfrm>
-            <a:off x="9098280" y="1325880"/>
-            <a:ext cx="2194560" cy="320040"/>
+            <a:off x="859536" y="2020823"/>
+            <a:ext cx="1600200" cy="256032"/>
+          </a:xfrm>
+          <a:prstGeom prst="rect">
+            <a:avLst/>
+          </a:prstGeom>
+          <a:noFill/>
+        </p:spPr>
+        <p:txBody>
+          <a:bodyPr wrap="square">
+            <a:spAutoFit/>
+          </a:bodyPr>
+          <a:lstStyle/>
+          <a:p>
+            <a:r>
+              <a:rPr sz="1200" b="1">
+                <a:solidFill>
+                  <a:srgbClr val="E6BE5A"/>
+                </a:solidFill>
+              </a:rPr>
+              <a:t>UI-first</a:t>
+            </a:r>
+          </a:p>
+        </p:txBody>
+      </p:sp>
+      <p:sp>
+        <p:nvSpPr>
+          <p:cNvPr id="8" name="TextBox 7"/>
+          <p:cNvSpPr txBox="1"/>
+          <p:nvPr/>
+        </p:nvSpPr>
+        <p:spPr>
+          <a:xfrm>
+            <a:off x="859536" y="2295143"/>
+            <a:ext cx="1600200" cy="603504"/>
+          </a:xfrm>
+          <a:prstGeom prst="rect">
+            <a:avLst/>
+          </a:prstGeom>
+          <a:noFill/>
+        </p:spPr>
+        <p:txBody>
+          <a:bodyPr wrap="square" anchor="ctr">
+            <a:spAutoFit/>
+          </a:bodyPr>
+          <a:lstStyle/>
+          <a:p>
+            <a:pPr algn="l"/>
+            <a:r>
+              <a:rPr sz="1500" b="1">
+                <a:solidFill>
+                  <a:srgbClr val="E7EEF7"/>
+                </a:solidFill>
+                <a:latin typeface="Aptos Display"/>
+              </a:rPr>
+              <a:t>One operator surface</a:t>
+            </a:r>
+          </a:p>
+        </p:txBody>
+      </p:sp>
+      <p:sp>
+        <p:nvSpPr>
+          <p:cNvPr id="9" name="Rounded Rectangle 8"/>
+          <p:cNvSpPr/>
+          <p:nvPr/>
+        </p:nvSpPr>
+        <p:spPr>
+          <a:xfrm>
+            <a:off x="3090672" y="1874519"/>
+            <a:ext cx="2148840" cy="1280160"/>
+          </a:xfrm>
+          <a:prstGeom prst="roundRect">
+            <a:avLst/>
+          </a:prstGeom>
+          <a:solidFill>
+            <a:srgbClr val="1B263B"/>
+          </a:solidFill>
+          <a:ln>
+            <a:solidFill>
+              <a:srgbClr val="415A77"/>
+            </a:solidFill>
+          </a:ln>
+        </p:spPr>
+        <p:style>
+          <a:lnRef idx="1">
+            <a:schemeClr val="accent1"/>
+          </a:lnRef>
+          <a:fillRef idx="3">
+            <a:schemeClr val="accent1"/>
+          </a:fillRef>
+          <a:effectRef idx="2">
+            <a:schemeClr val="accent1"/>
+          </a:effectRef>
+          <a:fontRef idx="minor">
+            <a:schemeClr val="lt1"/>
+          </a:fontRef>
+        </p:style>
+        <p:txBody>
+          <a:bodyPr rtlCol="0" anchor="ctr"/>
+          <a:lstStyle/>
+          <a:p>
+            <a:pPr algn="ctr"/>
+          </a:p>
+        </p:txBody>
+      </p:sp>
+      <p:sp>
+        <p:nvSpPr>
+          <p:cNvPr id="10" name="TextBox 9"/>
+          <p:cNvSpPr txBox="1"/>
+          <p:nvPr/>
+        </p:nvSpPr>
+        <p:spPr>
+          <a:xfrm>
+            <a:off x="3291840" y="2020823"/>
+            <a:ext cx="1600200" cy="256032"/>
+          </a:xfrm>
+          <a:prstGeom prst="rect">
+            <a:avLst/>
+          </a:prstGeom>
+          <a:noFill/>
+        </p:spPr>
+        <p:txBody>
+          <a:bodyPr wrap="square">
+            <a:spAutoFit/>
+          </a:bodyPr>
+          <a:lstStyle/>
+          <a:p>
+            <a:r>
+              <a:rPr sz="1200" b="1">
+                <a:solidFill>
+                  <a:srgbClr val="E6BE5A"/>
+                </a:solidFill>
+              </a:rPr>
+              <a:t>Safer</a:t>
+            </a:r>
+          </a:p>
+        </p:txBody>
+      </p:sp>
+      <p:sp>
+        <p:nvSpPr>
+          <p:cNvPr id="11" name="TextBox 10"/>
+          <p:cNvSpPr txBox="1"/>
+          <p:nvPr/>
+        </p:nvSpPr>
+        <p:spPr>
+          <a:xfrm>
+            <a:off x="3291840" y="2295143"/>
+            <a:ext cx="1600200" cy="603504"/>
+          </a:xfrm>
+          <a:prstGeom prst="rect">
+            <a:avLst/>
+          </a:prstGeom>
+          <a:noFill/>
+        </p:spPr>
+        <p:txBody>
+          <a:bodyPr wrap="square" anchor="ctr">
+            <a:spAutoFit/>
+          </a:bodyPr>
+          <a:lstStyle/>
+          <a:p>
+            <a:pPr algn="l"/>
+            <a:r>
+              <a:rPr sz="1500" b="1">
+                <a:solidFill>
+                  <a:srgbClr val="E7EEF7"/>
+                </a:solidFill>
+                <a:latin typeface="Aptos Display"/>
+              </a:rPr>
+              <a:t>Preflight before build</a:t>
+            </a:r>
+          </a:p>
+        </p:txBody>
+      </p:sp>
+      <p:sp>
+        <p:nvSpPr>
+          <p:cNvPr id="12" name="Rounded Rectangle 11"/>
+          <p:cNvSpPr/>
+          <p:nvPr/>
+        </p:nvSpPr>
+        <p:spPr>
+          <a:xfrm>
+            <a:off x="5522976" y="1874519"/>
+            <a:ext cx="2148840" cy="1280160"/>
+          </a:xfrm>
+          <a:prstGeom prst="roundRect">
+            <a:avLst/>
+          </a:prstGeom>
+          <a:solidFill>
+            <a:srgbClr val="1B263B"/>
+          </a:solidFill>
+          <a:ln>
+            <a:solidFill>
+              <a:srgbClr val="415A77"/>
+            </a:solidFill>
+          </a:ln>
+        </p:spPr>
+        <p:style>
+          <a:lnRef idx="1">
+            <a:schemeClr val="accent1"/>
+          </a:lnRef>
+          <a:fillRef idx="3">
+            <a:schemeClr val="accent1"/>
+          </a:fillRef>
+          <a:effectRef idx="2">
+            <a:schemeClr val="accent1"/>
+          </a:effectRef>
+          <a:fontRef idx="minor">
+            <a:schemeClr val="lt1"/>
+          </a:fontRef>
+        </p:style>
+        <p:txBody>
+          <a:bodyPr rtlCol="0" anchor="ctr"/>
+          <a:lstStyle/>
+          <a:p>
+            <a:pPr algn="ctr"/>
+          </a:p>
+        </p:txBody>
+      </p:sp>
+      <p:sp>
+        <p:nvSpPr>
+          <p:cNvPr id="13" name="TextBox 12"/>
+          <p:cNvSpPr txBox="1"/>
+          <p:nvPr/>
+        </p:nvSpPr>
+        <p:spPr>
+          <a:xfrm>
+            <a:off x="5724144" y="2020823"/>
+            <a:ext cx="1600200" cy="256032"/>
+          </a:xfrm>
+          <a:prstGeom prst="rect">
+            <a:avLst/>
+          </a:prstGeom>
+          <a:noFill/>
+        </p:spPr>
+        <p:txBody>
+          <a:bodyPr wrap="square">
+            <a:spAutoFit/>
+          </a:bodyPr>
+          <a:lstStyle/>
+          <a:p>
+            <a:r>
+              <a:rPr sz="1200" b="1">
+                <a:solidFill>
+                  <a:srgbClr val="E6BE5A"/>
+                </a:solidFill>
+              </a:rPr>
+              <a:t>Repeatable</a:t>
+            </a:r>
+          </a:p>
+        </p:txBody>
+      </p:sp>
+      <p:sp>
+        <p:nvSpPr>
+          <p:cNvPr id="14" name="TextBox 13"/>
+          <p:cNvSpPr txBox="1"/>
+          <p:nvPr/>
+        </p:nvSpPr>
+        <p:spPr>
+          <a:xfrm>
+            <a:off x="5724144" y="2295143"/>
+            <a:ext cx="1600200" cy="603504"/>
+          </a:xfrm>
+          <a:prstGeom prst="rect">
+            <a:avLst/>
+          </a:prstGeom>
+          <a:noFill/>
+        </p:spPr>
+        <p:txBody>
+          <a:bodyPr wrap="square" anchor="ctr">
+            <a:spAutoFit/>
+          </a:bodyPr>
+          <a:lstStyle/>
+          <a:p>
+            <a:pPr algn="l"/>
+            <a:r>
+              <a:rPr sz="1500" b="1">
+                <a:solidFill>
+                  <a:srgbClr val="E7EEF7"/>
+                </a:solidFill>
+                <a:latin typeface="Aptos Display"/>
+              </a:rPr>
+              <a:t>CLI still available</a:t>
+            </a:r>
+          </a:p>
+        </p:txBody>
+      </p:sp>
+      <p:sp>
+        <p:nvSpPr>
+          <p:cNvPr id="15" name="Rounded Rectangle 14"/>
+          <p:cNvSpPr/>
+          <p:nvPr/>
+        </p:nvSpPr>
+        <p:spPr>
+          <a:xfrm>
+            <a:off x="658368" y="3611880"/>
+            <a:ext cx="7406640" cy="2331720"/>
+          </a:xfrm>
+          <a:prstGeom prst="roundRect">
+            <a:avLst/>
+          </a:prstGeom>
+          <a:solidFill>
+            <a:srgbClr val="1B263B"/>
+          </a:solidFill>
+          <a:ln>
+            <a:solidFill>
+              <a:srgbClr val="415A77"/>
+            </a:solidFill>
+          </a:ln>
+        </p:spPr>
+        <p:style>
+          <a:lnRef idx="1">
+            <a:schemeClr val="accent1"/>
+          </a:lnRef>
+          <a:fillRef idx="3">
+            <a:schemeClr val="accent1"/>
+          </a:fillRef>
+          <a:effectRef idx="2">
+            <a:schemeClr val="accent1"/>
+          </a:effectRef>
+          <a:fontRef idx="minor">
+            <a:schemeClr val="lt1"/>
+          </a:fontRef>
+        </p:style>
+        <p:txBody>
+          <a:bodyPr rtlCol="0" anchor="ctr"/>
+          <a:lstStyle/>
+          <a:p>
+            <a:pPr algn="ctr"/>
+          </a:p>
+        </p:txBody>
+      </p:sp>
+      <p:sp>
+        <p:nvSpPr>
+          <p:cNvPr id="16" name="TextBox 15"/>
+          <p:cNvSpPr txBox="1"/>
+          <p:nvPr/>
+        </p:nvSpPr>
+        <p:spPr>
+          <a:xfrm>
+            <a:off x="914400" y="3776472"/>
+            <a:ext cx="1920240" cy="320040"/>
           </a:xfrm>
           <a:prstGeom prst="rect">
             <a:avLst/>
@@ -5188,21 +3977,21 @@
                   <a:srgbClr val="E6BE5A"/>
                 </a:solidFill>
               </a:rPr>
-              <a:t>Operator Tips</a:t>
-            </a:r>
-          </a:p>
-        </p:txBody>
-      </p:sp>
-      <p:sp>
-        <p:nvSpPr>
-          <p:cNvPr id="19" name="TextBox 18"/>
+              <a:t>Key Points</a:t>
+            </a:r>
+          </a:p>
+        </p:txBody>
+      </p:sp>
+      <p:sp>
+        <p:nvSpPr>
+          <p:cNvPr id="17" name="TextBox 16"/>
           <p:cNvSpPr txBox="1"/>
           <p:nvPr/>
         </p:nvSpPr>
         <p:spPr>
           <a:xfrm>
-            <a:off x="9098280" y="1737360"/>
-            <a:ext cx="2148840" cy="4023360"/>
+            <a:off x="914400" y="4114800"/>
+            <a:ext cx="7059168" cy="1554480"/>
           </a:xfrm>
           <a:prstGeom prst="rect">
             <a:avLst/>
@@ -5216,8 +4005,11 @@
           <a:lstStyle/>
           <a:p>
             <a:pPr>
+              <a:lnSpc>
+                <a:spcPct val="105000"/>
+              </a:lnSpc>
               <a:spcAft>
-                <a:spcPts val="800"/>
+                <a:spcPts val="500"/>
               </a:spcAft>
             </a:pPr>
             <a:r>
@@ -5227,13 +4019,16 @@
                 </a:solidFill>
                 <a:latin typeface="Aptos"/>
               </a:rPr>
-              <a:t>Primary operator path is the local web UI on port 8080.</a:t>
+              <a:t>One entry point for prerequisite checks, build settings, and launch</a:t>
             </a:r>
           </a:p>
           <a:p>
             <a:pPr>
+              <a:lnSpc>
+                <a:spcPct val="105000"/>
+              </a:lnSpc>
               <a:spcAft>
-                <a:spcPts val="800"/>
+                <a:spcPts val="500"/>
               </a:spcAft>
             </a:pPr>
             <a:r>
@@ -5243,21 +4038,85 @@
                 </a:solidFill>
                 <a:latin typeface="Aptos"/>
               </a:rPr>
-              <a:t>CLI remains available for repeatable scripted runs.</a:t>
-            </a:r>
-          </a:p>
-        </p:txBody>
-      </p:sp>
-      <p:sp>
-        <p:nvSpPr>
-          <p:cNvPr id="20" name="TextBox 19"/>
+              <a:t>Less guesswork when Visual Studio, SDK, or bootstrap Python drift</a:t>
+            </a:r>
+          </a:p>
+          <a:p>
+            <a:pPr>
+              <a:lnSpc>
+                <a:spcPct val="105000"/>
+              </a:lnSpc>
+              <a:spcAft>
+                <a:spcPts val="500"/>
+              </a:spcAft>
+            </a:pPr>
+            <a:r>
+              <a:rPr sz="1400">
+                <a:solidFill>
+                  <a:srgbClr val="E7EEF7"/>
+                </a:solidFill>
+                <a:latin typeface="Aptos"/>
+              </a:rPr>
+              <a:t>Clearer failure handling than raw batch files alone</a:t>
+            </a:r>
+          </a:p>
+        </p:txBody>
+      </p:sp>
+      <p:sp>
+        <p:nvSpPr>
+          <p:cNvPr id="18" name="Rounded Rectangle 17"/>
+          <p:cNvSpPr/>
+          <p:nvPr/>
+        </p:nvSpPr>
+        <p:spPr>
+          <a:xfrm>
+            <a:off x="8823960" y="1097280"/>
+            <a:ext cx="2743200" cy="4937760"/>
+          </a:xfrm>
+          <a:prstGeom prst="roundRect">
+            <a:avLst/>
+          </a:prstGeom>
+          <a:solidFill>
+            <a:srgbClr val="1B263B"/>
+          </a:solidFill>
+          <a:ln>
+            <a:solidFill>
+              <a:srgbClr val="415A77"/>
+            </a:solidFill>
+          </a:ln>
+        </p:spPr>
+        <p:style>
+          <a:lnRef idx="1">
+            <a:schemeClr val="accent1"/>
+          </a:lnRef>
+          <a:fillRef idx="3">
+            <a:schemeClr val="accent1"/>
+          </a:fillRef>
+          <a:effectRef idx="2">
+            <a:schemeClr val="accent1"/>
+          </a:effectRef>
+          <a:fontRef idx="minor">
+            <a:schemeClr val="lt1"/>
+          </a:fontRef>
+        </p:style>
+        <p:txBody>
+          <a:bodyPr rtlCol="0" anchor="ctr"/>
+          <a:lstStyle/>
+          <a:p>
+            <a:pPr algn="ctr"/>
+          </a:p>
+        </p:txBody>
+      </p:sp>
+      <p:sp>
+        <p:nvSpPr>
+          <p:cNvPr id="19" name="TextBox 18"/>
           <p:cNvSpPr txBox="1"/>
           <p:nvPr/>
         </p:nvSpPr>
         <p:spPr>
           <a:xfrm>
-            <a:off x="411480" y="6446520"/>
-            <a:ext cx="6949440" cy="228600"/>
+            <a:off x="9098280" y="1325880"/>
+            <a:ext cx="2194560" cy="320040"/>
           </a:xfrm>
           <a:prstGeom prst="rect">
             <a:avLst/>
@@ -5270,6 +4129,81 @@
           </a:bodyPr>
           <a:lstStyle/>
           <a:p>
+            <a:r>
+              <a:rPr b="1" sz="1500">
+                <a:solidFill>
+                  <a:srgbClr val="E6BE5A"/>
+                </a:solidFill>
+              </a:rPr>
+              <a:t>Operator Angle</a:t>
+            </a:r>
+          </a:p>
+        </p:txBody>
+      </p:sp>
+      <p:sp>
+        <p:nvSpPr>
+          <p:cNvPr id="20" name="TextBox 19"/>
+          <p:cNvSpPr txBox="1"/>
+          <p:nvPr/>
+        </p:nvSpPr>
+        <p:spPr>
+          <a:xfrm>
+            <a:off x="9098280" y="1737360"/>
+            <a:ext cx="2148840" cy="4023360"/>
+          </a:xfrm>
+          <a:prstGeom prst="rect">
+            <a:avLst/>
+          </a:prstGeom>
+          <a:noFill/>
+        </p:spPr>
+        <p:txBody>
+          <a:bodyPr wrap="square">
+            <a:spAutoFit/>
+          </a:bodyPr>
+          <a:lstStyle/>
+          <a:p>
+            <a:pPr>
+              <a:lnSpc>
+                <a:spcPct val="105000"/>
+              </a:lnSpc>
+              <a:spcAft>
+                <a:spcPts val="500"/>
+              </a:spcAft>
+            </a:pPr>
+            <a:r>
+              <a:rPr sz="1300">
+                <a:solidFill>
+                  <a:srgbClr val="E7EEF7"/>
+                </a:solidFill>
+                <a:latin typeface="Aptos"/>
+              </a:rPr>
+              <a:t>Operators stay in one UI instead of jumping between scripts, docs, and environment probes.</a:t>
+            </a:r>
+          </a:p>
+        </p:txBody>
+      </p:sp>
+      <p:sp>
+        <p:nvSpPr>
+          <p:cNvPr id="21" name="TextBox 20"/>
+          <p:cNvSpPr txBox="1"/>
+          <p:nvPr/>
+        </p:nvSpPr>
+        <p:spPr>
+          <a:xfrm>
+            <a:off x="411480" y="6446520"/>
+            <a:ext cx="6949440" cy="228600"/>
+          </a:xfrm>
+          <a:prstGeom prst="rect">
+            <a:avLst/>
+          </a:prstGeom>
+          <a:noFill/>
+        </p:spPr>
+        <p:txBody>
+          <a:bodyPr wrap="none">
+            <a:spAutoFit/>
+          </a:bodyPr>
+          <a:lstStyle/>
+          <a:p>
             <a:pPr algn="l"/>
             <a:r>
               <a:rPr sz="1100">
@@ -5284,7 +4218,7 @@
       </p:sp>
       <p:sp>
         <p:nvSpPr>
-          <p:cNvPr id="21" name="TextBox 20"/>
+          <p:cNvPr id="22" name="TextBox 21"/>
           <p:cNvSpPr txBox="1"/>
           <p:nvPr/>
         </p:nvSpPr>
@@ -5449,7 +4383,7 @@
                 </a:solidFill>
                 <a:latin typeface="Aptos Display"/>
               </a:rPr>
-              <a:t>Before You Start</a:t>
+              <a:t>Standard Operator Workflow</a:t>
             </a:r>
           </a:p>
         </p:txBody>
@@ -5477,27 +4411,580 @@
           <a:lstStyle/>
           <a:p>
             <a:r>
-              <a:rPr sz="1400">
+              <a:rPr sz="1300">
                 <a:solidFill>
                   <a:srgbClr val="E8EEF4"/>
                 </a:solidFill>
                 <a:latin typeface="Aptos"/>
               </a:rPr>
-              <a:t>Environment prerequisites to clear before opening PSUB</a:t>
-            </a:r>
-          </a:p>
-        </p:txBody>
-      </p:sp>
-      <p:sp>
-        <p:nvSpPr>
-          <p:cNvPr id="6" name="Rounded Rectangle 5"/>
+              <a:t>The repeatable sequence that keeps failures visible</a:t>
+            </a:r>
+          </a:p>
+        </p:txBody>
+      </p:sp>
+      <p:sp>
+        <p:nvSpPr>
+          <p:cNvPr id="6" name="Rectangle 5"/>
           <p:cNvSpPr/>
           <p:nvPr/>
         </p:nvSpPr>
         <p:spPr>
           <a:xfrm>
-            <a:off x="548640" y="1783080"/>
-            <a:ext cx="7818120" cy="4480560"/>
+            <a:off x="1239012" y="2880360"/>
+            <a:ext cx="6446519" cy="54864"/>
+          </a:xfrm>
+          <a:prstGeom prst="rect">
+            <a:avLst/>
+          </a:prstGeom>
+          <a:solidFill>
+            <a:srgbClr val="415A77"/>
+          </a:solidFill>
+          <a:ln>
+            <a:noFill/>
+          </a:ln>
+        </p:spPr>
+        <p:style>
+          <a:lnRef idx="1">
+            <a:schemeClr val="accent1"/>
+          </a:lnRef>
+          <a:fillRef idx="3">
+            <a:schemeClr val="accent1"/>
+          </a:fillRef>
+          <a:effectRef idx="2">
+            <a:schemeClr val="accent1"/>
+          </a:effectRef>
+          <a:fontRef idx="minor">
+            <a:schemeClr val="lt1"/>
+          </a:fontRef>
+        </p:style>
+        <p:txBody>
+          <a:bodyPr rtlCol="0" anchor="ctr"/>
+          <a:lstStyle/>
+          <a:p>
+            <a:pPr algn="ctr"/>
+          </a:p>
+        </p:txBody>
+      </p:sp>
+      <p:sp>
+        <p:nvSpPr>
+          <p:cNvPr id="7" name="Rounded Rectangle 6"/>
+          <p:cNvSpPr/>
+          <p:nvPr/>
+        </p:nvSpPr>
+        <p:spPr>
+          <a:xfrm>
+            <a:off x="713232" y="2331720"/>
+            <a:ext cx="1051560" cy="914400"/>
+          </a:xfrm>
+          <a:prstGeom prst="roundRect">
+            <a:avLst/>
+          </a:prstGeom>
+          <a:solidFill>
+            <a:srgbClr val="3F72AF"/>
+          </a:solidFill>
+          <a:ln>
+            <a:noFill/>
+          </a:ln>
+        </p:spPr>
+        <p:style>
+          <a:lnRef idx="1">
+            <a:schemeClr val="accent1"/>
+          </a:lnRef>
+          <a:fillRef idx="3">
+            <a:schemeClr val="accent1"/>
+          </a:fillRef>
+          <a:effectRef idx="2">
+            <a:schemeClr val="accent1"/>
+          </a:effectRef>
+          <a:fontRef idx="minor">
+            <a:schemeClr val="lt1"/>
+          </a:fontRef>
+        </p:style>
+        <p:txBody>
+          <a:bodyPr rtlCol="0" anchor="ctr"/>
+          <a:lstStyle/>
+          <a:p>
+            <a:pPr algn="ctr"/>
+            <a:r>
+              <a:rPr sz="2000" b="1">
+                <a:solidFill>
+                  <a:srgbClr val="E7EEF7"/>
+                </a:solidFill>
+              </a:rPr>
+              <a:t>1</a:t>
+            </a:r>
+          </a:p>
+        </p:txBody>
+      </p:sp>
+      <p:sp>
+        <p:nvSpPr>
+          <p:cNvPr id="8" name="TextBox 7"/>
+          <p:cNvSpPr txBox="1"/>
+          <p:nvPr/>
+        </p:nvSpPr>
+        <p:spPr>
+          <a:xfrm>
+            <a:off x="603504" y="3401568"/>
+            <a:ext cx="1271016" cy="960120"/>
+          </a:xfrm>
+          <a:prstGeom prst="rect">
+            <a:avLst/>
+          </a:prstGeom>
+          <a:noFill/>
+        </p:spPr>
+        <p:txBody>
+          <a:bodyPr wrap="square">
+            <a:spAutoFit/>
+          </a:bodyPr>
+          <a:lstStyle/>
+          <a:p>
+            <a:pPr algn="ctr"/>
+            <a:r>
+              <a:rPr sz="1050">
+                <a:solidFill>
+                  <a:srgbClr val="E7EEF7"/>
+                </a:solidFill>
+              </a:rPr>
+              <a:t>Open PSUB</a:t>
+            </a:r>
+          </a:p>
+        </p:txBody>
+      </p:sp>
+      <p:sp>
+        <p:nvSpPr>
+          <p:cNvPr id="9" name="Rounded Rectangle 8"/>
+          <p:cNvSpPr/>
+          <p:nvPr/>
+        </p:nvSpPr>
+        <p:spPr>
+          <a:xfrm>
+            <a:off x="2002535" y="2331720"/>
+            <a:ext cx="1051560" cy="914400"/>
+          </a:xfrm>
+          <a:prstGeom prst="roundRect">
+            <a:avLst/>
+          </a:prstGeom>
+          <a:solidFill>
+            <a:srgbClr val="415A77"/>
+          </a:solidFill>
+          <a:ln>
+            <a:noFill/>
+          </a:ln>
+        </p:spPr>
+        <p:style>
+          <a:lnRef idx="1">
+            <a:schemeClr val="accent1"/>
+          </a:lnRef>
+          <a:fillRef idx="3">
+            <a:schemeClr val="accent1"/>
+          </a:fillRef>
+          <a:effectRef idx="2">
+            <a:schemeClr val="accent1"/>
+          </a:effectRef>
+          <a:fontRef idx="minor">
+            <a:schemeClr val="lt1"/>
+          </a:fontRef>
+        </p:style>
+        <p:txBody>
+          <a:bodyPr rtlCol="0" anchor="ctr"/>
+          <a:lstStyle/>
+          <a:p>
+            <a:pPr algn="ctr"/>
+            <a:r>
+              <a:rPr sz="2000" b="1">
+                <a:solidFill>
+                  <a:srgbClr val="E7EEF7"/>
+                </a:solidFill>
+              </a:rPr>
+              <a:t>2</a:t>
+            </a:r>
+          </a:p>
+        </p:txBody>
+      </p:sp>
+      <p:sp>
+        <p:nvSpPr>
+          <p:cNvPr id="10" name="TextBox 9"/>
+          <p:cNvSpPr txBox="1"/>
+          <p:nvPr/>
+        </p:nvSpPr>
+        <p:spPr>
+          <a:xfrm>
+            <a:off x="1892807" y="3401568"/>
+            <a:ext cx="1271016" cy="960120"/>
+          </a:xfrm>
+          <a:prstGeom prst="rect">
+            <a:avLst/>
+          </a:prstGeom>
+          <a:noFill/>
+        </p:spPr>
+        <p:txBody>
+          <a:bodyPr wrap="square">
+            <a:spAutoFit/>
+          </a:bodyPr>
+          <a:lstStyle/>
+          <a:p>
+            <a:pPr algn="ctr"/>
+            <a:r>
+              <a:rPr sz="1050">
+                <a:solidFill>
+                  <a:srgbClr val="E7EEF7"/>
+                </a:solidFill>
+              </a:rPr>
+              <a:t>Confirm prerequisites</a:t>
+            </a:r>
+          </a:p>
+        </p:txBody>
+      </p:sp>
+      <p:sp>
+        <p:nvSpPr>
+          <p:cNvPr id="11" name="Rounded Rectangle 10"/>
+          <p:cNvSpPr/>
+          <p:nvPr/>
+        </p:nvSpPr>
+        <p:spPr>
+          <a:xfrm>
+            <a:off x="3291839" y="2331720"/>
+            <a:ext cx="1051560" cy="914400"/>
+          </a:xfrm>
+          <a:prstGeom prst="roundRect">
+            <a:avLst/>
+          </a:prstGeom>
+          <a:solidFill>
+            <a:srgbClr val="3F72AF"/>
+          </a:solidFill>
+          <a:ln>
+            <a:noFill/>
+          </a:ln>
+        </p:spPr>
+        <p:style>
+          <a:lnRef idx="1">
+            <a:schemeClr val="accent1"/>
+          </a:lnRef>
+          <a:fillRef idx="3">
+            <a:schemeClr val="accent1"/>
+          </a:fillRef>
+          <a:effectRef idx="2">
+            <a:schemeClr val="accent1"/>
+          </a:effectRef>
+          <a:fontRef idx="minor">
+            <a:schemeClr val="lt1"/>
+          </a:fontRef>
+        </p:style>
+        <p:txBody>
+          <a:bodyPr rtlCol="0" anchor="ctr"/>
+          <a:lstStyle/>
+          <a:p>
+            <a:pPr algn="ctr"/>
+            <a:r>
+              <a:rPr sz="2000" b="1">
+                <a:solidFill>
+                  <a:srgbClr val="E7EEF7"/>
+                </a:solidFill>
+              </a:rPr>
+              <a:t>3</a:t>
+            </a:r>
+          </a:p>
+        </p:txBody>
+      </p:sp>
+      <p:sp>
+        <p:nvSpPr>
+          <p:cNvPr id="12" name="TextBox 11"/>
+          <p:cNvSpPr txBox="1"/>
+          <p:nvPr/>
+        </p:nvSpPr>
+        <p:spPr>
+          <a:xfrm>
+            <a:off x="3182111" y="3401568"/>
+            <a:ext cx="1271016" cy="960120"/>
+          </a:xfrm>
+          <a:prstGeom prst="rect">
+            <a:avLst/>
+          </a:prstGeom>
+          <a:noFill/>
+        </p:spPr>
+        <p:txBody>
+          <a:bodyPr wrap="square">
+            <a:spAutoFit/>
+          </a:bodyPr>
+          <a:lstStyle/>
+          <a:p>
+            <a:pPr algn="ctr"/>
+            <a:r>
+              <a:rPr sz="1050">
+                <a:solidFill>
+                  <a:srgbClr val="E7EEF7"/>
+                </a:solidFill>
+              </a:rPr>
+              <a:t>Set source and bootstrap Python</a:t>
+            </a:r>
+          </a:p>
+        </p:txBody>
+      </p:sp>
+      <p:sp>
+        <p:nvSpPr>
+          <p:cNvPr id="13" name="Rounded Rectangle 12"/>
+          <p:cNvSpPr/>
+          <p:nvPr/>
+        </p:nvSpPr>
+        <p:spPr>
+          <a:xfrm>
+            <a:off x="4581143" y="2331720"/>
+            <a:ext cx="1051560" cy="914400"/>
+          </a:xfrm>
+          <a:prstGeom prst="roundRect">
+            <a:avLst/>
+          </a:prstGeom>
+          <a:solidFill>
+            <a:srgbClr val="415A77"/>
+          </a:solidFill>
+          <a:ln>
+            <a:noFill/>
+          </a:ln>
+        </p:spPr>
+        <p:style>
+          <a:lnRef idx="1">
+            <a:schemeClr val="accent1"/>
+          </a:lnRef>
+          <a:fillRef idx="3">
+            <a:schemeClr val="accent1"/>
+          </a:fillRef>
+          <a:effectRef idx="2">
+            <a:schemeClr val="accent1"/>
+          </a:effectRef>
+          <a:fontRef idx="minor">
+            <a:schemeClr val="lt1"/>
+          </a:fontRef>
+        </p:style>
+        <p:txBody>
+          <a:bodyPr rtlCol="0" anchor="ctr"/>
+          <a:lstStyle/>
+          <a:p>
+            <a:pPr algn="ctr"/>
+            <a:r>
+              <a:rPr sz="2000" b="1">
+                <a:solidFill>
+                  <a:srgbClr val="E7EEF7"/>
+                </a:solidFill>
+              </a:rPr>
+              <a:t>4</a:t>
+            </a:r>
+          </a:p>
+        </p:txBody>
+      </p:sp>
+      <p:sp>
+        <p:nvSpPr>
+          <p:cNvPr id="14" name="TextBox 13"/>
+          <p:cNvSpPr txBox="1"/>
+          <p:nvPr/>
+        </p:nvSpPr>
+        <p:spPr>
+          <a:xfrm>
+            <a:off x="4471415" y="3401568"/>
+            <a:ext cx="1271016" cy="960120"/>
+          </a:xfrm>
+          <a:prstGeom prst="rect">
+            <a:avLst/>
+          </a:prstGeom>
+          <a:noFill/>
+        </p:spPr>
+        <p:txBody>
+          <a:bodyPr wrap="square">
+            <a:spAutoFit/>
+          </a:bodyPr>
+          <a:lstStyle/>
+          <a:p>
+            <a:pPr algn="ctr"/>
+            <a:r>
+              <a:rPr sz="1050">
+                <a:solidFill>
+                  <a:srgbClr val="E7EEF7"/>
+                </a:solidFill>
+              </a:rPr>
+              <a:t>Create or refresh doc-venv</a:t>
+            </a:r>
+          </a:p>
+        </p:txBody>
+      </p:sp>
+      <p:sp>
+        <p:nvSpPr>
+          <p:cNvPr id="15" name="Rounded Rectangle 14"/>
+          <p:cNvSpPr/>
+          <p:nvPr/>
+        </p:nvSpPr>
+        <p:spPr>
+          <a:xfrm>
+            <a:off x="5870447" y="2331720"/>
+            <a:ext cx="1051560" cy="914400"/>
+          </a:xfrm>
+          <a:prstGeom prst="roundRect">
+            <a:avLst/>
+          </a:prstGeom>
+          <a:solidFill>
+            <a:srgbClr val="3F72AF"/>
+          </a:solidFill>
+          <a:ln>
+            <a:noFill/>
+          </a:ln>
+        </p:spPr>
+        <p:style>
+          <a:lnRef idx="1">
+            <a:schemeClr val="accent1"/>
+          </a:lnRef>
+          <a:fillRef idx="3">
+            <a:schemeClr val="accent1"/>
+          </a:fillRef>
+          <a:effectRef idx="2">
+            <a:schemeClr val="accent1"/>
+          </a:effectRef>
+          <a:fontRef idx="minor">
+            <a:schemeClr val="lt1"/>
+          </a:fontRef>
+        </p:style>
+        <p:txBody>
+          <a:bodyPr rtlCol="0" anchor="ctr"/>
+          <a:lstStyle/>
+          <a:p>
+            <a:pPr algn="ctr"/>
+            <a:r>
+              <a:rPr sz="2000" b="1">
+                <a:solidFill>
+                  <a:srgbClr val="E7EEF7"/>
+                </a:solidFill>
+              </a:rPr>
+              <a:t>5</a:t>
+            </a:r>
+          </a:p>
+        </p:txBody>
+      </p:sp>
+      <p:sp>
+        <p:nvSpPr>
+          <p:cNvPr id="16" name="TextBox 15"/>
+          <p:cNvSpPr txBox="1"/>
+          <p:nvPr/>
+        </p:nvSpPr>
+        <p:spPr>
+          <a:xfrm>
+            <a:off x="5760719" y="3401568"/>
+            <a:ext cx="1271016" cy="960120"/>
+          </a:xfrm>
+          <a:prstGeom prst="rect">
+            <a:avLst/>
+          </a:prstGeom>
+          <a:noFill/>
+        </p:spPr>
+        <p:txBody>
+          <a:bodyPr wrap="square">
+            <a:spAutoFit/>
+          </a:bodyPr>
+          <a:lstStyle/>
+          <a:p>
+            <a:pPr algn="ctr"/>
+            <a:r>
+              <a:rPr sz="1050">
+                <a:solidFill>
+                  <a:srgbClr val="E7EEF7"/>
+                </a:solidFill>
+              </a:rPr>
+              <a:t>Start build</a:t>
+            </a:r>
+          </a:p>
+        </p:txBody>
+      </p:sp>
+      <p:sp>
+        <p:nvSpPr>
+          <p:cNvPr id="17" name="Rounded Rectangle 16"/>
+          <p:cNvSpPr/>
+          <p:nvPr/>
+        </p:nvSpPr>
+        <p:spPr>
+          <a:xfrm>
+            <a:off x="7159751" y="2331720"/>
+            <a:ext cx="1051560" cy="914400"/>
+          </a:xfrm>
+          <a:prstGeom prst="roundRect">
+            <a:avLst/>
+          </a:prstGeom>
+          <a:solidFill>
+            <a:srgbClr val="415A77"/>
+          </a:solidFill>
+          <a:ln>
+            <a:noFill/>
+          </a:ln>
+        </p:spPr>
+        <p:style>
+          <a:lnRef idx="1">
+            <a:schemeClr val="accent1"/>
+          </a:lnRef>
+          <a:fillRef idx="3">
+            <a:schemeClr val="accent1"/>
+          </a:fillRef>
+          <a:effectRef idx="2">
+            <a:schemeClr val="accent1"/>
+          </a:effectRef>
+          <a:fontRef idx="minor">
+            <a:schemeClr val="lt1"/>
+          </a:fontRef>
+        </p:style>
+        <p:txBody>
+          <a:bodyPr rtlCol="0" anchor="ctr"/>
+          <a:lstStyle/>
+          <a:p>
+            <a:pPr algn="ctr"/>
+            <a:r>
+              <a:rPr sz="2000" b="1">
+                <a:solidFill>
+                  <a:srgbClr val="E7EEF7"/>
+                </a:solidFill>
+              </a:rPr>
+              <a:t>6</a:t>
+            </a:r>
+          </a:p>
+        </p:txBody>
+      </p:sp>
+      <p:sp>
+        <p:nvSpPr>
+          <p:cNvPr id="18" name="TextBox 17"/>
+          <p:cNvSpPr txBox="1"/>
+          <p:nvPr/>
+        </p:nvSpPr>
+        <p:spPr>
+          <a:xfrm>
+            <a:off x="7050023" y="3401568"/>
+            <a:ext cx="1271016" cy="960120"/>
+          </a:xfrm>
+          <a:prstGeom prst="rect">
+            <a:avLst/>
+          </a:prstGeom>
+          <a:noFill/>
+        </p:spPr>
+        <p:txBody>
+          <a:bodyPr wrap="square">
+            <a:spAutoFit/>
+          </a:bodyPr>
+          <a:lstStyle/>
+          <a:p>
+            <a:pPr algn="ctr"/>
+            <a:r>
+              <a:rPr sz="1050">
+                <a:solidFill>
+                  <a:srgbClr val="E7EEF7"/>
+                </a:solidFill>
+              </a:rPr>
+              <a:t>Review log and collect artifacts</a:t>
+            </a:r>
+          </a:p>
+        </p:txBody>
+      </p:sp>
+      <p:sp>
+        <p:nvSpPr>
+          <p:cNvPr id="19" name="Rounded Rectangle 18"/>
+          <p:cNvSpPr/>
+          <p:nvPr/>
+        </p:nvSpPr>
+        <p:spPr>
+          <a:xfrm>
+            <a:off x="8823960" y="1097280"/>
+            <a:ext cx="2743200" cy="4937760"/>
           </a:xfrm>
           <a:prstGeom prst="roundRect">
             <a:avLst/>
@@ -5535,57 +5022,14 @@
       </p:sp>
       <p:sp>
         <p:nvSpPr>
-          <p:cNvPr id="7" name="Oval 6"/>
-          <p:cNvSpPr/>
-          <p:nvPr/>
-        </p:nvSpPr>
-        <p:spPr>
-          <a:xfrm>
-            <a:off x="841248" y="2029968"/>
-            <a:ext cx="256032" cy="256032"/>
-          </a:xfrm>
-          <a:prstGeom prst="ellipse">
-            <a:avLst/>
-          </a:prstGeom>
-          <a:solidFill>
-            <a:srgbClr val="26A65B"/>
-          </a:solidFill>
-          <a:ln>
-            <a:noFill/>
-          </a:ln>
-        </p:spPr>
-        <p:style>
-          <a:lnRef idx="1">
-            <a:schemeClr val="accent1"/>
-          </a:lnRef>
-          <a:fillRef idx="3">
-            <a:schemeClr val="accent1"/>
-          </a:fillRef>
-          <a:effectRef idx="2">
-            <a:schemeClr val="accent1"/>
-          </a:effectRef>
-          <a:fontRef idx="minor">
-            <a:schemeClr val="lt1"/>
-          </a:fontRef>
-        </p:style>
-        <p:txBody>
-          <a:bodyPr rtlCol="0" anchor="ctr"/>
-          <a:lstStyle/>
-          <a:p>
-            <a:pPr algn="ctr"/>
-          </a:p>
-        </p:txBody>
-      </p:sp>
-      <p:sp>
-        <p:nvSpPr>
-          <p:cNvPr id="8" name="TextBox 7"/>
+          <p:cNvPr id="20" name="TextBox 19"/>
           <p:cNvSpPr txBox="1"/>
           <p:nvPr/>
         </p:nvSpPr>
         <p:spPr>
           <a:xfrm>
-            <a:off x="1170432" y="1993392"/>
-            <a:ext cx="6812280" cy="347472"/>
+            <a:off x="9098280" y="1325880"/>
+            <a:ext cx="2194560" cy="320040"/>
           </a:xfrm>
           <a:prstGeom prst="rect">
             <a:avLst/>
@@ -5599,470 +5043,12 @@
           <a:lstStyle/>
           <a:p>
             <a:r>
-              <a:rPr sz="1700">
-                <a:solidFill>
-                  <a:srgbClr val="E7EEF7"/>
-                </a:solidFill>
-              </a:rPr>
-              <a:t>Visual Studio 2019 or 2022 with Desktop development with C++</a:t>
-            </a:r>
-          </a:p>
-        </p:txBody>
-      </p:sp>
-      <p:sp>
-        <p:nvSpPr>
-          <p:cNvPr id="9" name="Oval 8"/>
-          <p:cNvSpPr/>
-          <p:nvPr/>
-        </p:nvSpPr>
-        <p:spPr>
-          <a:xfrm>
-            <a:off x="841248" y="2642616"/>
-            <a:ext cx="256032" cy="256032"/>
-          </a:xfrm>
-          <a:prstGeom prst="ellipse">
-            <a:avLst/>
-          </a:prstGeom>
-          <a:solidFill>
-            <a:srgbClr val="26A65B"/>
-          </a:solidFill>
-          <a:ln>
-            <a:noFill/>
-          </a:ln>
-        </p:spPr>
-        <p:style>
-          <a:lnRef idx="1">
-            <a:schemeClr val="accent1"/>
-          </a:lnRef>
-          <a:fillRef idx="3">
-            <a:schemeClr val="accent1"/>
-          </a:fillRef>
-          <a:effectRef idx="2">
-            <a:schemeClr val="accent1"/>
-          </a:effectRef>
-          <a:fontRef idx="minor">
-            <a:schemeClr val="lt1"/>
-          </a:fontRef>
-        </p:style>
-        <p:txBody>
-          <a:bodyPr rtlCol="0" anchor="ctr"/>
-          <a:lstStyle/>
-          <a:p>
-            <a:pPr algn="ctr"/>
-          </a:p>
-        </p:txBody>
-      </p:sp>
-      <p:sp>
-        <p:nvSpPr>
-          <p:cNvPr id="10" name="TextBox 9"/>
-          <p:cNvSpPr txBox="1"/>
-          <p:nvPr/>
-        </p:nvSpPr>
-        <p:spPr>
-          <a:xfrm>
-            <a:off x="1170432" y="2606040"/>
-            <a:ext cx="6812280" cy="347472"/>
-          </a:xfrm>
-          <a:prstGeom prst="rect">
-            <a:avLst/>
-          </a:prstGeom>
-          <a:noFill/>
-        </p:spPr>
-        <p:txBody>
-          <a:bodyPr wrap="none">
-            <a:spAutoFit/>
-          </a:bodyPr>
-          <a:lstStyle/>
-          <a:p>
-            <a:r>
-              <a:rPr sz="1700">
-                <a:solidFill>
-                  <a:srgbClr val="E7EEF7"/>
-                </a:solidFill>
-              </a:rPr>
-              <a:t>MSVC toolchains including x64, x86, and ARM64</a:t>
-            </a:r>
-          </a:p>
-        </p:txBody>
-      </p:sp>
-      <p:sp>
-        <p:nvSpPr>
-          <p:cNvPr id="11" name="Oval 10"/>
-          <p:cNvSpPr/>
-          <p:nvPr/>
-        </p:nvSpPr>
-        <p:spPr>
-          <a:xfrm>
-            <a:off x="841248" y="3255264"/>
-            <a:ext cx="256032" cy="256032"/>
-          </a:xfrm>
-          <a:prstGeom prst="ellipse">
-            <a:avLst/>
-          </a:prstGeom>
-          <a:solidFill>
-            <a:srgbClr val="26A65B"/>
-          </a:solidFill>
-          <a:ln>
-            <a:noFill/>
-          </a:ln>
-        </p:spPr>
-        <p:style>
-          <a:lnRef idx="1">
-            <a:schemeClr val="accent1"/>
-          </a:lnRef>
-          <a:fillRef idx="3">
-            <a:schemeClr val="accent1"/>
-          </a:fillRef>
-          <a:effectRef idx="2">
-            <a:schemeClr val="accent1"/>
-          </a:effectRef>
-          <a:fontRef idx="minor">
-            <a:schemeClr val="lt1"/>
-          </a:fontRef>
-        </p:style>
-        <p:txBody>
-          <a:bodyPr rtlCol="0" anchor="ctr"/>
-          <a:lstStyle/>
-          <a:p>
-            <a:pPr algn="ctr"/>
-          </a:p>
-        </p:txBody>
-      </p:sp>
-      <p:sp>
-        <p:nvSpPr>
-          <p:cNvPr id="12" name="TextBox 11"/>
-          <p:cNvSpPr txBox="1"/>
-          <p:nvPr/>
-        </p:nvSpPr>
-        <p:spPr>
-          <a:xfrm>
-            <a:off x="1170432" y="3218688"/>
-            <a:ext cx="6812280" cy="347472"/>
-          </a:xfrm>
-          <a:prstGeom prst="rect">
-            <a:avLst/>
-          </a:prstGeom>
-          <a:noFill/>
-        </p:spPr>
-        <p:txBody>
-          <a:bodyPr wrap="none">
-            <a:spAutoFit/>
-          </a:bodyPr>
-          <a:lstStyle/>
-          <a:p>
-            <a:r>
-              <a:rPr sz="1700">
-                <a:solidFill>
-                  <a:srgbClr val="E7EEF7"/>
-                </a:solidFill>
-              </a:rPr>
-              <a:t>Windows 10 SDK 10.0.19041.0 or later</a:t>
-            </a:r>
-          </a:p>
-        </p:txBody>
-      </p:sp>
-      <p:sp>
-        <p:nvSpPr>
-          <p:cNvPr id="13" name="Oval 12"/>
-          <p:cNvSpPr/>
-          <p:nvPr/>
-        </p:nvSpPr>
-        <p:spPr>
-          <a:xfrm>
-            <a:off x="841248" y="3867912"/>
-            <a:ext cx="256032" cy="256032"/>
-          </a:xfrm>
-          <a:prstGeom prst="ellipse">
-            <a:avLst/>
-          </a:prstGeom>
-          <a:solidFill>
-            <a:srgbClr val="26A65B"/>
-          </a:solidFill>
-          <a:ln>
-            <a:noFill/>
-          </a:ln>
-        </p:spPr>
-        <p:style>
-          <a:lnRef idx="1">
-            <a:schemeClr val="accent1"/>
-          </a:lnRef>
-          <a:fillRef idx="3">
-            <a:schemeClr val="accent1"/>
-          </a:fillRef>
-          <a:effectRef idx="2">
-            <a:schemeClr val="accent1"/>
-          </a:effectRef>
-          <a:fontRef idx="minor">
-            <a:schemeClr val="lt1"/>
-          </a:fontRef>
-        </p:style>
-        <p:txBody>
-          <a:bodyPr rtlCol="0" anchor="ctr"/>
-          <a:lstStyle/>
-          <a:p>
-            <a:pPr algn="ctr"/>
-          </a:p>
-        </p:txBody>
-      </p:sp>
-      <p:sp>
-        <p:nvSpPr>
-          <p:cNvPr id="14" name="TextBox 13"/>
-          <p:cNvSpPr txBox="1"/>
-          <p:nvPr/>
-        </p:nvSpPr>
-        <p:spPr>
-          <a:xfrm>
-            <a:off x="1170432" y="3831336"/>
-            <a:ext cx="6812280" cy="347472"/>
-          </a:xfrm>
-          <a:prstGeom prst="rect">
-            <a:avLst/>
-          </a:prstGeom>
-          <a:noFill/>
-        </p:spPr>
-        <p:txBody>
-          <a:bodyPr wrap="none">
-            <a:spAutoFit/>
-          </a:bodyPr>
-          <a:lstStyle/>
-          <a:p>
-            <a:r>
-              <a:rPr sz="1700">
-                <a:solidFill>
-                  <a:srgbClr val="E7EEF7"/>
-                </a:solidFill>
-              </a:rPr>
-              <a:t>Bootstrap Python 3.10 or 3.12</a:t>
-            </a:r>
-          </a:p>
-        </p:txBody>
-      </p:sp>
-      <p:sp>
-        <p:nvSpPr>
-          <p:cNvPr id="15" name="Oval 14"/>
-          <p:cNvSpPr/>
-          <p:nvPr/>
-        </p:nvSpPr>
-        <p:spPr>
-          <a:xfrm>
-            <a:off x="841248" y="4480560"/>
-            <a:ext cx="256032" cy="256032"/>
-          </a:xfrm>
-          <a:prstGeom prst="ellipse">
-            <a:avLst/>
-          </a:prstGeom>
-          <a:solidFill>
-            <a:srgbClr val="26A65B"/>
-          </a:solidFill>
-          <a:ln>
-            <a:noFill/>
-          </a:ln>
-        </p:spPr>
-        <p:style>
-          <a:lnRef idx="1">
-            <a:schemeClr val="accent1"/>
-          </a:lnRef>
-          <a:fillRef idx="3">
-            <a:schemeClr val="accent1"/>
-          </a:fillRef>
-          <a:effectRef idx="2">
-            <a:schemeClr val="accent1"/>
-          </a:effectRef>
-          <a:fontRef idx="minor">
-            <a:schemeClr val="lt1"/>
-          </a:fontRef>
-        </p:style>
-        <p:txBody>
-          <a:bodyPr rtlCol="0" anchor="ctr"/>
-          <a:lstStyle/>
-          <a:p>
-            <a:pPr algn="ctr"/>
-          </a:p>
-        </p:txBody>
-      </p:sp>
-      <p:sp>
-        <p:nvSpPr>
-          <p:cNvPr id="16" name="TextBox 15"/>
-          <p:cNvSpPr txBox="1"/>
-          <p:nvPr/>
-        </p:nvSpPr>
-        <p:spPr>
-          <a:xfrm>
-            <a:off x="1170432" y="4443984"/>
-            <a:ext cx="6812280" cy="347472"/>
-          </a:xfrm>
-          <a:prstGeom prst="rect">
-            <a:avLst/>
-          </a:prstGeom>
-          <a:noFill/>
-        </p:spPr>
-        <p:txBody>
-          <a:bodyPr wrap="none">
-            <a:spAutoFit/>
-          </a:bodyPr>
-          <a:lstStyle/>
-          <a:p>
-            <a:r>
-              <a:rPr sz="1700">
-                <a:solidFill>
-                  <a:srgbClr val="E7EEF7"/>
-                </a:solidFill>
-              </a:rPr>
-              <a:t>Git for Windows on PATH</a:t>
-            </a:r>
-          </a:p>
-        </p:txBody>
-      </p:sp>
-      <p:sp>
-        <p:nvSpPr>
-          <p:cNvPr id="17" name="Oval 16"/>
-          <p:cNvSpPr/>
-          <p:nvPr/>
-        </p:nvSpPr>
-        <p:spPr>
-          <a:xfrm>
-            <a:off x="841248" y="5093208"/>
-            <a:ext cx="256032" cy="256032"/>
-          </a:xfrm>
-          <a:prstGeom prst="ellipse">
-            <a:avLst/>
-          </a:prstGeom>
-          <a:solidFill>
-            <a:srgbClr val="D87706"/>
-          </a:solidFill>
-          <a:ln>
-            <a:noFill/>
-          </a:ln>
-        </p:spPr>
-        <p:style>
-          <a:lnRef idx="1">
-            <a:schemeClr val="accent1"/>
-          </a:lnRef>
-          <a:fillRef idx="3">
-            <a:schemeClr val="accent1"/>
-          </a:fillRef>
-          <a:effectRef idx="2">
-            <a:schemeClr val="accent1"/>
-          </a:effectRef>
-          <a:fontRef idx="minor">
-            <a:schemeClr val="lt1"/>
-          </a:fontRef>
-        </p:style>
-        <p:txBody>
-          <a:bodyPr rtlCol="0" anchor="ctr"/>
-          <a:lstStyle/>
-          <a:p>
-            <a:pPr algn="ctr"/>
-          </a:p>
-        </p:txBody>
-      </p:sp>
-      <p:sp>
-        <p:nvSpPr>
-          <p:cNvPr id="18" name="TextBox 17"/>
-          <p:cNvSpPr txBox="1"/>
-          <p:nvPr/>
-        </p:nvSpPr>
-        <p:spPr>
-          <a:xfrm>
-            <a:off x="1170432" y="5056632"/>
-            <a:ext cx="6812280" cy="347472"/>
-          </a:xfrm>
-          <a:prstGeom prst="rect">
-            <a:avLst/>
-          </a:prstGeom>
-          <a:noFill/>
-        </p:spPr>
-        <p:txBody>
-          <a:bodyPr wrap="none">
-            <a:spAutoFit/>
-          </a:bodyPr>
-          <a:lstStyle/>
-          <a:p>
-            <a:r>
-              <a:rPr sz="1700">
-                <a:solidFill>
-                  <a:srgbClr val="E7EEF7"/>
-                </a:solidFill>
-              </a:rPr>
-              <a:t>.NET Framework 3.5 for legacy Python 3.10 MSI flows</a:t>
-            </a:r>
-          </a:p>
-        </p:txBody>
-      </p:sp>
-      <p:sp>
-        <p:nvSpPr>
-          <p:cNvPr id="19" name="Rounded Rectangle 18"/>
-          <p:cNvSpPr/>
-          <p:nvPr/>
-        </p:nvSpPr>
-        <p:spPr>
-          <a:xfrm>
-            <a:off x="8823960" y="1097280"/>
-            <a:ext cx="2743200" cy="4937760"/>
-          </a:xfrm>
-          <a:prstGeom prst="roundRect">
-            <a:avLst/>
-          </a:prstGeom>
-          <a:solidFill>
-            <a:srgbClr val="1B263B"/>
-          </a:solidFill>
-          <a:ln>
-            <a:solidFill>
-              <a:srgbClr val="415A77"/>
-            </a:solidFill>
-          </a:ln>
-        </p:spPr>
-        <p:style>
-          <a:lnRef idx="1">
-            <a:schemeClr val="accent1"/>
-          </a:lnRef>
-          <a:fillRef idx="3">
-            <a:schemeClr val="accent1"/>
-          </a:fillRef>
-          <a:effectRef idx="2">
-            <a:schemeClr val="accent1"/>
-          </a:effectRef>
-          <a:fontRef idx="minor">
-            <a:schemeClr val="lt1"/>
-          </a:fontRef>
-        </p:style>
-        <p:txBody>
-          <a:bodyPr rtlCol="0" anchor="ctr"/>
-          <a:lstStyle/>
-          <a:p>
-            <a:pPr algn="ctr"/>
-          </a:p>
-        </p:txBody>
-      </p:sp>
-      <p:sp>
-        <p:nvSpPr>
-          <p:cNvPr id="20" name="TextBox 19"/>
-          <p:cNvSpPr txBox="1"/>
-          <p:nvPr/>
-        </p:nvSpPr>
-        <p:spPr>
-          <a:xfrm>
-            <a:off x="9098280" y="1325880"/>
-            <a:ext cx="2194560" cy="320040"/>
-          </a:xfrm>
-          <a:prstGeom prst="rect">
-            <a:avLst/>
-          </a:prstGeom>
-          <a:noFill/>
-        </p:spPr>
-        <p:txBody>
-          <a:bodyPr wrap="none">
-            <a:spAutoFit/>
-          </a:bodyPr>
-          <a:lstStyle/>
-          <a:p>
-            <a:r>
               <a:rPr b="1" sz="1500">
                 <a:solidFill>
                   <a:srgbClr val="E6BE5A"/>
                 </a:solidFill>
               </a:rPr>
-              <a:t>Requirements</a:t>
+              <a:t>Operator Tips</a:t>
             </a:r>
           </a:p>
         </p:txBody>
@@ -6090,34 +5076,21 @@
           <a:lstStyle/>
           <a:p>
             <a:pPr>
+              <a:lnSpc>
+                <a:spcPct val="105000"/>
+              </a:lnSpc>
               <a:spcAft>
-                <a:spcPts val="800"/>
+                <a:spcPts val="500"/>
               </a:spcAft>
             </a:pPr>
             <a:r>
-              <a:rPr sz="1400">
+              <a:rPr sz="1300">
                 <a:solidFill>
                   <a:srgbClr val="E7EEF7"/>
                 </a:solidFill>
                 <a:latin typeface="Aptos"/>
               </a:rPr>
-              <a:t>PSUB highlights missing items and links directly to setup guides.</a:t>
-            </a:r>
-          </a:p>
-          <a:p>
-            <a:pPr>
-              <a:spcAft>
-                <a:spcPts val="800"/>
-              </a:spcAft>
-            </a:pPr>
-            <a:r>
-              <a:rPr sz="1400">
-                <a:solidFill>
-                  <a:srgbClr val="E7EEF7"/>
-                </a:solidFill>
-                <a:latin typeface="Aptos"/>
-              </a:rPr>
-              <a:t>Do not use Python 3.13 as the bootstrap interpreter.</a:t>
+              <a:t>The same sequence now works cleanly with Visual Studio Professional 2022.</a:t>
             </a:r>
           </a:p>
         </p:txBody>
@@ -6323,7 +5296,7 @@
                 </a:solidFill>
                 <a:latin typeface="Aptos Display"/>
               </a:rPr>
-              <a:t>Launch PSUB</a:t>
+              <a:t>Prerequisites That Matter</a:t>
             </a:r>
           </a:p>
         </p:txBody>
@@ -6351,13 +5324,13 @@
           <a:lstStyle/>
           <a:p>
             <a:r>
-              <a:rPr sz="1400">
+              <a:rPr sz="1300">
                 <a:solidFill>
                   <a:srgbClr val="E8EEF4"/>
                 </a:solidFill>
                 <a:latin typeface="Aptos"/>
               </a:rPr>
-              <a:t>Start the local web UI and open it in a browser</a:t>
+              <a:t>What must be green before you trust a build run</a:t>
             </a:r>
           </a:p>
         </p:txBody>
@@ -6370,78 +5343,8 @@
         </p:nvSpPr>
         <p:spPr>
           <a:xfrm>
-            <a:off x="502920" y="1664208"/>
-            <a:ext cx="7818120" cy="4434840"/>
-          </a:xfrm>
-          <a:prstGeom prst="roundRect">
-            <a:avLst/>
-          </a:prstGeom>
-          <a:solidFill>
-            <a:srgbClr val="F5F8FC"/>
-          </a:solidFill>
-          <a:ln>
-            <a:solidFill>
-              <a:srgbClr val="415A77"/>
-            </a:solidFill>
-          </a:ln>
-        </p:spPr>
-        <p:style>
-          <a:lnRef idx="1">
-            <a:schemeClr val="accent1"/>
-          </a:lnRef>
-          <a:fillRef idx="3">
-            <a:schemeClr val="accent1"/>
-          </a:fillRef>
-          <a:effectRef idx="2">
-            <a:schemeClr val="accent1"/>
-          </a:effectRef>
-          <a:fontRef idx="minor">
-            <a:schemeClr val="lt1"/>
-          </a:fontRef>
-        </p:style>
-        <p:txBody>
-          <a:bodyPr rtlCol="0" anchor="ctr"/>
-          <a:lstStyle/>
-          <a:p>
-            <a:pPr algn="ctr"/>
-          </a:p>
-        </p:txBody>
-      </p:sp>
-      <p:pic>
-        <p:nvPicPr>
-          <p:cNvPr id="7" name="Picture 6" descr="01-home-overview.png"/>
-          <p:cNvPicPr>
-            <a:picLocks noChangeAspect="1"/>
-          </p:cNvPicPr>
-          <p:nvPr/>
-        </p:nvPicPr>
-        <p:blipFill>
-          <a:blip r:embed="rId2"/>
-          <a:srcRect/>
-          <a:stretch>
-            <a:fillRect/>
-          </a:stretch>
-        </p:blipFill>
-        <p:spPr>
-          <a:xfrm>
-            <a:off x="667512" y="1828800"/>
-            <a:ext cx="7498079" cy="4114800"/>
-          </a:xfrm>
-          <a:prstGeom prst="rect">
-            <a:avLst/>
-          </a:prstGeom>
-        </p:spPr>
-      </p:pic>
-      <p:sp>
-        <p:nvSpPr>
-          <p:cNvPr id="8" name="Rounded Rectangle 7"/>
-          <p:cNvSpPr/>
-          <p:nvPr/>
-        </p:nvSpPr>
-        <p:spPr>
-          <a:xfrm>
-            <a:off x="8823960" y="1097280"/>
-            <a:ext cx="2743200" cy="4937760"/>
+            <a:off x="548640" y="1783080"/>
+            <a:ext cx="7818120" cy="4480560"/>
           </a:xfrm>
           <a:prstGeom prst="roundRect">
             <a:avLst/>
@@ -6479,14 +5382,57 @@
       </p:sp>
       <p:sp>
         <p:nvSpPr>
-          <p:cNvPr id="9" name="TextBox 8"/>
+          <p:cNvPr id="7" name="Oval 6"/>
+          <p:cNvSpPr/>
+          <p:nvPr/>
+        </p:nvSpPr>
+        <p:spPr>
+          <a:xfrm>
+            <a:off x="841248" y="2029968"/>
+            <a:ext cx="256032" cy="256032"/>
+          </a:xfrm>
+          <a:prstGeom prst="ellipse">
+            <a:avLst/>
+          </a:prstGeom>
+          <a:solidFill>
+            <a:srgbClr val="26A65B"/>
+          </a:solidFill>
+          <a:ln>
+            <a:noFill/>
+          </a:ln>
+        </p:spPr>
+        <p:style>
+          <a:lnRef idx="1">
+            <a:schemeClr val="accent1"/>
+          </a:lnRef>
+          <a:fillRef idx="3">
+            <a:schemeClr val="accent1"/>
+          </a:fillRef>
+          <a:effectRef idx="2">
+            <a:schemeClr val="accent1"/>
+          </a:effectRef>
+          <a:fontRef idx="minor">
+            <a:schemeClr val="lt1"/>
+          </a:fontRef>
+        </p:style>
+        <p:txBody>
+          <a:bodyPr rtlCol="0" anchor="ctr"/>
+          <a:lstStyle/>
+          <a:p>
+            <a:pPr algn="ctr"/>
+          </a:p>
+        </p:txBody>
+      </p:sp>
+      <p:sp>
+        <p:nvSpPr>
+          <p:cNvPr id="8" name="TextBox 7"/>
           <p:cNvSpPr txBox="1"/>
           <p:nvPr/>
         </p:nvSpPr>
         <p:spPr>
           <a:xfrm>
-            <a:off x="9098280" y="1325880"/>
-            <a:ext cx="2194560" cy="320040"/>
+            <a:off x="1170432" y="1993392"/>
+            <a:ext cx="6812280" cy="347472"/>
           </a:xfrm>
           <a:prstGeom prst="rect">
             <a:avLst/>
@@ -6500,19 +5446,477 @@
           <a:lstStyle/>
           <a:p>
             <a:r>
+              <a:rPr sz="1550">
+                <a:solidFill>
+                  <a:srgbClr val="E7EEF7"/>
+                </a:solidFill>
+              </a:rPr>
+              <a:t>Visual Studio 2019 or 2022 with Desktop development with C++</a:t>
+            </a:r>
+          </a:p>
+        </p:txBody>
+      </p:sp>
+      <p:sp>
+        <p:nvSpPr>
+          <p:cNvPr id="9" name="Oval 8"/>
+          <p:cNvSpPr/>
+          <p:nvPr/>
+        </p:nvSpPr>
+        <p:spPr>
+          <a:xfrm>
+            <a:off x="841248" y="2642616"/>
+            <a:ext cx="256032" cy="256032"/>
+          </a:xfrm>
+          <a:prstGeom prst="ellipse">
+            <a:avLst/>
+          </a:prstGeom>
+          <a:solidFill>
+            <a:srgbClr val="26A65B"/>
+          </a:solidFill>
+          <a:ln>
+            <a:noFill/>
+          </a:ln>
+        </p:spPr>
+        <p:style>
+          <a:lnRef idx="1">
+            <a:schemeClr val="accent1"/>
+          </a:lnRef>
+          <a:fillRef idx="3">
+            <a:schemeClr val="accent1"/>
+          </a:fillRef>
+          <a:effectRef idx="2">
+            <a:schemeClr val="accent1"/>
+          </a:effectRef>
+          <a:fontRef idx="minor">
+            <a:schemeClr val="lt1"/>
+          </a:fontRef>
+        </p:style>
+        <p:txBody>
+          <a:bodyPr rtlCol="0" anchor="ctr"/>
+          <a:lstStyle/>
+          <a:p>
+            <a:pPr algn="ctr"/>
+          </a:p>
+        </p:txBody>
+      </p:sp>
+      <p:sp>
+        <p:nvSpPr>
+          <p:cNvPr id="10" name="TextBox 9"/>
+          <p:cNvSpPr txBox="1"/>
+          <p:nvPr/>
+        </p:nvSpPr>
+        <p:spPr>
+          <a:xfrm>
+            <a:off x="1170432" y="2606040"/>
+            <a:ext cx="6812280" cy="347472"/>
+          </a:xfrm>
+          <a:prstGeom prst="rect">
+            <a:avLst/>
+          </a:prstGeom>
+          <a:noFill/>
+        </p:spPr>
+        <p:txBody>
+          <a:bodyPr wrap="none">
+            <a:spAutoFit/>
+          </a:bodyPr>
+          <a:lstStyle/>
+          <a:p>
+            <a:r>
+              <a:rPr sz="1550">
+                <a:solidFill>
+                  <a:srgbClr val="E7EEF7"/>
+                </a:solidFill>
+              </a:rPr>
+              <a:t>MSVC toolchains for x64, x86, and ARM64</a:t>
+            </a:r>
+          </a:p>
+        </p:txBody>
+      </p:sp>
+      <p:sp>
+        <p:nvSpPr>
+          <p:cNvPr id="11" name="Oval 10"/>
+          <p:cNvSpPr/>
+          <p:nvPr/>
+        </p:nvSpPr>
+        <p:spPr>
+          <a:xfrm>
+            <a:off x="841248" y="3255264"/>
+            <a:ext cx="256032" cy="256032"/>
+          </a:xfrm>
+          <a:prstGeom prst="ellipse">
+            <a:avLst/>
+          </a:prstGeom>
+          <a:solidFill>
+            <a:srgbClr val="26A65B"/>
+          </a:solidFill>
+          <a:ln>
+            <a:noFill/>
+          </a:ln>
+        </p:spPr>
+        <p:style>
+          <a:lnRef idx="1">
+            <a:schemeClr val="accent1"/>
+          </a:lnRef>
+          <a:fillRef idx="3">
+            <a:schemeClr val="accent1"/>
+          </a:fillRef>
+          <a:effectRef idx="2">
+            <a:schemeClr val="accent1"/>
+          </a:effectRef>
+          <a:fontRef idx="minor">
+            <a:schemeClr val="lt1"/>
+          </a:fontRef>
+        </p:style>
+        <p:txBody>
+          <a:bodyPr rtlCol="0" anchor="ctr"/>
+          <a:lstStyle/>
+          <a:p>
+            <a:pPr algn="ctr"/>
+          </a:p>
+        </p:txBody>
+      </p:sp>
+      <p:sp>
+        <p:nvSpPr>
+          <p:cNvPr id="12" name="TextBox 11"/>
+          <p:cNvSpPr txBox="1"/>
+          <p:nvPr/>
+        </p:nvSpPr>
+        <p:spPr>
+          <a:xfrm>
+            <a:off x="1170432" y="3218688"/>
+            <a:ext cx="6812280" cy="347472"/>
+          </a:xfrm>
+          <a:prstGeom prst="rect">
+            <a:avLst/>
+          </a:prstGeom>
+          <a:noFill/>
+        </p:spPr>
+        <p:txBody>
+          <a:bodyPr wrap="none">
+            <a:spAutoFit/>
+          </a:bodyPr>
+          <a:lstStyle/>
+          <a:p>
+            <a:r>
+              <a:rPr sz="1550">
+                <a:solidFill>
+                  <a:srgbClr val="E7EEF7"/>
+                </a:solidFill>
+              </a:rPr>
+              <a:t>Windows 10 SDK 10.0.19041.0 or later</a:t>
+            </a:r>
+          </a:p>
+        </p:txBody>
+      </p:sp>
+      <p:sp>
+        <p:nvSpPr>
+          <p:cNvPr id="13" name="Oval 12"/>
+          <p:cNvSpPr/>
+          <p:nvPr/>
+        </p:nvSpPr>
+        <p:spPr>
+          <a:xfrm>
+            <a:off x="841248" y="3867912"/>
+            <a:ext cx="256032" cy="256032"/>
+          </a:xfrm>
+          <a:prstGeom prst="ellipse">
+            <a:avLst/>
+          </a:prstGeom>
+          <a:solidFill>
+            <a:srgbClr val="26A65B"/>
+          </a:solidFill>
+          <a:ln>
+            <a:noFill/>
+          </a:ln>
+        </p:spPr>
+        <p:style>
+          <a:lnRef idx="1">
+            <a:schemeClr val="accent1"/>
+          </a:lnRef>
+          <a:fillRef idx="3">
+            <a:schemeClr val="accent1"/>
+          </a:fillRef>
+          <a:effectRef idx="2">
+            <a:schemeClr val="accent1"/>
+          </a:effectRef>
+          <a:fontRef idx="minor">
+            <a:schemeClr val="lt1"/>
+          </a:fontRef>
+        </p:style>
+        <p:txBody>
+          <a:bodyPr rtlCol="0" anchor="ctr"/>
+          <a:lstStyle/>
+          <a:p>
+            <a:pPr algn="ctr"/>
+          </a:p>
+        </p:txBody>
+      </p:sp>
+      <p:sp>
+        <p:nvSpPr>
+          <p:cNvPr id="14" name="TextBox 13"/>
+          <p:cNvSpPr txBox="1"/>
+          <p:nvPr/>
+        </p:nvSpPr>
+        <p:spPr>
+          <a:xfrm>
+            <a:off x="1170432" y="3831336"/>
+            <a:ext cx="6812280" cy="347472"/>
+          </a:xfrm>
+          <a:prstGeom prst="rect">
+            <a:avLst/>
+          </a:prstGeom>
+          <a:noFill/>
+        </p:spPr>
+        <p:txBody>
+          <a:bodyPr wrap="none">
+            <a:spAutoFit/>
+          </a:bodyPr>
+          <a:lstStyle/>
+          <a:p>
+            <a:r>
+              <a:rPr sz="1550">
+                <a:solidFill>
+                  <a:srgbClr val="E7EEF7"/>
+                </a:solidFill>
+              </a:rPr>
+              <a:t>Bootstrap Python 3.10 or 3.12</a:t>
+            </a:r>
+          </a:p>
+        </p:txBody>
+      </p:sp>
+      <p:sp>
+        <p:nvSpPr>
+          <p:cNvPr id="15" name="Oval 14"/>
+          <p:cNvSpPr/>
+          <p:nvPr/>
+        </p:nvSpPr>
+        <p:spPr>
+          <a:xfrm>
+            <a:off x="841248" y="4480560"/>
+            <a:ext cx="256032" cy="256032"/>
+          </a:xfrm>
+          <a:prstGeom prst="ellipse">
+            <a:avLst/>
+          </a:prstGeom>
+          <a:solidFill>
+            <a:srgbClr val="26A65B"/>
+          </a:solidFill>
+          <a:ln>
+            <a:noFill/>
+          </a:ln>
+        </p:spPr>
+        <p:style>
+          <a:lnRef idx="1">
+            <a:schemeClr val="accent1"/>
+          </a:lnRef>
+          <a:fillRef idx="3">
+            <a:schemeClr val="accent1"/>
+          </a:fillRef>
+          <a:effectRef idx="2">
+            <a:schemeClr val="accent1"/>
+          </a:effectRef>
+          <a:fontRef idx="minor">
+            <a:schemeClr val="lt1"/>
+          </a:fontRef>
+        </p:style>
+        <p:txBody>
+          <a:bodyPr rtlCol="0" anchor="ctr"/>
+          <a:lstStyle/>
+          <a:p>
+            <a:pPr algn="ctr"/>
+          </a:p>
+        </p:txBody>
+      </p:sp>
+      <p:sp>
+        <p:nvSpPr>
+          <p:cNvPr id="16" name="TextBox 15"/>
+          <p:cNvSpPr txBox="1"/>
+          <p:nvPr/>
+        </p:nvSpPr>
+        <p:spPr>
+          <a:xfrm>
+            <a:off x="1170432" y="4443984"/>
+            <a:ext cx="6812280" cy="347472"/>
+          </a:xfrm>
+          <a:prstGeom prst="rect">
+            <a:avLst/>
+          </a:prstGeom>
+          <a:noFill/>
+        </p:spPr>
+        <p:txBody>
+          <a:bodyPr wrap="none">
+            <a:spAutoFit/>
+          </a:bodyPr>
+          <a:lstStyle/>
+          <a:p>
+            <a:r>
+              <a:rPr sz="1550">
+                <a:solidFill>
+                  <a:srgbClr val="E7EEF7"/>
+                </a:solidFill>
+              </a:rPr>
+              <a:t>Git for Windows on PATH</a:t>
+            </a:r>
+          </a:p>
+        </p:txBody>
+      </p:sp>
+      <p:sp>
+        <p:nvSpPr>
+          <p:cNvPr id="17" name="Oval 16"/>
+          <p:cNvSpPr/>
+          <p:nvPr/>
+        </p:nvSpPr>
+        <p:spPr>
+          <a:xfrm>
+            <a:off x="841248" y="5093208"/>
+            <a:ext cx="256032" cy="256032"/>
+          </a:xfrm>
+          <a:prstGeom prst="ellipse">
+            <a:avLst/>
+          </a:prstGeom>
+          <a:solidFill>
+            <a:srgbClr val="D87706"/>
+          </a:solidFill>
+          <a:ln>
+            <a:noFill/>
+          </a:ln>
+        </p:spPr>
+        <p:style>
+          <a:lnRef idx="1">
+            <a:schemeClr val="accent1"/>
+          </a:lnRef>
+          <a:fillRef idx="3">
+            <a:schemeClr val="accent1"/>
+          </a:fillRef>
+          <a:effectRef idx="2">
+            <a:schemeClr val="accent1"/>
+          </a:effectRef>
+          <a:fontRef idx="minor">
+            <a:schemeClr val="lt1"/>
+          </a:fontRef>
+        </p:style>
+        <p:txBody>
+          <a:bodyPr rtlCol="0" anchor="ctr"/>
+          <a:lstStyle/>
+          <a:p>
+            <a:pPr algn="ctr"/>
+          </a:p>
+        </p:txBody>
+      </p:sp>
+      <p:sp>
+        <p:nvSpPr>
+          <p:cNvPr id="18" name="TextBox 17"/>
+          <p:cNvSpPr txBox="1"/>
+          <p:nvPr/>
+        </p:nvSpPr>
+        <p:spPr>
+          <a:xfrm>
+            <a:off x="1170432" y="5056632"/>
+            <a:ext cx="6812280" cy="347472"/>
+          </a:xfrm>
+          <a:prstGeom prst="rect">
+            <a:avLst/>
+          </a:prstGeom>
+          <a:noFill/>
+        </p:spPr>
+        <p:txBody>
+          <a:bodyPr wrap="none">
+            <a:spAutoFit/>
+          </a:bodyPr>
+          <a:lstStyle/>
+          <a:p>
+            <a:r>
+              <a:rPr sz="1550">
+                <a:solidFill>
+                  <a:srgbClr val="E7EEF7"/>
+                </a:solidFill>
+              </a:rPr>
+              <a:t>.NET Framework 3.5 for legacy Python 3.10 MSI flows</a:t>
+            </a:r>
+          </a:p>
+        </p:txBody>
+      </p:sp>
+      <p:sp>
+        <p:nvSpPr>
+          <p:cNvPr id="19" name="Rounded Rectangle 18"/>
+          <p:cNvSpPr/>
+          <p:nvPr/>
+        </p:nvSpPr>
+        <p:spPr>
+          <a:xfrm>
+            <a:off x="8823960" y="1097280"/>
+            <a:ext cx="2743200" cy="4937760"/>
+          </a:xfrm>
+          <a:prstGeom prst="roundRect">
+            <a:avLst/>
+          </a:prstGeom>
+          <a:solidFill>
+            <a:srgbClr val="1B263B"/>
+          </a:solidFill>
+          <a:ln>
+            <a:solidFill>
+              <a:srgbClr val="415A77"/>
+            </a:solidFill>
+          </a:ln>
+        </p:spPr>
+        <p:style>
+          <a:lnRef idx="1">
+            <a:schemeClr val="accent1"/>
+          </a:lnRef>
+          <a:fillRef idx="3">
+            <a:schemeClr val="accent1"/>
+          </a:fillRef>
+          <a:effectRef idx="2">
+            <a:schemeClr val="accent1"/>
+          </a:effectRef>
+          <a:fontRef idx="minor">
+            <a:schemeClr val="lt1"/>
+          </a:fontRef>
+        </p:style>
+        <p:txBody>
+          <a:bodyPr rtlCol="0" anchor="ctr"/>
+          <a:lstStyle/>
+          <a:p>
+            <a:pPr algn="ctr"/>
+          </a:p>
+        </p:txBody>
+      </p:sp>
+      <p:sp>
+        <p:nvSpPr>
+          <p:cNvPr id="20" name="TextBox 19"/>
+          <p:cNvSpPr txBox="1"/>
+          <p:nvPr/>
+        </p:nvSpPr>
+        <p:spPr>
+          <a:xfrm>
+            <a:off x="9098280" y="1325880"/>
+            <a:ext cx="2194560" cy="320040"/>
+          </a:xfrm>
+          <a:prstGeom prst="rect">
+            <a:avLst/>
+          </a:prstGeom>
+          <a:noFill/>
+        </p:spPr>
+        <p:txBody>
+          <a:bodyPr wrap="none">
+            <a:spAutoFit/>
+          </a:bodyPr>
+          <a:lstStyle/>
+          <a:p>
+            <a:r>
               <a:rPr b="1" sz="1500">
                 <a:solidFill>
                   <a:srgbClr val="E6BE5A"/>
                 </a:solidFill>
               </a:rPr>
-              <a:t>Operator Tips</a:t>
-            </a:r>
-          </a:p>
-        </p:txBody>
-      </p:sp>
-      <p:sp>
-        <p:nvSpPr>
-          <p:cNvPr id="10" name="TextBox 9"/>
+              <a:t>Requirements</a:t>
+            </a:r>
+          </a:p>
+        </p:txBody>
+      </p:sp>
+      <p:sp>
+        <p:nvSpPr>
+          <p:cNvPr id="21" name="TextBox 20"/>
           <p:cNvSpPr txBox="1"/>
           <p:nvPr/>
         </p:nvSpPr>
@@ -6533,73 +5937,47 @@
           <a:lstStyle/>
           <a:p>
             <a:pPr>
+              <a:lnSpc>
+                <a:spcPct val="105000"/>
+              </a:lnSpc>
               <a:spcAft>
-                <a:spcPts val="800"/>
+                <a:spcPts val="500"/>
               </a:spcAft>
             </a:pPr>
             <a:r>
-              <a:rPr sz="1400">
+              <a:rPr sz="1300">
                 <a:solidFill>
                   <a:srgbClr val="E7EEF7"/>
                 </a:solidFill>
                 <a:latin typeface="Aptos"/>
               </a:rPr>
-              <a:t>Run .\Script\Build-PythonRelease-UI-Simple.ps1 -Port 8080</a:t>
+              <a:t>PSUB links missing prerequisites directly to setup guides.</a:t>
             </a:r>
           </a:p>
           <a:p>
             <a:pPr>
+              <a:lnSpc>
+                <a:spcPct val="105000"/>
+              </a:lnSpc>
               <a:spcAft>
-                <a:spcPts val="800"/>
+                <a:spcPts val="500"/>
               </a:spcAft>
             </a:pPr>
             <a:r>
-              <a:rPr sz="1400">
+              <a:rPr sz="1300">
                 <a:solidFill>
                   <a:srgbClr val="E7EEF7"/>
                 </a:solidFill>
                 <a:latin typeface="Aptos"/>
               </a:rPr>
-              <a:t>Open http://localhost:8080/</a:t>
-            </a:r>
-          </a:p>
-          <a:p>
-            <a:pPr>
-              <a:spcAft>
-                <a:spcPts val="800"/>
-              </a:spcAft>
-            </a:pPr>
-            <a:r>
-              <a:rPr sz="1400">
-                <a:solidFill>
-                  <a:srgbClr val="E7EEF7"/>
-                </a:solidFill>
-                <a:latin typeface="Aptos"/>
-              </a:rPr>
-              <a:t>The build itself opens in a new terminal window with live output</a:t>
-            </a:r>
-          </a:p>
-          <a:p>
-            <a:pPr>
-              <a:spcAft>
-                <a:spcPts val="800"/>
-              </a:spcAft>
-            </a:pPr>
-            <a:r>
-              <a:rPr sz="1400">
-                <a:solidFill>
-                  <a:srgbClr val="E7EEF7"/>
-                </a:solidFill>
-                <a:latin typeface="Aptos"/>
-              </a:rPr>
-              <a:t>Default operator entry point is the web UI rather than the CLI script.</a:t>
-            </a:r>
-          </a:p>
-        </p:txBody>
-      </p:sp>
-      <p:sp>
-        <p:nvSpPr>
-          <p:cNvPr id="11" name="TextBox 10"/>
+              <a:t>Do not use Microsoft Store alias paths or Python 3.13 as bootstrap.</a:t>
+            </a:r>
+          </a:p>
+        </p:txBody>
+      </p:sp>
+      <p:sp>
+        <p:nvSpPr>
+          <p:cNvPr id="22" name="TextBox 21"/>
           <p:cNvSpPr txBox="1"/>
           <p:nvPr/>
         </p:nvSpPr>
@@ -6633,7 +6011,7 @@
       </p:sp>
       <p:sp>
         <p:nvSpPr>
-          <p:cNvPr id="12" name="TextBox 11"/>
+          <p:cNvPr id="23" name="TextBox 22"/>
           <p:cNvSpPr txBox="1"/>
           <p:nvPr/>
         </p:nvSpPr>
@@ -6798,7 +6176,7 @@
                 </a:solidFill>
                 <a:latin typeface="Aptos Display"/>
               </a:rPr>
-              <a:t>Check Prerequisites</a:t>
+              <a:t>Live UI Walkthrough</a:t>
             </a:r>
           </a:p>
         </p:txBody>
@@ -6826,13 +6204,13 @@
           <a:lstStyle/>
           <a:p>
             <a:r>
-              <a:rPr sz="1400">
+              <a:rPr sz="1300">
                 <a:solidFill>
                   <a:srgbClr val="E8EEF4"/>
                 </a:solidFill>
                 <a:latin typeface="Aptos"/>
               </a:rPr>
-              <a:t>Use the left-side panel as your environment readiness gate</a:t>
+              <a:t>Only a few fields matter for a clean run</a:t>
             </a:r>
           </a:p>
         </p:txBody>
@@ -6884,7 +6262,7 @@
       </p:sp>
       <p:pic>
         <p:nvPicPr>
-          <p:cNvPr id="7" name="Picture 6" descr="02-prerequisites-panel.png"/>
+          <p:cNvPr id="7" name="Picture 6" descr="04-build-configuration.png"/>
           <p:cNvPicPr>
             <a:picLocks noChangeAspect="1"/>
           </p:cNvPicPr>
@@ -6980,7 +6358,7 @@
                   <a:srgbClr val="E6BE5A"/>
                 </a:solidFill>
               </a:rPr>
-              <a:t>Operator Tips</a:t>
+              <a:t>Operator Focus</a:t>
             </a:r>
           </a:p>
         </p:txBody>
@@ -7008,66 +6386,78 @@
           <a:lstStyle/>
           <a:p>
             <a:pPr>
+              <a:lnSpc>
+                <a:spcPct val="105000"/>
+              </a:lnSpc>
               <a:spcAft>
-                <a:spcPts val="800"/>
+                <a:spcPts val="500"/>
               </a:spcAft>
             </a:pPr>
             <a:r>
-              <a:rPr sz="1400">
+              <a:rPr sz="1300">
                 <a:solidFill>
                   <a:srgbClr val="E7EEF7"/>
                 </a:solidFill>
                 <a:latin typeface="Aptos"/>
               </a:rPr>
-              <a:t>Refresh the prerequisite check when the machine changes</a:t>
+              <a:t>Use Auto-Detect to fill Bootstrap Python</a:t>
             </a:r>
           </a:p>
           <a:p>
             <a:pPr>
+              <a:lnSpc>
+                <a:spcPct val="105000"/>
+              </a:lnSpc>
               <a:spcAft>
-                <a:spcPts val="800"/>
+                <a:spcPts val="500"/>
               </a:spcAft>
             </a:pPr>
             <a:r>
-              <a:rPr sz="1400">
+              <a:rPr sz="1300">
                 <a:solidFill>
                   <a:srgbClr val="E7EEF7"/>
                 </a:solidFill>
                 <a:latin typeface="Aptos"/>
               </a:rPr>
-              <a:t>Read the summary banner before entering any build values</a:t>
+              <a:t>Confirm SourcePath and doc-venv</a:t>
             </a:r>
           </a:p>
           <a:p>
             <a:pPr>
+              <a:lnSpc>
+                <a:spcPct val="105000"/>
+              </a:lnSpc>
               <a:spcAft>
-                <a:spcPts val="800"/>
+                <a:spcPts val="500"/>
               </a:spcAft>
             </a:pPr>
             <a:r>
-              <a:rPr sz="1400">
+              <a:rPr sz="1300">
                 <a:solidFill>
                   <a:srgbClr val="E7EEF7"/>
                 </a:solidFill>
                 <a:latin typeface="Aptos"/>
               </a:rPr>
-              <a:t>Follow setup-guide links for missing tools or SDK components</a:t>
+              <a:t>Start Build opens a separate live terminal</a:t>
             </a:r>
           </a:p>
           <a:p>
             <a:pPr>
+              <a:lnSpc>
+                <a:spcPct val="105000"/>
+              </a:lnSpc>
               <a:spcAft>
-                <a:spcPts val="800"/>
+                <a:spcPts val="500"/>
               </a:spcAft>
             </a:pPr>
             <a:r>
-              <a:rPr sz="1400">
+              <a:rPr sz="1300">
                 <a:solidFill>
                   <a:srgbClr val="E7EEF7"/>
                 </a:solidFill>
                 <a:latin typeface="Aptos"/>
               </a:rPr>
-              <a:t>The panel covers Visual Studio, toolchains, SDK, bootstrap Python, and Git.</a:t>
+              <a:t>Focus on the build form, not every control in the page.</a:t>
             </a:r>
           </a:p>
         </p:txBody>
@@ -7267,13 +6657,13 @@
           <a:lstStyle/>
           <a:p>
             <a:r>
-              <a:rPr sz="2800" b="1">
+              <a:rPr sz="2400" b="1">
                 <a:solidFill>
                   <a:srgbClr val="E7EEF7"/>
                 </a:solidFill>
                 <a:latin typeface="Aptos Display"/>
               </a:rPr>
-              <a:t>Prepare Build Settings</a:t>
+              <a:t>What We Verified On A Clean Machine</a:t>
             </a:r>
           </a:p>
         </p:txBody>
@@ -7301,13 +6691,13 @@
           <a:lstStyle/>
           <a:p>
             <a:r>
-              <a:rPr sz="1400">
+              <a:rPr sz="1300">
                 <a:solidFill>
                   <a:srgbClr val="E8EEF4"/>
                 </a:solidFill>
                 <a:latin typeface="Aptos"/>
               </a:rPr>
-              <a:t>Standard settings define the reusable defaults for each run</a:t>
+              <a:t>Recent improvements that reduced operator friction</a:t>
             </a:r>
           </a:p>
         </p:txBody>
@@ -7320,78 +6710,8 @@
         </p:nvSpPr>
         <p:spPr>
           <a:xfrm>
-            <a:off x="502920" y="1664208"/>
-            <a:ext cx="7818120" cy="4434840"/>
-          </a:xfrm>
-          <a:prstGeom prst="roundRect">
-            <a:avLst/>
-          </a:prstGeom>
-          <a:solidFill>
-            <a:srgbClr val="F5F8FC"/>
-          </a:solidFill>
-          <a:ln>
-            <a:solidFill>
-              <a:srgbClr val="415A77"/>
-            </a:solidFill>
-          </a:ln>
-        </p:spPr>
-        <p:style>
-          <a:lnRef idx="1">
-            <a:schemeClr val="accent1"/>
-          </a:lnRef>
-          <a:fillRef idx="3">
-            <a:schemeClr val="accent1"/>
-          </a:fillRef>
-          <a:effectRef idx="2">
-            <a:schemeClr val="accent1"/>
-          </a:effectRef>
-          <a:fontRef idx="minor">
-            <a:schemeClr val="lt1"/>
-          </a:fontRef>
-        </p:style>
-        <p:txBody>
-          <a:bodyPr rtlCol="0" anchor="ctr"/>
-          <a:lstStyle/>
-          <a:p>
-            <a:pPr algn="ctr"/>
-          </a:p>
-        </p:txBody>
-      </p:sp>
-      <p:pic>
-        <p:nvPicPr>
-          <p:cNvPr id="7" name="Picture 6" descr="03-standard-build-settings.png"/>
-          <p:cNvPicPr>
-            <a:picLocks noChangeAspect="1"/>
-          </p:cNvPicPr>
-          <p:nvPr/>
-        </p:nvPicPr>
-        <p:blipFill>
-          <a:blip r:embed="rId2"/>
-          <a:srcRect/>
-          <a:stretch>
-            <a:fillRect/>
-          </a:stretch>
-        </p:blipFill>
-        <p:spPr>
-          <a:xfrm>
-            <a:off x="667512" y="1828800"/>
-            <a:ext cx="7498079" cy="4114800"/>
-          </a:xfrm>
-          <a:prstGeom prst="rect">
-            <a:avLst/>
-          </a:prstGeom>
-        </p:spPr>
-      </p:pic>
-      <p:sp>
-        <p:nvSpPr>
-          <p:cNvPr id="8" name="Rounded Rectangle 7"/>
-          <p:cNvSpPr/>
-          <p:nvPr/>
-        </p:nvSpPr>
-        <p:spPr>
-          <a:xfrm>
-            <a:off x="8823960" y="1097280"/>
-            <a:ext cx="2743200" cy="4937760"/>
+            <a:off x="658368" y="1874519"/>
+            <a:ext cx="2148840" cy="1280160"/>
           </a:xfrm>
           <a:prstGeom prst="roundRect">
             <a:avLst/>
@@ -7429,14 +6749,353 @@
       </p:sp>
       <p:sp>
         <p:nvSpPr>
-          <p:cNvPr id="9" name="TextBox 8"/>
+          <p:cNvPr id="7" name="TextBox 6"/>
           <p:cNvSpPr txBox="1"/>
           <p:nvPr/>
         </p:nvSpPr>
         <p:spPr>
           <a:xfrm>
-            <a:off x="9098280" y="1325880"/>
-            <a:ext cx="2194560" cy="320040"/>
+            <a:off x="859536" y="2020823"/>
+            <a:ext cx="1600200" cy="256032"/>
+          </a:xfrm>
+          <a:prstGeom prst="rect">
+            <a:avLst/>
+          </a:prstGeom>
+          <a:noFill/>
+        </p:spPr>
+        <p:txBody>
+          <a:bodyPr wrap="square">
+            <a:spAutoFit/>
+          </a:bodyPr>
+          <a:lstStyle/>
+          <a:p>
+            <a:r>
+              <a:rPr sz="1200" b="1">
+                <a:solidFill>
+                  <a:srgbClr val="E6BE5A"/>
+                </a:solidFill>
+              </a:rPr>
+              <a:t>VS 2022 Pro</a:t>
+            </a:r>
+          </a:p>
+        </p:txBody>
+      </p:sp>
+      <p:sp>
+        <p:nvSpPr>
+          <p:cNvPr id="8" name="TextBox 7"/>
+          <p:cNvSpPr txBox="1"/>
+          <p:nvPr/>
+        </p:nvSpPr>
+        <p:spPr>
+          <a:xfrm>
+            <a:off x="859536" y="2295143"/>
+            <a:ext cx="1600200" cy="603504"/>
+          </a:xfrm>
+          <a:prstGeom prst="rect">
+            <a:avLst/>
+          </a:prstGeom>
+          <a:noFill/>
+        </p:spPr>
+        <p:txBody>
+          <a:bodyPr wrap="square" anchor="ctr">
+            <a:spAutoFit/>
+          </a:bodyPr>
+          <a:lstStyle/>
+          <a:p>
+            <a:pPr algn="l"/>
+            <a:r>
+              <a:rPr sz="1500" b="1">
+                <a:solidFill>
+                  <a:srgbClr val="E7EEF7"/>
+                </a:solidFill>
+                <a:latin typeface="Aptos Display"/>
+              </a:rPr>
+              <a:t>Verified</a:t>
+            </a:r>
+          </a:p>
+        </p:txBody>
+      </p:sp>
+      <p:sp>
+        <p:nvSpPr>
+          <p:cNvPr id="9" name="Rounded Rectangle 8"/>
+          <p:cNvSpPr/>
+          <p:nvPr/>
+        </p:nvSpPr>
+        <p:spPr>
+          <a:xfrm>
+            <a:off x="3090672" y="1874519"/>
+            <a:ext cx="2148840" cy="1280160"/>
+          </a:xfrm>
+          <a:prstGeom prst="roundRect">
+            <a:avLst/>
+          </a:prstGeom>
+          <a:solidFill>
+            <a:srgbClr val="1B263B"/>
+          </a:solidFill>
+          <a:ln>
+            <a:solidFill>
+              <a:srgbClr val="415A77"/>
+            </a:solidFill>
+          </a:ln>
+        </p:spPr>
+        <p:style>
+          <a:lnRef idx="1">
+            <a:schemeClr val="accent1"/>
+          </a:lnRef>
+          <a:fillRef idx="3">
+            <a:schemeClr val="accent1"/>
+          </a:fillRef>
+          <a:effectRef idx="2">
+            <a:schemeClr val="accent1"/>
+          </a:effectRef>
+          <a:fontRef idx="minor">
+            <a:schemeClr val="lt1"/>
+          </a:fontRef>
+        </p:style>
+        <p:txBody>
+          <a:bodyPr rtlCol="0" anchor="ctr"/>
+          <a:lstStyle/>
+          <a:p>
+            <a:pPr algn="ctr"/>
+          </a:p>
+        </p:txBody>
+      </p:sp>
+      <p:sp>
+        <p:nvSpPr>
+          <p:cNvPr id="10" name="TextBox 9"/>
+          <p:cNvSpPr txBox="1"/>
+          <p:nvPr/>
+        </p:nvSpPr>
+        <p:spPr>
+          <a:xfrm>
+            <a:off x="3291840" y="2020823"/>
+            <a:ext cx="1600200" cy="256032"/>
+          </a:xfrm>
+          <a:prstGeom prst="rect">
+            <a:avLst/>
+          </a:prstGeom>
+          <a:noFill/>
+        </p:spPr>
+        <p:txBody>
+          <a:bodyPr wrap="square">
+            <a:spAutoFit/>
+          </a:bodyPr>
+          <a:lstStyle/>
+          <a:p>
+            <a:r>
+              <a:rPr sz="1200" b="1">
+                <a:solidFill>
+                  <a:srgbClr val="E6BE5A"/>
+                </a:solidFill>
+              </a:rPr>
+              <a:t>SDK field</a:t>
+            </a:r>
+          </a:p>
+        </p:txBody>
+      </p:sp>
+      <p:sp>
+        <p:nvSpPr>
+          <p:cNvPr id="11" name="TextBox 10"/>
+          <p:cNvSpPr txBox="1"/>
+          <p:nvPr/>
+        </p:nvSpPr>
+        <p:spPr>
+          <a:xfrm>
+            <a:off x="3291840" y="2295143"/>
+            <a:ext cx="1600200" cy="603504"/>
+          </a:xfrm>
+          <a:prstGeom prst="rect">
+            <a:avLst/>
+          </a:prstGeom>
+          <a:noFill/>
+        </p:spPr>
+        <p:txBody>
+          <a:bodyPr wrap="square" anchor="ctr">
+            <a:spAutoFit/>
+          </a:bodyPr>
+          <a:lstStyle/>
+          <a:p>
+            <a:pPr algn="l"/>
+            <a:r>
+              <a:rPr sz="1500" b="1">
+                <a:solidFill>
+                  <a:srgbClr val="E7EEF7"/>
+                </a:solidFill>
+                <a:latin typeface="Aptos Display"/>
+              </a:rPr>
+              <a:t>Autofilled</a:t>
+            </a:r>
+          </a:p>
+        </p:txBody>
+      </p:sp>
+      <p:sp>
+        <p:nvSpPr>
+          <p:cNvPr id="12" name="Rounded Rectangle 11"/>
+          <p:cNvSpPr/>
+          <p:nvPr/>
+        </p:nvSpPr>
+        <p:spPr>
+          <a:xfrm>
+            <a:off x="5522976" y="1874519"/>
+            <a:ext cx="2148840" cy="1280160"/>
+          </a:xfrm>
+          <a:prstGeom prst="roundRect">
+            <a:avLst/>
+          </a:prstGeom>
+          <a:solidFill>
+            <a:srgbClr val="1B263B"/>
+          </a:solidFill>
+          <a:ln>
+            <a:solidFill>
+              <a:srgbClr val="415A77"/>
+            </a:solidFill>
+          </a:ln>
+        </p:spPr>
+        <p:style>
+          <a:lnRef idx="1">
+            <a:schemeClr val="accent1"/>
+          </a:lnRef>
+          <a:fillRef idx="3">
+            <a:schemeClr val="accent1"/>
+          </a:fillRef>
+          <a:effectRef idx="2">
+            <a:schemeClr val="accent1"/>
+          </a:effectRef>
+          <a:fontRef idx="minor">
+            <a:schemeClr val="lt1"/>
+          </a:fontRef>
+        </p:style>
+        <p:txBody>
+          <a:bodyPr rtlCol="0" anchor="ctr"/>
+          <a:lstStyle/>
+          <a:p>
+            <a:pPr algn="ctr"/>
+          </a:p>
+        </p:txBody>
+      </p:sp>
+      <p:sp>
+        <p:nvSpPr>
+          <p:cNvPr id="13" name="TextBox 12"/>
+          <p:cNvSpPr txBox="1"/>
+          <p:nvPr/>
+        </p:nvSpPr>
+        <p:spPr>
+          <a:xfrm>
+            <a:off x="5724144" y="2020823"/>
+            <a:ext cx="1600200" cy="256032"/>
+          </a:xfrm>
+          <a:prstGeom prst="rect">
+            <a:avLst/>
+          </a:prstGeom>
+          <a:noFill/>
+        </p:spPr>
+        <p:txBody>
+          <a:bodyPr wrap="square">
+            <a:spAutoFit/>
+          </a:bodyPr>
+          <a:lstStyle/>
+          <a:p>
+            <a:r>
+              <a:rPr sz="1200" b="1">
+                <a:solidFill>
+                  <a:srgbClr val="E6BE5A"/>
+                </a:solidFill>
+              </a:rPr>
+              <a:t>3.10 / 3.11 / 3.12</a:t>
+            </a:r>
+          </a:p>
+        </p:txBody>
+      </p:sp>
+      <p:sp>
+        <p:nvSpPr>
+          <p:cNvPr id="14" name="TextBox 13"/>
+          <p:cNvSpPr txBox="1"/>
+          <p:nvPr/>
+        </p:nvSpPr>
+        <p:spPr>
+          <a:xfrm>
+            <a:off x="5724144" y="2295143"/>
+            <a:ext cx="1600200" cy="603504"/>
+          </a:xfrm>
+          <a:prstGeom prst="rect">
+            <a:avLst/>
+          </a:prstGeom>
+          <a:noFill/>
+        </p:spPr>
+        <p:txBody>
+          <a:bodyPr wrap="square" anchor="ctr">
+            <a:spAutoFit/>
+          </a:bodyPr>
+          <a:lstStyle/>
+          <a:p>
+            <a:pPr algn="l"/>
+            <a:r>
+              <a:rPr sz="1500" b="1">
+                <a:solidFill>
+                  <a:srgbClr val="E7EEF7"/>
+                </a:solidFill>
+                <a:latin typeface="Aptos Display"/>
+              </a:rPr>
+              <a:t>Built successfully</a:t>
+            </a:r>
+          </a:p>
+        </p:txBody>
+      </p:sp>
+      <p:sp>
+        <p:nvSpPr>
+          <p:cNvPr id="15" name="Rounded Rectangle 14"/>
+          <p:cNvSpPr/>
+          <p:nvPr/>
+        </p:nvSpPr>
+        <p:spPr>
+          <a:xfrm>
+            <a:off x="658368" y="3611880"/>
+            <a:ext cx="7406640" cy="2331720"/>
+          </a:xfrm>
+          <a:prstGeom prst="roundRect">
+            <a:avLst/>
+          </a:prstGeom>
+          <a:solidFill>
+            <a:srgbClr val="1B263B"/>
+          </a:solidFill>
+          <a:ln>
+            <a:solidFill>
+              <a:srgbClr val="415A77"/>
+            </a:solidFill>
+          </a:ln>
+        </p:spPr>
+        <p:style>
+          <a:lnRef idx="1">
+            <a:schemeClr val="accent1"/>
+          </a:lnRef>
+          <a:fillRef idx="3">
+            <a:schemeClr val="accent1"/>
+          </a:fillRef>
+          <a:effectRef idx="2">
+            <a:schemeClr val="accent1"/>
+          </a:effectRef>
+          <a:fontRef idx="minor">
+            <a:schemeClr val="lt1"/>
+          </a:fontRef>
+        </p:style>
+        <p:txBody>
+          <a:bodyPr rtlCol="0" anchor="ctr"/>
+          <a:lstStyle/>
+          <a:p>
+            <a:pPr algn="ctr"/>
+          </a:p>
+        </p:txBody>
+      </p:sp>
+      <p:sp>
+        <p:nvSpPr>
+          <p:cNvPr id="16" name="TextBox 15"/>
+          <p:cNvSpPr txBox="1"/>
+          <p:nvPr/>
+        </p:nvSpPr>
+        <p:spPr>
+          <a:xfrm>
+            <a:off x="914400" y="3776472"/>
+            <a:ext cx="1920240" cy="320040"/>
           </a:xfrm>
           <a:prstGeom prst="rect">
             <a:avLst/>
@@ -7455,21 +7114,21 @@
                   <a:srgbClr val="E6BE5A"/>
                 </a:solidFill>
               </a:rPr>
-              <a:t>Operator Tips</a:t>
-            </a:r>
-          </a:p>
-        </p:txBody>
-      </p:sp>
-      <p:sp>
-        <p:nvSpPr>
-          <p:cNvPr id="10" name="TextBox 9"/>
+              <a:t>Key Points</a:t>
+            </a:r>
+          </a:p>
+        </p:txBody>
+      </p:sp>
+      <p:sp>
+        <p:nvSpPr>
+          <p:cNvPr id="17" name="TextBox 16"/>
           <p:cNvSpPr txBox="1"/>
           <p:nvPr/>
         </p:nvSpPr>
         <p:spPr>
           <a:xfrm>
-            <a:off x="9098280" y="1737360"/>
-            <a:ext cx="2148840" cy="4023360"/>
+            <a:off x="914400" y="4114800"/>
+            <a:ext cx="7059168" cy="1554480"/>
           </a:xfrm>
           <a:prstGeom prst="rect">
             <a:avLst/>
@@ -7483,96 +7142,137 @@
           <a:lstStyle/>
           <a:p>
             <a:pPr>
+              <a:lnSpc>
+                <a:spcPct val="105000"/>
+              </a:lnSpc>
               <a:spcAft>
-                <a:spcPts val="800"/>
+                <a:spcPts val="500"/>
               </a:spcAft>
             </a:pPr>
             <a:r>
-              <a:rPr sz="1400">
+              <a:rPr sz="1300">
                 <a:solidFill>
                   <a:srgbClr val="E7EEF7"/>
                 </a:solidFill>
                 <a:latin typeface="Aptos"/>
               </a:rPr>
-              <a:t>Keep the documentation venv name at doc-venv unless you have a reason to change it</a:t>
+              <a:t>Visual Studio Professional 2022 now works end-to-end on a new machine</a:t>
             </a:r>
           </a:p>
           <a:p>
             <a:pPr>
+              <a:lnSpc>
+                <a:spcPct val="105000"/>
+              </a:lnSpc>
               <a:spcAft>
-                <a:spcPts val="800"/>
+                <a:spcPts val="500"/>
               </a:spcAft>
             </a:pPr>
             <a:r>
-              <a:rPr sz="1400">
+              <a:rPr sz="1300">
                 <a:solidFill>
                   <a:srgbClr val="E7EEF7"/>
                 </a:solidFill>
                 <a:latin typeface="Aptos"/>
               </a:rPr>
-              <a:t>Choose the release output directory where final packages and zip files should land</a:t>
+              <a:t>Bootstrap autodetect rejects WindowsApps aliases and finds real Python installs</a:t>
             </a:r>
           </a:p>
           <a:p>
             <a:pPr>
+              <a:lnSpc>
+                <a:spcPct val="105000"/>
+              </a:lnSpc>
               <a:spcAft>
-                <a:spcPts val="800"/>
+                <a:spcPts val="500"/>
               </a:spcAft>
             </a:pPr>
             <a:r>
-              <a:rPr sz="1400">
+              <a:rPr sz="1300">
                 <a:solidFill>
                   <a:srgbClr val="E7EEF7"/>
                 </a:solidFill>
                 <a:latin typeface="Aptos"/>
               </a:rPr>
-              <a:t>Set the Windows SDK version expected by the CPython build</a:t>
+              <a:t>The Windows SDK field now prefills from autodetect instead of a stale default</a:t>
             </a:r>
           </a:p>
           <a:p>
             <a:pPr>
+              <a:lnSpc>
+                <a:spcPct val="105000"/>
+              </a:lnSpc>
               <a:spcAft>
-                <a:spcPts val="800"/>
+                <a:spcPts val="500"/>
               </a:spcAft>
             </a:pPr>
             <a:r>
-              <a:rPr sz="1400">
+              <a:rPr sz="1300">
                 <a:solidFill>
                   <a:srgbClr val="E7EEF7"/>
                 </a:solidFill>
                 <a:latin typeface="Aptos"/>
               </a:rPr>
-              <a:t>Use Setup Virtual Environment before the first build on a new source tree</a:t>
-            </a:r>
-          </a:p>
-          <a:p>
-            <a:pPr>
-              <a:spcAft>
-                <a:spcPts val="800"/>
-              </a:spcAft>
-            </a:pPr>
-            <a:r>
-              <a:rPr sz="1400">
-                <a:solidFill>
-                  <a:srgbClr val="E7EEF7"/>
-                </a:solidFill>
-                <a:latin typeface="Aptos"/>
-              </a:rPr>
-              <a:t>PSUB can create or update the documentation venv from the UI.</a:t>
-            </a:r>
-          </a:p>
-        </p:txBody>
-      </p:sp>
-      <p:sp>
-        <p:nvSpPr>
-          <p:cNvPr id="11" name="TextBox 10"/>
+              <a:t>Python 3.10 MSI/doc handling and artifact naming are now more robust</a:t>
+            </a:r>
+          </a:p>
+        </p:txBody>
+      </p:sp>
+      <p:sp>
+        <p:nvSpPr>
+          <p:cNvPr id="18" name="Rounded Rectangle 17"/>
+          <p:cNvSpPr/>
+          <p:nvPr/>
+        </p:nvSpPr>
+        <p:spPr>
+          <a:xfrm>
+            <a:off x="8823960" y="1097280"/>
+            <a:ext cx="2743200" cy="4937760"/>
+          </a:xfrm>
+          <a:prstGeom prst="roundRect">
+            <a:avLst/>
+          </a:prstGeom>
+          <a:solidFill>
+            <a:srgbClr val="1B263B"/>
+          </a:solidFill>
+          <a:ln>
+            <a:solidFill>
+              <a:srgbClr val="415A77"/>
+            </a:solidFill>
+          </a:ln>
+        </p:spPr>
+        <p:style>
+          <a:lnRef idx="1">
+            <a:schemeClr val="accent1"/>
+          </a:lnRef>
+          <a:fillRef idx="3">
+            <a:schemeClr val="accent1"/>
+          </a:fillRef>
+          <a:effectRef idx="2">
+            <a:schemeClr val="accent1"/>
+          </a:effectRef>
+          <a:fontRef idx="minor">
+            <a:schemeClr val="lt1"/>
+          </a:fontRef>
+        </p:style>
+        <p:txBody>
+          <a:bodyPr rtlCol="0" anchor="ctr"/>
+          <a:lstStyle/>
+          <a:p>
+            <a:pPr algn="ctr"/>
+          </a:p>
+        </p:txBody>
+      </p:sp>
+      <p:sp>
+        <p:nvSpPr>
+          <p:cNvPr id="19" name="TextBox 18"/>
           <p:cNvSpPr txBox="1"/>
           <p:nvPr/>
         </p:nvSpPr>
         <p:spPr>
           <a:xfrm>
-            <a:off x="411480" y="6446520"/>
-            <a:ext cx="6949440" cy="228600"/>
+            <a:off x="9098280" y="1325880"/>
+            <a:ext cx="2194560" cy="320040"/>
           </a:xfrm>
           <a:prstGeom prst="rect">
             <a:avLst/>
@@ -7585,6 +7285,81 @@
           </a:bodyPr>
           <a:lstStyle/>
           <a:p>
+            <a:r>
+              <a:rPr b="1" sz="1500">
+                <a:solidFill>
+                  <a:srgbClr val="E6BE5A"/>
+                </a:solidFill>
+              </a:rPr>
+              <a:t>Operator Angle</a:t>
+            </a:r>
+          </a:p>
+        </p:txBody>
+      </p:sp>
+      <p:sp>
+        <p:nvSpPr>
+          <p:cNvPr id="20" name="TextBox 19"/>
+          <p:cNvSpPr txBox="1"/>
+          <p:nvPr/>
+        </p:nvSpPr>
+        <p:spPr>
+          <a:xfrm>
+            <a:off x="9098280" y="1737360"/>
+            <a:ext cx="2148840" cy="4023360"/>
+          </a:xfrm>
+          <a:prstGeom prst="rect">
+            <a:avLst/>
+          </a:prstGeom>
+          <a:noFill/>
+        </p:spPr>
+        <p:txBody>
+          <a:bodyPr wrap="square">
+            <a:spAutoFit/>
+          </a:bodyPr>
+          <a:lstStyle/>
+          <a:p>
+            <a:pPr>
+              <a:lnSpc>
+                <a:spcPct val="105000"/>
+              </a:lnSpc>
+              <a:spcAft>
+                <a:spcPts val="500"/>
+              </a:spcAft>
+            </a:pPr>
+            <a:r>
+              <a:rPr sz="1300">
+                <a:solidFill>
+                  <a:srgbClr val="E7EEF7"/>
+                </a:solidFill>
+                <a:latin typeface="Aptos"/>
+              </a:rPr>
+              <a:t>These were practical fixes discovered during a fresh-machine setup, not just theoretical cleanup.</a:t>
+            </a:r>
+          </a:p>
+        </p:txBody>
+      </p:sp>
+      <p:sp>
+        <p:nvSpPr>
+          <p:cNvPr id="21" name="TextBox 20"/>
+          <p:cNvSpPr txBox="1"/>
+          <p:nvPr/>
+        </p:nvSpPr>
+        <p:spPr>
+          <a:xfrm>
+            <a:off x="411480" y="6446520"/>
+            <a:ext cx="6949440" cy="228600"/>
+          </a:xfrm>
+          <a:prstGeom prst="rect">
+            <a:avLst/>
+          </a:prstGeom>
+          <a:noFill/>
+        </p:spPr>
+        <p:txBody>
+          <a:bodyPr wrap="none">
+            <a:spAutoFit/>
+          </a:bodyPr>
+          <a:lstStyle/>
+          <a:p>
             <a:pPr algn="l"/>
             <a:r>
               <a:rPr sz="1100">
@@ -7599,7 +7374,7 @@
       </p:sp>
       <p:sp>
         <p:nvSpPr>
-          <p:cNvPr id="12" name="TextBox 11"/>
+          <p:cNvPr id="22" name="TextBox 21"/>
           <p:cNvSpPr txBox="1"/>
           <p:nvPr/>
         </p:nvSpPr>
@@ -7764,7 +7539,7 @@
                 </a:solidFill>
                 <a:latin typeface="Aptos Display"/>
               </a:rPr>
-              <a:t>Configure and Start a Build</a:t>
+              <a:t>Common Failure Cases</a:t>
             </a:r>
           </a:p>
         </p:txBody>
@@ -7792,13 +7567,13 @@
           <a:lstStyle/>
           <a:p>
             <a:r>
-              <a:rPr sz="1400">
+              <a:rPr sz="1300">
                 <a:solidFill>
                   <a:srgbClr val="E8EEF4"/>
                 </a:solidFill>
                 <a:latin typeface="Aptos"/>
               </a:rPr>
-              <a:t>Fill in the CPython source and bootstrap interpreter, then launch</a:t>
+              <a:t>Most blocked runs still fall into a short fixable list</a:t>
             </a:r>
           </a:p>
         </p:txBody>
@@ -7811,18 +7586,18 @@
         </p:nvSpPr>
         <p:spPr>
           <a:xfrm>
-            <a:off x="502920" y="1664208"/>
-            <a:ext cx="7818120" cy="4434840"/>
+            <a:off x="566928" y="1783080"/>
+            <a:ext cx="5349240" cy="4526280"/>
           </a:xfrm>
           <a:prstGeom prst="roundRect">
             <a:avLst/>
           </a:prstGeom>
           <a:solidFill>
-            <a:srgbClr val="F5F8FC"/>
+            <a:srgbClr val="1B263B"/>
           </a:solidFill>
           <a:ln>
             <a:solidFill>
-              <a:srgbClr val="415A77"/>
+              <a:srgbClr val="CC3333"/>
             </a:solidFill>
           </a:ln>
         </p:spPr>
@@ -7848,41 +7623,16 @@
           </a:p>
         </p:txBody>
       </p:sp>
-      <p:pic>
-        <p:nvPicPr>
-          <p:cNvPr id="7" name="Picture 6" descr="04-build-configuration.png"/>
-          <p:cNvPicPr>
-            <a:picLocks noChangeAspect="1"/>
-          </p:cNvPicPr>
-          <p:nvPr/>
-        </p:nvPicPr>
-        <p:blipFill>
-          <a:blip r:embed="rId2"/>
-          <a:srcRect/>
-          <a:stretch>
-            <a:fillRect/>
-          </a:stretch>
-        </p:blipFill>
-        <p:spPr>
-          <a:xfrm>
-            <a:off x="667512" y="1828800"/>
-            <a:ext cx="7498079" cy="4114800"/>
-          </a:xfrm>
-          <a:prstGeom prst="rect">
-            <a:avLst/>
-          </a:prstGeom>
-        </p:spPr>
-      </p:pic>
-      <p:sp>
-        <p:nvSpPr>
-          <p:cNvPr id="8" name="Rounded Rectangle 7"/>
+      <p:sp>
+        <p:nvSpPr>
+          <p:cNvPr id="7" name="Rounded Rectangle 6"/>
           <p:cNvSpPr/>
           <p:nvPr/>
         </p:nvSpPr>
         <p:spPr>
           <a:xfrm>
-            <a:off x="8823960" y="1097280"/>
-            <a:ext cx="2743200" cy="4937760"/>
+            <a:off x="6236208" y="1783080"/>
+            <a:ext cx="5349240" cy="4526280"/>
           </a:xfrm>
           <a:prstGeom prst="roundRect">
             <a:avLst/>
@@ -7892,7 +7642,7 @@
           </a:solidFill>
           <a:ln>
             <a:solidFill>
-              <a:srgbClr val="415A77"/>
+              <a:srgbClr val="26A65B"/>
             </a:solidFill>
           </a:ln>
         </p:spPr>
@@ -7920,14 +7670,352 @@
       </p:sp>
       <p:sp>
         <p:nvSpPr>
-          <p:cNvPr id="9" name="TextBox 8"/>
+          <p:cNvPr id="8" name="Rounded Rectangle 7"/>
+          <p:cNvSpPr/>
+          <p:nvPr/>
+        </p:nvSpPr>
+        <p:spPr>
+          <a:xfrm>
+            <a:off x="841248" y="1993392"/>
+            <a:ext cx="1691640" cy="292608"/>
+          </a:xfrm>
+          <a:prstGeom prst="roundRect">
+            <a:avLst/>
+          </a:prstGeom>
+          <a:solidFill>
+            <a:srgbClr val="CC3333"/>
+          </a:solidFill>
+          <a:ln>
+            <a:noFill/>
+          </a:ln>
+        </p:spPr>
+        <p:style>
+          <a:lnRef idx="1">
+            <a:schemeClr val="accent1"/>
+          </a:lnRef>
+          <a:fillRef idx="3">
+            <a:schemeClr val="accent1"/>
+          </a:fillRef>
+          <a:effectRef idx="2">
+            <a:schemeClr val="accent1"/>
+          </a:effectRef>
+          <a:fontRef idx="minor">
+            <a:schemeClr val="lt1"/>
+          </a:fontRef>
+        </p:style>
+        <p:txBody>
+          <a:bodyPr rtlCol="0" anchor="ctr"/>
+          <a:lstStyle/>
+          <a:p>
+            <a:pPr algn="ctr"/>
+            <a:r>
+              <a:rPr sz="1200" b="1">
+                <a:solidFill>
+                  <a:srgbClr val="E7EEF7"/>
+                </a:solidFill>
+              </a:rPr>
+              <a:t>Common Failures</a:t>
+            </a:r>
+          </a:p>
+        </p:txBody>
+      </p:sp>
+      <p:sp>
+        <p:nvSpPr>
+          <p:cNvPr id="9" name="Rounded Rectangle 8"/>
+          <p:cNvSpPr/>
+          <p:nvPr/>
+        </p:nvSpPr>
+        <p:spPr>
+          <a:xfrm>
+            <a:off x="6537960" y="1993392"/>
+            <a:ext cx="1600200" cy="292608"/>
+          </a:xfrm>
+          <a:prstGeom prst="roundRect">
+            <a:avLst/>
+          </a:prstGeom>
+          <a:solidFill>
+            <a:srgbClr val="26A65B"/>
+          </a:solidFill>
+          <a:ln>
+            <a:noFill/>
+          </a:ln>
+        </p:spPr>
+        <p:style>
+          <a:lnRef idx="1">
+            <a:schemeClr val="accent1"/>
+          </a:lnRef>
+          <a:fillRef idx="3">
+            <a:schemeClr val="accent1"/>
+          </a:fillRef>
+          <a:effectRef idx="2">
+            <a:schemeClr val="accent1"/>
+          </a:effectRef>
+          <a:fontRef idx="minor">
+            <a:schemeClr val="lt1"/>
+          </a:fontRef>
+        </p:style>
+        <p:txBody>
+          <a:bodyPr rtlCol="0" anchor="ctr"/>
+          <a:lstStyle/>
+          <a:p>
+            <a:pPr algn="ctr"/>
+            <a:r>
+              <a:rPr sz="1200" b="1">
+                <a:solidFill>
+                  <a:srgbClr val="E7EEF7"/>
+                </a:solidFill>
+              </a:rPr>
+              <a:t>Operator Actions</a:t>
+            </a:r>
+          </a:p>
+        </p:txBody>
+      </p:sp>
+      <p:sp>
+        <p:nvSpPr>
+          <p:cNvPr id="10" name="TextBox 9"/>
           <p:cNvSpPr txBox="1"/>
           <p:nvPr/>
         </p:nvSpPr>
         <p:spPr>
           <a:xfrm>
-            <a:off x="9098280" y="1325880"/>
-            <a:ext cx="2194560" cy="320040"/>
+            <a:off x="868680" y="2423160"/>
+            <a:ext cx="4663440" cy="3566160"/>
+          </a:xfrm>
+          <a:prstGeom prst="rect">
+            <a:avLst/>
+          </a:prstGeom>
+          <a:noFill/>
+        </p:spPr>
+        <p:txBody>
+          <a:bodyPr wrap="square">
+            <a:spAutoFit/>
+          </a:bodyPr>
+          <a:lstStyle/>
+          <a:p>
+            <a:pPr>
+              <a:lnSpc>
+                <a:spcPct val="105000"/>
+              </a:lnSpc>
+              <a:spcAft>
+                <a:spcPts val="500"/>
+              </a:spcAft>
+            </a:pPr>
+            <a:r>
+              <a:rPr sz="1500">
+                <a:solidFill>
+                  <a:srgbClr val="E7EEF7"/>
+                </a:solidFill>
+                <a:latin typeface="Aptos"/>
+              </a:rPr>
+              <a:t>Git missing from PATH</a:t>
+            </a:r>
+          </a:p>
+          <a:p>
+            <a:pPr>
+              <a:lnSpc>
+                <a:spcPct val="105000"/>
+              </a:lnSpc>
+              <a:spcAft>
+                <a:spcPts val="500"/>
+              </a:spcAft>
+            </a:pPr>
+            <a:r>
+              <a:rPr sz="1500">
+                <a:solidFill>
+                  <a:srgbClr val="E7EEF7"/>
+                </a:solidFill>
+                <a:latin typeface="Aptos"/>
+              </a:rPr>
+              <a:t>Windows SDK or MSVC toolchains incomplete</a:t>
+            </a:r>
+          </a:p>
+          <a:p>
+            <a:pPr>
+              <a:lnSpc>
+                <a:spcPct val="105000"/>
+              </a:lnSpc>
+              <a:spcAft>
+                <a:spcPts val="500"/>
+              </a:spcAft>
+            </a:pPr>
+            <a:r>
+              <a:rPr sz="1500">
+                <a:solidFill>
+                  <a:srgbClr val="E7EEF7"/>
+                </a:solidFill>
+                <a:latin typeface="Aptos"/>
+              </a:rPr>
+              <a:t>Wrong bootstrap Python version or alias path</a:t>
+            </a:r>
+          </a:p>
+          <a:p>
+            <a:pPr>
+              <a:lnSpc>
+                <a:spcPct val="105000"/>
+              </a:lnSpc>
+              <a:spcAft>
+                <a:spcPts val="500"/>
+              </a:spcAft>
+            </a:pPr>
+            <a:r>
+              <a:rPr sz="1500">
+                <a:solidFill>
+                  <a:srgbClr val="E7EEF7"/>
+                </a:solidFill>
+                <a:latin typeface="Aptos"/>
+              </a:rPr>
+              <a:t>Missing doc-venv or Sphinx dependencies</a:t>
+            </a:r>
+          </a:p>
+          <a:p>
+            <a:pPr>
+              <a:lnSpc>
+                <a:spcPct val="105000"/>
+              </a:lnSpc>
+              <a:spcAft>
+                <a:spcPts val="500"/>
+              </a:spcAft>
+            </a:pPr>
+            <a:r>
+              <a:rPr sz="1500">
+                <a:solidFill>
+                  <a:srgbClr val="E7EEF7"/>
+                </a:solidFill>
+                <a:latin typeface="Aptos"/>
+              </a:rPr>
+              <a:t>Python 3.10 WiX or .NET 3.5 dependency issue</a:t>
+            </a:r>
+          </a:p>
+        </p:txBody>
+      </p:sp>
+      <p:sp>
+        <p:nvSpPr>
+          <p:cNvPr id="11" name="TextBox 10"/>
+          <p:cNvSpPr txBox="1"/>
+          <p:nvPr/>
+        </p:nvSpPr>
+        <p:spPr>
+          <a:xfrm>
+            <a:off x="6537960" y="2423160"/>
+            <a:ext cx="4663440" cy="3566160"/>
+          </a:xfrm>
+          <a:prstGeom prst="rect">
+            <a:avLst/>
+          </a:prstGeom>
+          <a:noFill/>
+        </p:spPr>
+        <p:txBody>
+          <a:bodyPr wrap="square">
+            <a:spAutoFit/>
+          </a:bodyPr>
+          <a:lstStyle/>
+          <a:p>
+            <a:pPr>
+              <a:lnSpc>
+                <a:spcPct val="105000"/>
+              </a:lnSpc>
+              <a:spcAft>
+                <a:spcPts val="500"/>
+              </a:spcAft>
+            </a:pPr>
+            <a:r>
+              <a:rPr sz="1500">
+                <a:solidFill>
+                  <a:srgbClr val="E7EEF7"/>
+                </a:solidFill>
+                <a:latin typeface="Aptos"/>
+              </a:rPr>
+              <a:t>Install Git for Windows and reopen the shell.</a:t>
+            </a:r>
+          </a:p>
+          <a:p>
+            <a:pPr>
+              <a:lnSpc>
+                <a:spcPct val="105000"/>
+              </a:lnSpc>
+              <a:spcAft>
+                <a:spcPts val="500"/>
+              </a:spcAft>
+            </a:pPr>
+            <a:r>
+              <a:rPr sz="1500">
+                <a:solidFill>
+                  <a:srgbClr val="E7EEF7"/>
+                </a:solidFill>
+                <a:latin typeface="Aptos"/>
+              </a:rPr>
+              <a:t>Use the setup guides linked by the prerequisites panel.</a:t>
+            </a:r>
+          </a:p>
+          <a:p>
+            <a:pPr>
+              <a:lnSpc>
+                <a:spcPct val="105000"/>
+              </a:lnSpc>
+              <a:spcAft>
+                <a:spcPts val="500"/>
+              </a:spcAft>
+            </a:pPr>
+            <a:r>
+              <a:rPr sz="1500">
+                <a:solidFill>
+                  <a:srgbClr val="E7EEF7"/>
+                </a:solidFill>
+                <a:latin typeface="Aptos"/>
+              </a:rPr>
+              <a:t>Switch to a real Python 3.10 or 3.12 executable.</a:t>
+            </a:r>
+          </a:p>
+          <a:p>
+            <a:pPr>
+              <a:lnSpc>
+                <a:spcPct val="105000"/>
+              </a:lnSpc>
+              <a:spcAft>
+                <a:spcPts val="500"/>
+              </a:spcAft>
+            </a:pPr>
+            <a:r>
+              <a:rPr sz="1500">
+                <a:solidFill>
+                  <a:srgbClr val="E7EEF7"/>
+                </a:solidFill>
+                <a:latin typeface="Aptos"/>
+              </a:rPr>
+              <a:t>Run Setup Virtual Environment before retrying.</a:t>
+            </a:r>
+          </a:p>
+          <a:p>
+            <a:pPr>
+              <a:lnSpc>
+                <a:spcPct val="105000"/>
+              </a:lnSpc>
+              <a:spcAft>
+                <a:spcPts val="500"/>
+              </a:spcAft>
+            </a:pPr>
+            <a:r>
+              <a:rPr sz="1500">
+                <a:solidFill>
+                  <a:srgbClr val="E7EEF7"/>
+                </a:solidFill>
+                <a:latin typeface="Aptos"/>
+              </a:rPr>
+              <a:t>Enable .NET Framework 3.5 for older 3.10 MSI flows.</a:t>
+            </a:r>
+          </a:p>
+        </p:txBody>
+      </p:sp>
+      <p:sp>
+        <p:nvSpPr>
+          <p:cNvPr id="12" name="TextBox 11"/>
+          <p:cNvSpPr txBox="1"/>
+          <p:nvPr/>
+        </p:nvSpPr>
+        <p:spPr>
+          <a:xfrm>
+            <a:off x="411480" y="6446520"/>
+            <a:ext cx="6949440" cy="228600"/>
           </a:xfrm>
           <a:prstGeom prst="rect">
             <a:avLst/>
@@ -7940,142 +8028,6 @@
           </a:bodyPr>
           <a:lstStyle/>
           <a:p>
-            <a:r>
-              <a:rPr b="1" sz="1500">
-                <a:solidFill>
-                  <a:srgbClr val="E6BE5A"/>
-                </a:solidFill>
-              </a:rPr>
-              <a:t>Operator Tips</a:t>
-            </a:r>
-          </a:p>
-        </p:txBody>
-      </p:sp>
-      <p:sp>
-        <p:nvSpPr>
-          <p:cNvPr id="10" name="TextBox 9"/>
-          <p:cNvSpPr txBox="1"/>
-          <p:nvPr/>
-        </p:nvSpPr>
-        <p:spPr>
-          <a:xfrm>
-            <a:off x="9098280" y="1737360"/>
-            <a:ext cx="2148840" cy="4023360"/>
-          </a:xfrm>
-          <a:prstGeom prst="rect">
-            <a:avLst/>
-          </a:prstGeom>
-          <a:noFill/>
-        </p:spPr>
-        <p:txBody>
-          <a:bodyPr wrap="square">
-            <a:spAutoFit/>
-          </a:bodyPr>
-          <a:lstStyle/>
-          <a:p>
-            <a:pPr>
-              <a:spcAft>
-                <a:spcPts val="800"/>
-              </a:spcAft>
-            </a:pPr>
-            <a:r>
-              <a:rPr sz="1400">
-                <a:solidFill>
-                  <a:srgbClr val="E7EEF7"/>
-                </a:solidFill>
-                <a:latin typeface="Aptos"/>
-              </a:rPr>
-              <a:t>SourcePath must point at the extracted CPython root containing PCbuild and Tools\msi</a:t>
-            </a:r>
-          </a:p>
-          <a:p>
-            <a:pPr>
-              <a:spcAft>
-                <a:spcPts val="800"/>
-              </a:spcAft>
-            </a:pPr>
-            <a:r>
-              <a:rPr sz="1400">
-                <a:solidFill>
-                  <a:srgbClr val="E7EEF7"/>
-                </a:solidFill>
-                <a:latin typeface="Aptos"/>
-              </a:rPr>
-              <a:t>Bootstrap Python must be 3.10 or 3.12</a:t>
-            </a:r>
-          </a:p>
-          <a:p>
-            <a:pPr>
-              <a:spcAft>
-                <a:spcPts val="800"/>
-              </a:spcAft>
-            </a:pPr>
-            <a:r>
-              <a:rPr sz="1400">
-                <a:solidFill>
-                  <a:srgbClr val="E7EEF7"/>
-                </a:solidFill>
-                <a:latin typeface="Aptos"/>
-              </a:rPr>
-              <a:t>Use Auto-Detect to prefill a compatible local Python path</a:t>
-            </a:r>
-          </a:p>
-          <a:p>
-            <a:pPr>
-              <a:spcAft>
-                <a:spcPts val="800"/>
-              </a:spcAft>
-            </a:pPr>
-            <a:r>
-              <a:rPr sz="1400">
-                <a:solidFill>
-                  <a:srgbClr val="E7EEF7"/>
-                </a:solidFill>
-                <a:latin typeface="Aptos"/>
-              </a:rPr>
-              <a:t>Start Build opens a dedicated terminal and PSUB polls build status in the page</a:t>
-            </a:r>
-          </a:p>
-          <a:p>
-            <a:pPr>
-              <a:spcAft>
-                <a:spcPts val="800"/>
-              </a:spcAft>
-            </a:pPr>
-            <a:r>
-              <a:rPr sz="1400">
-                <a:solidFill>
-                  <a:srgbClr val="E7EEF7"/>
-                </a:solidFill>
-                <a:latin typeface="Aptos"/>
-              </a:rPr>
-              <a:t>The UI blocks empty SourcePath and BootstrapPython values before it starts the build.</a:t>
-            </a:r>
-          </a:p>
-        </p:txBody>
-      </p:sp>
-      <p:sp>
-        <p:nvSpPr>
-          <p:cNvPr id="11" name="TextBox 10"/>
-          <p:cNvSpPr txBox="1"/>
-          <p:nvPr/>
-        </p:nvSpPr>
-        <p:spPr>
-          <a:xfrm>
-            <a:off x="411480" y="6446520"/>
-            <a:ext cx="6949440" cy="228600"/>
-          </a:xfrm>
-          <a:prstGeom prst="rect">
-            <a:avLst/>
-          </a:prstGeom>
-          <a:noFill/>
-        </p:spPr>
-        <p:txBody>
-          <a:bodyPr wrap="none">
-            <a:spAutoFit/>
-          </a:bodyPr>
-          <a:lstStyle/>
-          <a:p>
             <a:pPr algn="l"/>
             <a:r>
               <a:rPr sz="1100">
@@ -8090,7 +8042,7 @@
       </p:sp>
       <p:sp>
         <p:nvSpPr>
-          <p:cNvPr id="12" name="TextBox 11"/>
+          <p:cNvPr id="13" name="TextBox 12"/>
           <p:cNvSpPr txBox="1"/>
           <p:nvPr/>
         </p:nvSpPr>
@@ -8255,7 +8207,7 @@
                 </a:solidFill>
                 <a:latin typeface="Aptos Display"/>
               </a:rPr>
-              <a:t>Monitor Logs and Results</a:t>
+              <a:t>Takeaways</a:t>
             </a:r>
           </a:p>
         </p:txBody>
@@ -8283,13 +8235,13 @@
           <a:lstStyle/>
           <a:p>
             <a:r>
-              <a:rPr sz="1400">
+              <a:rPr sz="1300">
                 <a:solidFill>
                   <a:srgbClr val="E8EEF4"/>
                 </a:solidFill>
                 <a:latin typeface="Aptos"/>
               </a:rPr>
-              <a:t>Use inline status and the log viewer to validate the run</a:t>
+              <a:t>What operators should remember after the walkthrough</a:t>
             </a:r>
           </a:p>
         </p:txBody>
@@ -8302,78 +8254,8 @@
         </p:nvSpPr>
         <p:spPr>
           <a:xfrm>
-            <a:off x="502920" y="1664208"/>
-            <a:ext cx="7818120" cy="4434840"/>
-          </a:xfrm>
-          <a:prstGeom prst="roundRect">
-            <a:avLst/>
-          </a:prstGeom>
-          <a:solidFill>
-            <a:srgbClr val="F5F8FC"/>
-          </a:solidFill>
-          <a:ln>
-            <a:solidFill>
-              <a:srgbClr val="415A77"/>
-            </a:solidFill>
-          </a:ln>
-        </p:spPr>
-        <p:style>
-          <a:lnRef idx="1">
-            <a:schemeClr val="accent1"/>
-          </a:lnRef>
-          <a:fillRef idx="3">
-            <a:schemeClr val="accent1"/>
-          </a:fillRef>
-          <a:effectRef idx="2">
-            <a:schemeClr val="accent1"/>
-          </a:effectRef>
-          <a:fontRef idx="minor">
-            <a:schemeClr val="lt1"/>
-          </a:fontRef>
-        </p:style>
-        <p:txBody>
-          <a:bodyPr rtlCol="0" anchor="ctr"/>
-          <a:lstStyle/>
-          <a:p>
-            <a:pPr algn="ctr"/>
-          </a:p>
-        </p:txBody>
-      </p:sp>
-      <p:pic>
-        <p:nvPicPr>
-          <p:cNvPr id="7" name="Picture 6" descr="06-build-log-or-status.png"/>
-          <p:cNvPicPr>
-            <a:picLocks noChangeAspect="1"/>
-          </p:cNvPicPr>
-          <p:nvPr/>
-        </p:nvPicPr>
-        <p:blipFill>
-          <a:blip r:embed="rId2"/>
-          <a:srcRect/>
-          <a:stretch>
-            <a:fillRect/>
-          </a:stretch>
-        </p:blipFill>
-        <p:spPr>
-          <a:xfrm>
-            <a:off x="667512" y="1828800"/>
-            <a:ext cx="7498079" cy="4114800"/>
-          </a:xfrm>
-          <a:prstGeom prst="rect">
-            <a:avLst/>
-          </a:prstGeom>
-        </p:spPr>
-      </p:pic>
-      <p:sp>
-        <p:nvSpPr>
-          <p:cNvPr id="8" name="Rounded Rectangle 7"/>
-          <p:cNvSpPr/>
-          <p:nvPr/>
-        </p:nvSpPr>
-        <p:spPr>
-          <a:xfrm>
-            <a:off x="8823960" y="1097280"/>
-            <a:ext cx="2743200" cy="4937760"/>
+            <a:off x="658368" y="1874519"/>
+            <a:ext cx="2148840" cy="1280160"/>
           </a:xfrm>
           <a:prstGeom prst="roundRect">
             <a:avLst/>
@@ -8411,47 +8293,14 @@
       </p:sp>
       <p:sp>
         <p:nvSpPr>
-          <p:cNvPr id="9" name="TextBox 8"/>
+          <p:cNvPr id="7" name="TextBox 6"/>
           <p:cNvSpPr txBox="1"/>
           <p:nvPr/>
         </p:nvSpPr>
         <p:spPr>
           <a:xfrm>
-            <a:off x="9098280" y="1325880"/>
-            <a:ext cx="2194560" cy="320040"/>
-          </a:xfrm>
-          <a:prstGeom prst="rect">
-            <a:avLst/>
-          </a:prstGeom>
-          <a:noFill/>
-        </p:spPr>
-        <p:txBody>
-          <a:bodyPr wrap="none">
-            <a:spAutoFit/>
-          </a:bodyPr>
-          <a:lstStyle/>
-          <a:p>
-            <a:r>
-              <a:rPr b="1" sz="1500">
-                <a:solidFill>
-                  <a:srgbClr val="E6BE5A"/>
-                </a:solidFill>
-              </a:rPr>
-              <a:t>Operator Tips</a:t>
-            </a:r>
-          </a:p>
-        </p:txBody>
-      </p:sp>
-      <p:sp>
-        <p:nvSpPr>
-          <p:cNvPr id="10" name="TextBox 9"/>
-          <p:cNvSpPr txBox="1"/>
-          <p:nvPr/>
-        </p:nvSpPr>
-        <p:spPr>
-          <a:xfrm>
-            <a:off x="9098280" y="1737360"/>
-            <a:ext cx="2148840" cy="4023360"/>
+            <a:off x="859536" y="2020823"/>
+            <a:ext cx="1600200" cy="256032"/>
           </a:xfrm>
           <a:prstGeom prst="rect">
             <a:avLst/>
@@ -8464,81 +8313,27 @@
           </a:bodyPr>
           <a:lstStyle/>
           <a:p>
-            <a:pPr>
-              <a:spcAft>
-                <a:spcPts val="800"/>
-              </a:spcAft>
-            </a:pPr>
-            <a:r>
-              <a:rPr sz="1400">
-                <a:solidFill>
-                  <a:srgbClr val="E7EEF7"/>
-                </a:solidFill>
-                <a:latin typeface="Aptos"/>
-              </a:rPr>
-              <a:t>Open Latest Log to inspect the captured run output</a:t>
-            </a:r>
-          </a:p>
-          <a:p>
-            <a:pPr>
-              <a:spcAft>
-                <a:spcPts val="800"/>
-              </a:spcAft>
-            </a:pPr>
-            <a:r>
-              <a:rPr sz="1400">
-                <a:solidFill>
-                  <a:srgbClr val="E7EEF7"/>
-                </a:solidFill>
-                <a:latin typeface="Aptos"/>
-              </a:rPr>
-              <a:t>Watch button and status-color changes for running, success, or failure states</a:t>
-            </a:r>
-          </a:p>
-          <a:p>
-            <a:pPr>
-              <a:spcAft>
-                <a:spcPts val="800"/>
-              </a:spcAft>
-            </a:pPr>
-            <a:r>
-              <a:rPr sz="1400">
-                <a:solidFill>
-                  <a:srgbClr val="E7EEF7"/>
-                </a:solidFill>
-                <a:latin typeface="Aptos"/>
-              </a:rPr>
-              <a:t>Collect release artifacts from the configured release root and CPbuild\amd64\en-us</a:t>
-            </a:r>
-          </a:p>
-          <a:p>
-            <a:pPr>
-              <a:spcAft>
-                <a:spcPts val="800"/>
-              </a:spcAft>
-            </a:pPr>
-            <a:r>
-              <a:rPr sz="1400">
-                <a:solidFill>
-                  <a:srgbClr val="E7EEF7"/>
-                </a:solidFill>
-                <a:latin typeface="Aptos"/>
-              </a:rPr>
-              <a:t>If a real build state is not staged, use the screenshot with the log button highlighted and explain the expected transitions.</a:t>
-            </a:r>
-          </a:p>
-        </p:txBody>
-      </p:sp>
-      <p:sp>
-        <p:nvSpPr>
-          <p:cNvPr id="11" name="TextBox 10"/>
+            <a:r>
+              <a:rPr sz="1200" b="1">
+                <a:solidFill>
+                  <a:srgbClr val="E6BE5A"/>
+                </a:solidFill>
+              </a:rPr>
+              <a:t>One UI</a:t>
+            </a:r>
+          </a:p>
+        </p:txBody>
+      </p:sp>
+      <p:sp>
+        <p:nvSpPr>
+          <p:cNvPr id="8" name="TextBox 7"/>
           <p:cNvSpPr txBox="1"/>
           <p:nvPr/>
         </p:nvSpPr>
         <p:spPr>
           <a:xfrm>
-            <a:off x="411480" y="6446520"/>
-            <a:ext cx="6949440" cy="228600"/>
+            <a:off x="859536" y="2295143"/>
+            <a:ext cx="1600200" cy="603504"/>
           </a:xfrm>
           <a:prstGeom prst="rect">
             <a:avLst/>
@@ -8546,94 +8341,45 @@
           <a:noFill/>
         </p:spPr>
         <p:txBody>
-          <a:bodyPr wrap="none">
+          <a:bodyPr wrap="square" anchor="ctr">
             <a:spAutoFit/>
           </a:bodyPr>
           <a:lstStyle/>
           <a:p>
             <a:pPr algn="l"/>
             <a:r>
-              <a:rPr sz="1100">
-                <a:solidFill>
-                  <a:srgbClr val="E8EEF4"/>
-                </a:solidFill>
-              </a:rPr>
-              <a:t>PSUB | Operator Guide</a:t>
-            </a:r>
-          </a:p>
-        </p:txBody>
-      </p:sp>
-      <p:sp>
-        <p:nvSpPr>
-          <p:cNvPr id="12" name="TextBox 11"/>
-          <p:cNvSpPr txBox="1"/>
-          <p:nvPr/>
-        </p:nvSpPr>
-        <p:spPr>
-          <a:xfrm>
-            <a:off x="11155680" y="6400800"/>
-            <a:ext cx="457200" cy="228600"/>
-          </a:xfrm>
-          <a:prstGeom prst="rect">
-            <a:avLst/>
-          </a:prstGeom>
-          <a:noFill/>
-        </p:spPr>
-        <p:txBody>
-          <a:bodyPr wrap="none">
-            <a:spAutoFit/>
-          </a:bodyPr>
-          <a:lstStyle/>
-          <a:p>
-            <a:pPr algn="r"/>
-            <a:r>
-              <a:rPr sz="1100" b="1">
-                <a:solidFill>
-                  <a:srgbClr val="E8EEF4"/>
-                </a:solidFill>
-              </a:rPr>
-              <a:t>8</a:t>
-            </a:r>
-          </a:p>
-        </p:txBody>
-      </p:sp>
-    </p:spTree>
-  </p:cSld>
-  <p:clrMapOvr>
-    <a:masterClrMapping/>
-  </p:clrMapOvr>
-</p:sld>
-</file>
-
-<file path=ppt/slides/slide9.xml><?xml version="1.0" encoding="utf-8"?>
-<p:sld xmlns:a="http://schemas.openxmlformats.org/drawingml/2006/main" xmlns:p="http://schemas.openxmlformats.org/presentationml/2006/main" xmlns:r="http://schemas.openxmlformats.org/officeDocument/2006/relationships">
-  <p:cSld>
-    <p:spTree>
-      <p:nvGrpSpPr>
-        <p:cNvPr id="1" name=""/>
-        <p:cNvGrpSpPr/>
-        <p:nvPr/>
-      </p:nvGrpSpPr>
-      <p:grpSpPr/>
-      <p:sp>
-        <p:nvSpPr>
-          <p:cNvPr id="2" name="Rectangle 1"/>
+              <a:rPr sz="1500" b="1">
+                <a:solidFill>
+                  <a:srgbClr val="E7EEF7"/>
+                </a:solidFill>
+                <a:latin typeface="Aptos Display"/>
+              </a:rPr>
+              <a:t>Less operator drift</a:t>
+            </a:r>
+          </a:p>
+        </p:txBody>
+      </p:sp>
+      <p:sp>
+        <p:nvSpPr>
+          <p:cNvPr id="9" name="Rounded Rectangle 8"/>
           <p:cNvSpPr/>
           <p:nvPr/>
         </p:nvSpPr>
         <p:spPr>
           <a:xfrm>
-            <a:off x="0" y="0"/>
-            <a:ext cx="12191695" cy="6858000"/>
-          </a:xfrm>
-          <a:prstGeom prst="rect">
+            <a:off x="3090672" y="1874519"/>
+            <a:ext cx="2148840" cy="1280160"/>
+          </a:xfrm>
+          <a:prstGeom prst="roundRect">
             <a:avLst/>
           </a:prstGeom>
           <a:solidFill>
-            <a:srgbClr val="0D1B2A"/>
+            <a:srgbClr val="1B263B"/>
           </a:solidFill>
           <a:ln>
-            <a:noFill/>
+            <a:solidFill>
+              <a:srgbClr val="415A77"/>
+            </a:solidFill>
           </a:ln>
         </p:spPr>
         <p:style>
@@ -8660,23 +8406,93 @@
       </p:sp>
       <p:sp>
         <p:nvSpPr>
-          <p:cNvPr id="3" name="Rectangle 2"/>
+          <p:cNvPr id="10" name="TextBox 9"/>
+          <p:cNvSpPr txBox="1"/>
+          <p:nvPr/>
+        </p:nvSpPr>
+        <p:spPr>
+          <a:xfrm>
+            <a:off x="3291840" y="2020823"/>
+            <a:ext cx="1600200" cy="256032"/>
+          </a:xfrm>
+          <a:prstGeom prst="rect">
+            <a:avLst/>
+          </a:prstGeom>
+          <a:noFill/>
+        </p:spPr>
+        <p:txBody>
+          <a:bodyPr wrap="square">
+            <a:spAutoFit/>
+          </a:bodyPr>
+          <a:lstStyle/>
+          <a:p>
+            <a:r>
+              <a:rPr sz="1200" b="1">
+                <a:solidFill>
+                  <a:srgbClr val="E6BE5A"/>
+                </a:solidFill>
+              </a:rPr>
+              <a:t>Preflight first</a:t>
+            </a:r>
+          </a:p>
+        </p:txBody>
+      </p:sp>
+      <p:sp>
+        <p:nvSpPr>
+          <p:cNvPr id="11" name="TextBox 10"/>
+          <p:cNvSpPr txBox="1"/>
+          <p:nvPr/>
+        </p:nvSpPr>
+        <p:spPr>
+          <a:xfrm>
+            <a:off x="3291840" y="2295143"/>
+            <a:ext cx="1600200" cy="603504"/>
+          </a:xfrm>
+          <a:prstGeom prst="rect">
+            <a:avLst/>
+          </a:prstGeom>
+          <a:noFill/>
+        </p:spPr>
+        <p:txBody>
+          <a:bodyPr wrap="square" anchor="ctr">
+            <a:spAutoFit/>
+          </a:bodyPr>
+          <a:lstStyle/>
+          <a:p>
+            <a:pPr algn="l"/>
+            <a:r>
+              <a:rPr sz="1500" b="1">
+                <a:solidFill>
+                  <a:srgbClr val="E7EEF7"/>
+                </a:solidFill>
+                <a:latin typeface="Aptos Display"/>
+              </a:rPr>
+              <a:t>Fewer failed runs</a:t>
+            </a:r>
+          </a:p>
+        </p:txBody>
+      </p:sp>
+      <p:sp>
+        <p:nvSpPr>
+          <p:cNvPr id="12" name="Rounded Rectangle 11"/>
           <p:cNvSpPr/>
           <p:nvPr/>
         </p:nvSpPr>
         <p:spPr>
           <a:xfrm>
-            <a:off x="0" y="0"/>
-            <a:ext cx="12191695" cy="292608"/>
-          </a:xfrm>
-          <a:prstGeom prst="rect">
+            <a:off x="5522976" y="1874519"/>
+            <a:ext cx="2148840" cy="1280160"/>
+          </a:xfrm>
+          <a:prstGeom prst="roundRect">
             <a:avLst/>
           </a:prstGeom>
           <a:solidFill>
-            <a:srgbClr val="3F72AF"/>
+            <a:srgbClr val="1B263B"/>
           </a:solidFill>
           <a:ln>
-            <a:noFill/>
+            <a:solidFill>
+              <a:srgbClr val="415A77"/>
+            </a:solidFill>
           </a:ln>
         </p:spPr>
         <p:style>
@@ -8703,14 +8519,14 @@
       </p:sp>
       <p:sp>
         <p:nvSpPr>
-          <p:cNvPr id="4" name="TextBox 3"/>
+          <p:cNvPr id="13" name="TextBox 12"/>
           <p:cNvSpPr txBox="1"/>
           <p:nvPr/>
         </p:nvSpPr>
         <p:spPr>
           <a:xfrm>
-            <a:off x="548640" y="502920"/>
-            <a:ext cx="8138160" cy="822960"/>
+            <a:off x="5724144" y="2020823"/>
+            <a:ext cx="1600200" cy="256032"/>
           </a:xfrm>
           <a:prstGeom prst="rect">
             <a:avLst/>
@@ -8718,33 +8534,32 @@
           <a:noFill/>
         </p:spPr>
         <p:txBody>
-          <a:bodyPr wrap="none">
+          <a:bodyPr wrap="square">
             <a:spAutoFit/>
           </a:bodyPr>
           <a:lstStyle/>
           <a:p>
             <a:r>
-              <a:rPr sz="2800" b="1">
-                <a:solidFill>
-                  <a:srgbClr val="E7EEF7"/>
-                </a:solidFill>
-                <a:latin typeface="Aptos Display"/>
-              </a:rPr>
-              <a:t>Common Failure Cases</a:t>
-            </a:r>
-          </a:p>
-        </p:txBody>
-      </p:sp>
-      <p:sp>
-        <p:nvSpPr>
-          <p:cNvPr id="5" name="TextBox 4"/>
+              <a:rPr sz="1200" b="1">
+                <a:solidFill>
+                  <a:srgbClr val="E6BE5A"/>
+                </a:solidFill>
+              </a:rPr>
+              <a:t>Repeatable</a:t>
+            </a:r>
+          </a:p>
+        </p:txBody>
+      </p:sp>
+      <p:sp>
+        <p:nvSpPr>
+          <p:cNvPr id="14" name="TextBox 13"/>
           <p:cNvSpPr txBox="1"/>
           <p:nvPr/>
         </p:nvSpPr>
         <p:spPr>
           <a:xfrm>
-            <a:off x="594360" y="1170432"/>
-            <a:ext cx="7680960" cy="457200"/>
+            <a:off x="5724144" y="2295143"/>
+            <a:ext cx="1600200" cy="603504"/>
           </a:xfrm>
           <a:prstGeom prst="rect">
             <a:avLst/>
@@ -8752,33 +8567,34 @@
           <a:noFill/>
         </p:spPr>
         <p:txBody>
-          <a:bodyPr wrap="none">
+          <a:bodyPr wrap="square" anchor="ctr">
             <a:spAutoFit/>
           </a:bodyPr>
           <a:lstStyle/>
           <a:p>
-            <a:r>
-              <a:rPr sz="1400">
-                <a:solidFill>
-                  <a:srgbClr val="E8EEF4"/>
-                </a:solidFill>
-                <a:latin typeface="Aptos"/>
-              </a:rPr>
-              <a:t>Most blocked runs fall into a small set of operator-fixable issues</a:t>
-            </a:r>
-          </a:p>
-        </p:txBody>
-      </p:sp>
-      <p:sp>
-        <p:nvSpPr>
-          <p:cNvPr id="6" name="Rounded Rectangle 5"/>
+            <a:pPr algn="l"/>
+            <a:r>
+              <a:rPr sz="1500" b="1">
+                <a:solidFill>
+                  <a:srgbClr val="E7EEF7"/>
+                </a:solidFill>
+                <a:latin typeface="Aptos Display"/>
+              </a:rPr>
+              <a:t>UI plus CLI</a:t>
+            </a:r>
+          </a:p>
+        </p:txBody>
+      </p:sp>
+      <p:sp>
+        <p:nvSpPr>
+          <p:cNvPr id="15" name="Rounded Rectangle 14"/>
           <p:cNvSpPr/>
           <p:nvPr/>
         </p:nvSpPr>
         <p:spPr>
           <a:xfrm>
-            <a:off x="566928" y="1783080"/>
-            <a:ext cx="5349240" cy="4526280"/>
+            <a:off x="658368" y="3611880"/>
+            <a:ext cx="7406640" cy="2331720"/>
           </a:xfrm>
           <a:prstGeom prst="roundRect">
             <a:avLst/>
@@ -8788,7 +8604,7 @@
           </a:solidFill>
           <a:ln>
             <a:solidFill>
-              <a:srgbClr val="CC3333"/>
+              <a:srgbClr val="415A77"/>
             </a:solidFill>
           </a:ln>
         </p:spPr>
@@ -8816,14 +8632,127 @@
       </p:sp>
       <p:sp>
         <p:nvSpPr>
-          <p:cNvPr id="7" name="Rounded Rectangle 6"/>
+          <p:cNvPr id="16" name="TextBox 15"/>
+          <p:cNvSpPr txBox="1"/>
+          <p:nvPr/>
+        </p:nvSpPr>
+        <p:spPr>
+          <a:xfrm>
+            <a:off x="914400" y="3776472"/>
+            <a:ext cx="1920240" cy="320040"/>
+          </a:xfrm>
+          <a:prstGeom prst="rect">
+            <a:avLst/>
+          </a:prstGeom>
+          <a:noFill/>
+        </p:spPr>
+        <p:txBody>
+          <a:bodyPr wrap="none">
+            <a:spAutoFit/>
+          </a:bodyPr>
+          <a:lstStyle/>
+          <a:p>
+            <a:r>
+              <a:rPr b="1" sz="1500">
+                <a:solidFill>
+                  <a:srgbClr val="E6BE5A"/>
+                </a:solidFill>
+              </a:rPr>
+              <a:t>Key Points</a:t>
+            </a:r>
+          </a:p>
+        </p:txBody>
+      </p:sp>
+      <p:sp>
+        <p:nvSpPr>
+          <p:cNvPr id="17" name="TextBox 16"/>
+          <p:cNvSpPr txBox="1"/>
+          <p:nvPr/>
+        </p:nvSpPr>
+        <p:spPr>
+          <a:xfrm>
+            <a:off x="914400" y="4114800"/>
+            <a:ext cx="7059168" cy="1554480"/>
+          </a:xfrm>
+          <a:prstGeom prst="rect">
+            <a:avLst/>
+          </a:prstGeom>
+          <a:noFill/>
+        </p:spPr>
+        <p:txBody>
+          <a:bodyPr wrap="square">
+            <a:spAutoFit/>
+          </a:bodyPr>
+          <a:lstStyle/>
+          <a:p>
+            <a:pPr>
+              <a:lnSpc>
+                <a:spcPct val="105000"/>
+              </a:lnSpc>
+              <a:spcAft>
+                <a:spcPts val="500"/>
+              </a:spcAft>
+            </a:pPr>
+            <a:r>
+              <a:rPr sz="1400">
+                <a:solidFill>
+                  <a:srgbClr val="E7EEF7"/>
+                </a:solidFill>
+                <a:latin typeface="Aptos"/>
+              </a:rPr>
+              <a:t>Treat PSUB as the primary operator entry point for Windows Python release builds</a:t>
+            </a:r>
+          </a:p>
+          <a:p>
+            <a:pPr>
+              <a:lnSpc>
+                <a:spcPct val="105000"/>
+              </a:lnSpc>
+              <a:spcAft>
+                <a:spcPts val="500"/>
+              </a:spcAft>
+            </a:pPr>
+            <a:r>
+              <a:rPr sz="1400">
+                <a:solidFill>
+                  <a:srgbClr val="E7EEF7"/>
+                </a:solidFill>
+                <a:latin typeface="Aptos"/>
+              </a:rPr>
+              <a:t>Trust the prerequisite panel before starting a long build</a:t>
+            </a:r>
+          </a:p>
+          <a:p>
+            <a:pPr>
+              <a:lnSpc>
+                <a:spcPct val="105000"/>
+              </a:lnSpc>
+              <a:spcAft>
+                <a:spcPts val="500"/>
+              </a:spcAft>
+            </a:pPr>
+            <a:r>
+              <a:rPr sz="1400">
+                <a:solidFill>
+                  <a:srgbClr val="E7EEF7"/>
+                </a:solidFill>
+                <a:latin typeface="Aptos"/>
+              </a:rPr>
+              <a:t>Use the UI for clarity and the CLI when you need scripted repeatability</a:t>
+            </a:r>
+          </a:p>
+        </p:txBody>
+      </p:sp>
+      <p:sp>
+        <p:nvSpPr>
+          <p:cNvPr id="18" name="Rounded Rectangle 17"/>
           <p:cNvSpPr/>
           <p:nvPr/>
         </p:nvSpPr>
         <p:spPr>
           <a:xfrm>
-            <a:off x="6236208" y="1783080"/>
-            <a:ext cx="5349240" cy="4526280"/>
+            <a:off x="8823960" y="1097280"/>
+            <a:ext cx="2743200" cy="4937760"/>
           </a:xfrm>
           <a:prstGeom prst="roundRect">
             <a:avLst/>
@@ -8833,7 +8762,7 @@
           </a:solidFill>
           <a:ln>
             <a:solidFill>
-              <a:srgbClr val="26A65B"/>
+              <a:srgbClr val="415A77"/>
             </a:solidFill>
           </a:ln>
         </p:spPr>
@@ -8861,116 +8790,47 @@
       </p:sp>
       <p:sp>
         <p:nvSpPr>
-          <p:cNvPr id="8" name="Rounded Rectangle 7"/>
-          <p:cNvSpPr/>
-          <p:nvPr/>
-        </p:nvSpPr>
-        <p:spPr>
-          <a:xfrm>
-            <a:off x="841248" y="1993392"/>
-            <a:ext cx="1691640" cy="292608"/>
-          </a:xfrm>
-          <a:prstGeom prst="roundRect">
-            <a:avLst/>
-          </a:prstGeom>
-          <a:solidFill>
-            <a:srgbClr val="CC3333"/>
-          </a:solidFill>
-          <a:ln>
-            <a:noFill/>
-          </a:ln>
-        </p:spPr>
-        <p:style>
-          <a:lnRef idx="1">
-            <a:schemeClr val="accent1"/>
-          </a:lnRef>
-          <a:fillRef idx="3">
-            <a:schemeClr val="accent1"/>
-          </a:fillRef>
-          <a:effectRef idx="2">
-            <a:schemeClr val="accent1"/>
-          </a:effectRef>
-          <a:fontRef idx="minor">
-            <a:schemeClr val="lt1"/>
-          </a:fontRef>
-        </p:style>
-        <p:txBody>
-          <a:bodyPr rtlCol="0" anchor="ctr"/>
-          <a:lstStyle/>
-          <a:p>
-            <a:pPr algn="ctr"/>
-            <a:r>
-              <a:rPr sz="1200" b="1">
-                <a:solidFill>
-                  <a:srgbClr val="E7EEF7"/>
-                </a:solidFill>
-              </a:rPr>
-              <a:t>Common Failures</a:t>
-            </a:r>
-          </a:p>
-        </p:txBody>
-      </p:sp>
-      <p:sp>
-        <p:nvSpPr>
-          <p:cNvPr id="9" name="Rounded Rectangle 8"/>
-          <p:cNvSpPr/>
-          <p:nvPr/>
-        </p:nvSpPr>
-        <p:spPr>
-          <a:xfrm>
-            <a:off x="6537960" y="1993392"/>
-            <a:ext cx="1600200" cy="292608"/>
-          </a:xfrm>
-          <a:prstGeom prst="roundRect">
-            <a:avLst/>
-          </a:prstGeom>
-          <a:solidFill>
-            <a:srgbClr val="26A65B"/>
-          </a:solidFill>
-          <a:ln>
-            <a:noFill/>
-          </a:ln>
-        </p:spPr>
-        <p:style>
-          <a:lnRef idx="1">
-            <a:schemeClr val="accent1"/>
-          </a:lnRef>
-          <a:fillRef idx="3">
-            <a:schemeClr val="accent1"/>
-          </a:fillRef>
-          <a:effectRef idx="2">
-            <a:schemeClr val="accent1"/>
-          </a:effectRef>
-          <a:fontRef idx="minor">
-            <a:schemeClr val="lt1"/>
-          </a:fontRef>
-        </p:style>
-        <p:txBody>
-          <a:bodyPr rtlCol="0" anchor="ctr"/>
-          <a:lstStyle/>
-          <a:p>
-            <a:pPr algn="ctr"/>
-            <a:r>
-              <a:rPr sz="1200" b="1">
-                <a:solidFill>
-                  <a:srgbClr val="E7EEF7"/>
-                </a:solidFill>
-              </a:rPr>
-              <a:t>Operator Actions</a:t>
-            </a:r>
-          </a:p>
-        </p:txBody>
-      </p:sp>
-      <p:sp>
-        <p:nvSpPr>
-          <p:cNvPr id="10" name="TextBox 9"/>
+          <p:cNvPr id="19" name="TextBox 18"/>
           <p:cNvSpPr txBox="1"/>
           <p:nvPr/>
         </p:nvSpPr>
         <p:spPr>
           <a:xfrm>
-            <a:off x="868680" y="2423160"/>
-            <a:ext cx="4663440" cy="3566160"/>
+            <a:off x="9098280" y="1325880"/>
+            <a:ext cx="2194560" cy="320040"/>
+          </a:xfrm>
+          <a:prstGeom prst="rect">
+            <a:avLst/>
+          </a:prstGeom>
+          <a:noFill/>
+        </p:spPr>
+        <p:txBody>
+          <a:bodyPr wrap="none">
+            <a:spAutoFit/>
+          </a:bodyPr>
+          <a:lstStyle/>
+          <a:p>
+            <a:r>
+              <a:rPr b="1" sz="1500">
+                <a:solidFill>
+                  <a:srgbClr val="E6BE5A"/>
+                </a:solidFill>
+              </a:rPr>
+              <a:t>Operator Angle</a:t>
+            </a:r>
+          </a:p>
+        </p:txBody>
+      </p:sp>
+      <p:sp>
+        <p:nvSpPr>
+          <p:cNvPr id="20" name="TextBox 19"/>
+          <p:cNvSpPr txBox="1"/>
+          <p:nvPr/>
+        </p:nvSpPr>
+        <p:spPr>
+          <a:xfrm>
+            <a:off x="9098280" y="1737360"/>
+            <a:ext cx="2148840" cy="4023360"/>
           </a:xfrm>
           <a:prstGeom prst="rect">
             <a:avLst/>
@@ -8984,224 +8844,28 @@
           <a:lstStyle/>
           <a:p>
             <a:pPr>
+              <a:lnSpc>
+                <a:spcPct val="105000"/>
+              </a:lnSpc>
               <a:spcAft>
-                <a:spcPts val="800"/>
+                <a:spcPts val="500"/>
               </a:spcAft>
             </a:pPr>
             <a:r>
-              <a:rPr sz="1500">
+              <a:rPr sz="1300">
                 <a:solidFill>
                   <a:srgbClr val="E7EEF7"/>
                 </a:solidFill>
                 <a:latin typeface="Aptos"/>
               </a:rPr>
-              <a:t>Git missing from PATH</a:t>
-            </a:r>
-          </a:p>
-          <a:p>
-            <a:pPr>
-              <a:spcAft>
-                <a:spcPts val="800"/>
-              </a:spcAft>
-            </a:pPr>
-            <a:r>
-              <a:rPr sz="1500">
-                <a:solidFill>
-                  <a:srgbClr val="E7EEF7"/>
-                </a:solidFill>
-                <a:latin typeface="Aptos"/>
-              </a:rPr>
-              <a:t>Windows SDK or MSVC toolchains not fully installed</a:t>
-            </a:r>
-          </a:p>
-          <a:p>
-            <a:pPr>
-              <a:spcAft>
-                <a:spcPts val="800"/>
-              </a:spcAft>
-            </a:pPr>
-            <a:r>
-              <a:rPr sz="1500">
-                <a:solidFill>
-                  <a:srgbClr val="E7EEF7"/>
-                </a:solidFill>
-                <a:latin typeface="Aptos"/>
-              </a:rPr>
-              <a:t>Wrong bootstrap Python version</a:t>
-            </a:r>
-          </a:p>
-          <a:p>
-            <a:pPr>
-              <a:spcAft>
-                <a:spcPts val="800"/>
-              </a:spcAft>
-            </a:pPr>
-            <a:r>
-              <a:rPr sz="1500">
-                <a:solidFill>
-                  <a:srgbClr val="E7EEF7"/>
-                </a:solidFill>
-                <a:latin typeface="Aptos"/>
-              </a:rPr>
-              <a:t>Missing doc-venv or missing Sphinx dependencies</a:t>
-            </a:r>
-          </a:p>
-          <a:p>
-            <a:pPr>
-              <a:spcAft>
-                <a:spcPts val="800"/>
-              </a:spcAft>
-            </a:pPr>
-            <a:r>
-              <a:rPr sz="1500">
-                <a:solidFill>
-                  <a:srgbClr val="E7EEF7"/>
-                </a:solidFill>
-                <a:latin typeface="Aptos"/>
-              </a:rPr>
-              <a:t>Python 3.10 WiX /.NET 3.5 dependency problem</a:t>
-            </a:r>
-          </a:p>
-          <a:p>
-            <a:pPr>
-              <a:spcAft>
-                <a:spcPts val="800"/>
-              </a:spcAft>
-            </a:pPr>
-            <a:r>
-              <a:rPr sz="1500">
-                <a:solidFill>
-                  <a:srgbClr val="E7EEF7"/>
-                </a:solidFill>
-                <a:latin typeface="Aptos"/>
-              </a:rPr>
-              <a:t>buildrelease.bat reports Build FAILED even when exit code is 0</a:t>
-            </a:r>
-          </a:p>
-        </p:txBody>
-      </p:sp>
-      <p:sp>
-        <p:nvSpPr>
-          <p:cNvPr id="11" name="TextBox 10"/>
-          <p:cNvSpPr txBox="1"/>
-          <p:nvPr/>
-        </p:nvSpPr>
-        <p:spPr>
-          <a:xfrm>
-            <a:off x="6537960" y="2423160"/>
-            <a:ext cx="4663440" cy="3566160"/>
-          </a:xfrm>
-          <a:prstGeom prst="rect">
-            <a:avLst/>
-          </a:prstGeom>
-          <a:noFill/>
-        </p:spPr>
-        <p:txBody>
-          <a:bodyPr wrap="square">
-            <a:spAutoFit/>
-          </a:bodyPr>
-          <a:lstStyle/>
-          <a:p>
-            <a:pPr>
-              <a:spcAft>
-                <a:spcPts val="800"/>
-              </a:spcAft>
-            </a:pPr>
-            <a:r>
-              <a:rPr sz="1500">
-                <a:solidFill>
-                  <a:srgbClr val="E7EEF7"/>
-                </a:solidFill>
-                <a:latin typeface="Aptos"/>
-              </a:rPr>
-              <a:t>Install Git for Windows and restart the shell.</a:t>
-            </a:r>
-          </a:p>
-          <a:p>
-            <a:pPr>
-              <a:spcAft>
-                <a:spcPts val="800"/>
-              </a:spcAft>
-            </a:pPr>
-            <a:r>
-              <a:rPr sz="1500">
-                <a:solidFill>
-                  <a:srgbClr val="E7EEF7"/>
-                </a:solidFill>
-                <a:latin typeface="Aptos"/>
-              </a:rPr>
-              <a:t>Use the setup guides linked by the prerequisites panel.</a:t>
-            </a:r>
-          </a:p>
-          <a:p>
-            <a:pPr>
-              <a:spcAft>
-                <a:spcPts val="800"/>
-              </a:spcAft>
-            </a:pPr>
-            <a:r>
-              <a:rPr sz="1500">
-                <a:solidFill>
-                  <a:srgbClr val="E7EEF7"/>
-                </a:solidFill>
-                <a:latin typeface="Aptos"/>
-              </a:rPr>
-              <a:t>Switch to Python 3.10 or 3.12 only.</a:t>
-            </a:r>
-          </a:p>
-          <a:p>
-            <a:pPr>
-              <a:spcAft>
-                <a:spcPts val="800"/>
-              </a:spcAft>
-            </a:pPr>
-            <a:r>
-              <a:rPr sz="1500">
-                <a:solidFill>
-                  <a:srgbClr val="E7EEF7"/>
-                </a:solidFill>
-                <a:latin typeface="Aptos"/>
-              </a:rPr>
-              <a:t>Run Setup Virtual Environment or install Doc\requirements.txt into the venv.</a:t>
-            </a:r>
-          </a:p>
-          <a:p>
-            <a:pPr>
-              <a:spcAft>
-                <a:spcPts val="800"/>
-              </a:spcAft>
-            </a:pPr>
-            <a:r>
-              <a:rPr sz="1500">
-                <a:solidFill>
-                  <a:srgbClr val="E7EEF7"/>
-                </a:solidFill>
-                <a:latin typeface="Aptos"/>
-              </a:rPr>
-              <a:t>Enable .NET Framework 3.5 and rerun MSI externals for 3.10 flows.</a:t>
-            </a:r>
-          </a:p>
-          <a:p>
-            <a:pPr>
-              <a:spcAft>
-                <a:spcPts val="800"/>
-              </a:spcAft>
-            </a:pPr>
-            <a:r>
-              <a:rPr sz="1500">
-                <a:solidFill>
-                  <a:srgbClr val="E7EEF7"/>
-                </a:solidFill>
-                <a:latin typeface="Aptos"/>
-              </a:rPr>
-              <a:t>Trust PSUB's output-based failure guard instead of the batch file exit code alone.</a:t>
-            </a:r>
-          </a:p>
-        </p:txBody>
-      </p:sp>
-      <p:sp>
-        <p:nvSpPr>
-          <p:cNvPr id="12" name="TextBox 11"/>
+              <a:t>If the machine is green and bootstrap Python is real, the rest of the workflow becomes predictable.</a:t>
+            </a:r>
+          </a:p>
+        </p:txBody>
+      </p:sp>
+      <p:sp>
+        <p:nvSpPr>
+          <p:cNvPr id="21" name="TextBox 20"/>
           <p:cNvSpPr txBox="1"/>
           <p:nvPr/>
         </p:nvSpPr>
@@ -9235,7 +8899,7 @@
       </p:sp>
       <p:sp>
         <p:nvSpPr>
-          <p:cNvPr id="13" name="TextBox 12"/>
+          <p:cNvPr id="22" name="TextBox 21"/>
           <p:cNvSpPr txBox="1"/>
           <p:nvPr/>
         </p:nvSpPr>
@@ -9262,7 +8926,7 @@
                   <a:srgbClr val="E8EEF4"/>
                 </a:solidFill>
               </a:rPr>
-              <a:t>9</a:t>
+              <a:t>8</a:t>
             </a:r>
           </a:p>
         </p:txBody>

--- a/output/presentation/PSUB-Operator-Guide.pptx
+++ b/output/presentation/PSUB-Operator-Guide.pptx
@@ -3095,6 +3095,49 @@
         <p:nvPr/>
       </p:nvGrpSpPr>
       <p:grpSpPr/>
+      <p:sp>
+        <p:nvSpPr>
+          <p:cNvPr id="7" name="Rounded Rectangle 6"/>
+          <p:cNvSpPr/>
+          <p:nvPr/>
+        </p:nvSpPr>
+        <p:spPr>
+          <a:xfrm>
+            <a:off x="5897880" y="1078992"/>
+            <a:ext cx="5577840" cy="4160520"/>
+          </a:xfrm>
+          <a:prstGeom prst="roundRect">
+            <a:avLst/>
+          </a:prstGeom>
+          <a:solidFill>
+            <a:srgbClr val="040A12"/>
+          </a:solidFill>
+          <a:ln>
+            <a:noFill/>
+          </a:ln>
+        </p:spPr>
+        <p:style>
+          <a:lnRef idx="1">
+            <a:schemeClr val="accent1"/>
+          </a:lnRef>
+          <a:fillRef idx="3">
+            <a:schemeClr val="accent1"/>
+          </a:fillRef>
+          <a:effectRef idx="2">
+            <a:schemeClr val="accent1"/>
+          </a:effectRef>
+          <a:fontRef idx="minor">
+            <a:schemeClr val="lt1"/>
+          </a:fontRef>
+        </p:style>
+        <p:txBody>
+          <a:bodyPr rtlCol="0" anchor="ctr"/>
+          <a:lstStyle/>
+          <a:p>
+            <a:pPr algn="ctr"/>
+          </a:p>
+        </p:txBody>
+      </p:sp>
       <p:pic>
         <p:nvPicPr>
           <p:cNvPr id="2" name="Picture 1" descr="background.png"/>
@@ -3171,8 +3214,8 @@
         </p:nvSpPr>
         <p:spPr>
           <a:xfrm>
-            <a:off x="621792" y="868680"/>
-            <a:ext cx="1508760" cy="82296"/>
+            <a:off x="658368" y="896112"/>
+            <a:ext cx="1280160" cy="73152"/>
           </a:xfrm>
           <a:prstGeom prst="rect">
             <a:avLst/>
@@ -3214,8 +3257,8 @@
         </p:nvSpPr>
         <p:spPr>
           <a:xfrm>
-            <a:off x="548640" y="502920"/>
-            <a:ext cx="8138160" cy="822960"/>
+            <a:off x="658368" y="658368"/>
+            <a:ext cx="5120640" cy="868680"/>
           </a:xfrm>
           <a:prstGeom prst="rect">
             <a:avLst/>
@@ -3229,7 +3272,7 @@
           <a:lstStyle/>
           <a:p>
             <a:r>
-              <a:rPr sz="2800" b="1">
+              <a:rPr sz="2700" b="1">
                 <a:solidFill>
                   <a:srgbClr val="E7EEF7"/>
                 </a:solidFill>
@@ -3248,8 +3291,8 @@
         </p:nvSpPr>
         <p:spPr>
           <a:xfrm>
-            <a:off x="594360" y="1170432"/>
-            <a:ext cx="7680960" cy="457200"/>
+            <a:off x="713232" y="1536192"/>
+            <a:ext cx="5029200" cy="594360"/>
           </a:xfrm>
           <a:prstGeom prst="rect">
             <a:avLst/>
@@ -3276,14 +3319,59 @@
       </p:sp>
       <p:sp>
         <p:nvSpPr>
-          <p:cNvPr id="7" name="Rounded Rectangle 6"/>
+          <p:cNvPr id="8" name="Rounded Rectangle 7"/>
           <p:cNvSpPr/>
           <p:nvPr/>
         </p:nvSpPr>
         <p:spPr>
           <a:xfrm>
-            <a:off x="640080" y="5440680"/>
-            <a:ext cx="3246120" cy="292608"/>
+            <a:off x="5760720" y="932688"/>
+            <a:ext cx="5577840" cy="4160520"/>
+          </a:xfrm>
+          <a:prstGeom prst="roundRect">
+            <a:avLst/>
+          </a:prstGeom>
+          <a:solidFill>
+            <a:srgbClr val="F8FAFC"/>
+          </a:solidFill>
+          <a:ln>
+            <a:solidFill>
+              <a:srgbClr val="415A77"/>
+            </a:solidFill>
+          </a:ln>
+        </p:spPr>
+        <p:style>
+          <a:lnRef idx="1">
+            <a:schemeClr val="accent1"/>
+          </a:lnRef>
+          <a:fillRef idx="3">
+            <a:schemeClr val="accent1"/>
+          </a:fillRef>
+          <a:effectRef idx="2">
+            <a:schemeClr val="accent1"/>
+          </a:effectRef>
+          <a:fontRef idx="minor">
+            <a:schemeClr val="lt1"/>
+          </a:fontRef>
+        </p:style>
+        <p:txBody>
+          <a:bodyPr rtlCol="0" anchor="ctr"/>
+          <a:lstStyle/>
+          <a:p>
+            <a:pPr algn="ctr"/>
+          </a:p>
+        </p:txBody>
+      </p:sp>
+      <p:sp>
+        <p:nvSpPr>
+          <p:cNvPr id="9" name="Rounded Rectangle 8"/>
+          <p:cNvSpPr/>
+          <p:nvPr/>
+        </p:nvSpPr>
+        <p:spPr>
+          <a:xfrm>
+            <a:off x="5989320" y="1133856"/>
+            <a:ext cx="1005840" cy="256032"/>
           </a:xfrm>
           <a:prstGeom prst="roundRect">
             <a:avLst/>
@@ -3315,6 +3403,82 @@
           <a:p>
             <a:pPr algn="ctr"/>
             <a:r>
+              <a:rPr sz="1000" b="1">
+                <a:solidFill>
+                  <a:srgbClr val="121B26"/>
+                </a:solidFill>
+              </a:rPr>
+              <a:t>Web UI</a:t>
+            </a:r>
+          </a:p>
+        </p:txBody>
+      </p:sp>
+      <p:pic>
+        <p:nvPicPr>
+          <p:cNvPr id="10" name="Picture 9" descr="Home.png"/>
+          <p:cNvPicPr>
+            <a:picLocks noChangeAspect="1"/>
+          </p:cNvPicPr>
+          <p:nvPr/>
+        </p:nvPicPr>
+        <p:blipFill>
+          <a:blip r:embed="rId3"/>
+          <a:srcRect/>
+          <a:stretch>
+            <a:fillRect/>
+          </a:stretch>
+        </p:blipFill>
+        <p:spPr>
+          <a:xfrm>
+            <a:off x="5925312" y="1335024"/>
+            <a:ext cx="5230368" cy="3493008"/>
+          </a:xfrm>
+          <a:prstGeom prst="rect">
+            <a:avLst/>
+          </a:prstGeom>
+        </p:spPr>
+      </p:pic>
+      <p:sp>
+        <p:nvSpPr>
+          <p:cNvPr id="11" name="Rounded Rectangle 10"/>
+          <p:cNvSpPr/>
+          <p:nvPr/>
+        </p:nvSpPr>
+        <p:spPr>
+          <a:xfrm>
+            <a:off x="676656" y="5394960"/>
+            <a:ext cx="3246120" cy="292608"/>
+          </a:xfrm>
+          <a:prstGeom prst="roundRect">
+            <a:avLst/>
+          </a:prstGeom>
+          <a:solidFill>
+            <a:srgbClr val="E6BE5A"/>
+          </a:solidFill>
+          <a:ln>
+            <a:noFill/>
+          </a:ln>
+        </p:spPr>
+        <p:style>
+          <a:lnRef idx="1">
+            <a:schemeClr val="accent1"/>
+          </a:lnRef>
+          <a:fillRef idx="3">
+            <a:schemeClr val="accent1"/>
+          </a:fillRef>
+          <a:effectRef idx="2">
+            <a:schemeClr val="accent1"/>
+          </a:effectRef>
+          <a:fontRef idx="minor">
+            <a:schemeClr val="lt1"/>
+          </a:fontRef>
+        </p:style>
+        <p:txBody>
+          <a:bodyPr rtlCol="0" anchor="ctr"/>
+          <a:lstStyle/>
+          <a:p>
+            <a:pPr algn="ctr"/>
+            <a:r>
               <a:rPr sz="1200" b="1">
                 <a:solidFill>
                   <a:srgbClr val="121B26"/>
@@ -3327,7 +3491,7 @@
       </p:sp>
       <p:sp>
         <p:nvSpPr>
-          <p:cNvPr id="8" name="TextBox 7"/>
+          <p:cNvPr id="12" name="TextBox 11"/>
           <p:cNvSpPr txBox="1"/>
           <p:nvPr/>
         </p:nvSpPr>
@@ -3361,7 +3525,7 @@
       </p:sp>
       <p:sp>
         <p:nvSpPr>
-          <p:cNvPr id="9" name="TextBox 8"/>
+          <p:cNvPr id="13" name="TextBox 12"/>
           <p:cNvSpPr txBox="1"/>
           <p:nvPr/>
         </p:nvSpPr>
@@ -5755,7 +5919,7 @@
                   <a:srgbClr val="E7EEF7"/>
                 </a:solidFill>
               </a:rPr>
-              <a:t>Git for Windows on PATH</a:t>
+              <a:t>Git for Windows on PATH (recommended)</a:t>
             </a:r>
           </a:p>
         </p:txBody>
@@ -5952,6 +6116,25 @@
                 <a:latin typeface="Aptos"/>
               </a:rPr>
               <a:t>PSUB links missing prerequisites directly to setup guides.</a:t>
+            </a:r>
+          </a:p>
+          <a:p>
+            <a:pPr>
+              <a:lnSpc>
+                <a:spcPct val="105000"/>
+              </a:lnSpc>
+              <a:spcAft>
+                <a:spcPts val="500"/>
+              </a:spcAft>
+            </a:pPr>
+            <a:r>
+              <a:rPr sz="1300">
+                <a:solidFill>
+                  <a:srgbClr val="E7EEF7"/>
+                </a:solidFill>
+                <a:latin typeface="Aptos"/>
+              </a:rPr>
+              <a:t>Git is useful for repo workflows and metadata, but it no longer blocks readiness.</a:t>
             </a:r>
           </a:p>
           <a:p>
@@ -6176,7 +6359,7 @@
                 </a:solidFill>
                 <a:latin typeface="Aptos Display"/>
               </a:rPr>
-              <a:t>Live UI Walkthrough</a:t>
+              <a:t>Configure The Run</a:t>
             </a:r>
           </a:p>
         </p:txBody>
@@ -6210,7 +6393,7 @@
                 </a:solidFill>
                 <a:latin typeface="Aptos"/>
               </a:rPr>
-              <a:t>Only a few fields matter for a clean run</a:t>
+              <a:t>These are the settings operators actually need to touch</a:t>
             </a:r>
           </a:p>
         </p:txBody>
@@ -6262,7 +6445,7 @@
       </p:sp>
       <p:pic>
         <p:nvPicPr>
-          <p:cNvPr id="7" name="Picture 6" descr="04-build-configuration.png"/>
+          <p:cNvPr id="7" name="Picture 6" descr="configuration-settings.png"/>
           <p:cNvPicPr>
             <a:picLocks noChangeAspect="1"/>
           </p:cNvPicPr>
@@ -6400,7 +6583,7 @@
                 </a:solidFill>
                 <a:latin typeface="Aptos"/>
               </a:rPr>
-              <a:t>Use Auto-Detect to fill Bootstrap Python</a:t>
+              <a:t>Keep the doc-venv name stable unless you have a reason to change it</a:t>
             </a:r>
           </a:p>
           <a:p>
@@ -6419,7 +6602,7 @@
                 </a:solidFill>
                 <a:latin typeface="Aptos"/>
               </a:rPr>
-              <a:t>Confirm SourcePath and doc-venv</a:t>
+              <a:t>Confirm the release output folder and detected Windows SDK</a:t>
             </a:r>
           </a:p>
           <a:p>
@@ -6438,7 +6621,7 @@
                 </a:solidFill>
                 <a:latin typeface="Aptos"/>
               </a:rPr>
-              <a:t>Start Build opens a separate live terminal</a:t>
+              <a:t>Set SourcePath and Bootstrap Python before launch</a:t>
             </a:r>
           </a:p>
           <a:p>
@@ -6457,7 +6640,26 @@
                 </a:solidFill>
                 <a:latin typeface="Aptos"/>
               </a:rPr>
-              <a:t>Focus on the build form, not every control in the page.</a:t>
+              <a:t>Start Build opens a separate terminal with live output</a:t>
+            </a:r>
+          </a:p>
+          <a:p>
+            <a:pPr>
+              <a:lnSpc>
+                <a:spcPct val="105000"/>
+              </a:lnSpc>
+              <a:spcAft>
+                <a:spcPts val="500"/>
+              </a:spcAft>
+            </a:pPr>
+            <a:r>
+              <a:rPr sz="1300">
+                <a:solidFill>
+                  <a:srgbClr val="E7EEF7"/>
+                </a:solidFill>
+                <a:latin typeface="Aptos"/>
+              </a:rPr>
+              <a:t>The UI is doing most of the environment work for the operator.</a:t>
             </a:r>
           </a:p>
         </p:txBody>
@@ -7216,6 +7418,25 @@
               <a:t>Python 3.10 MSI/doc handling and artifact naming are now more robust</a:t>
             </a:r>
           </a:p>
+          <a:p>
+            <a:pPr>
+              <a:lnSpc>
+                <a:spcPct val="105000"/>
+              </a:lnSpc>
+              <a:spcAft>
+                <a:spcPts val="500"/>
+              </a:spcAft>
+            </a:pPr>
+            <a:r>
+              <a:rPr sz="1300">
+                <a:solidFill>
+                  <a:srgbClr val="E7EEF7"/>
+                </a:solidFill>
+                <a:latin typeface="Aptos"/>
+              </a:rPr>
+              <a:t>Git is now treated as recommended rather than a hard blocker in the UI</a:t>
+            </a:r>
+          </a:p>
         </p:txBody>
       </p:sp>
       <p:sp>
@@ -7807,7 +8028,7 @@
                 </a:solidFill>
                 <a:latin typeface="Aptos"/>
               </a:rPr>
-              <a:t>Git missing from PATH</a:t>
+              <a:t>Windows SDK or MSVC toolchains incomplete</a:t>
             </a:r>
           </a:p>
           <a:p>
@@ -7826,7 +8047,7 @@
                 </a:solidFill>
                 <a:latin typeface="Aptos"/>
               </a:rPr>
-              <a:t>Windows SDK or MSVC toolchains incomplete</a:t>
+              <a:t>Wrong bootstrap Python version or alias path</a:t>
             </a:r>
           </a:p>
           <a:p>
@@ -7845,7 +8066,7 @@
                 </a:solidFill>
                 <a:latin typeface="Aptos"/>
               </a:rPr>
-              <a:t>Wrong bootstrap Python version or alias path</a:t>
+              <a:t>Missing doc-venv or Sphinx dependencies</a:t>
             </a:r>
           </a:p>
           <a:p>
@@ -7864,7 +8085,7 @@
                 </a:solidFill>
                 <a:latin typeface="Aptos"/>
               </a:rPr>
-              <a:t>Missing doc-venv or Sphinx dependencies</a:t>
+              <a:t>Python 3.10 WiX or .NET 3.5 dependency issue</a:t>
             </a:r>
           </a:p>
           <a:p>
@@ -7883,7 +8104,7 @@
                 </a:solidFill>
                 <a:latin typeface="Aptos"/>
               </a:rPr>
-              <a:t>Python 3.10 WiX or .NET 3.5 dependency issue</a:t>
+              <a:t>Git warnings from non-Git CPython source trees</a:t>
             </a:r>
           </a:p>
         </p:txBody>
@@ -7925,7 +8146,7 @@
                 </a:solidFill>
                 <a:latin typeface="Aptos"/>
               </a:rPr>
-              <a:t>Install Git for Windows and reopen the shell.</a:t>
+              <a:t>Use the setup guides linked by the prerequisites panel.</a:t>
             </a:r>
           </a:p>
           <a:p>
@@ -7944,7 +8165,7 @@
                 </a:solidFill>
                 <a:latin typeface="Aptos"/>
               </a:rPr>
-              <a:t>Use the setup guides linked by the prerequisites panel.</a:t>
+              <a:t>Switch to a real Python 3.10 or 3.12 executable.</a:t>
             </a:r>
           </a:p>
           <a:p>
@@ -7963,7 +8184,7 @@
                 </a:solidFill>
                 <a:latin typeface="Aptos"/>
               </a:rPr>
-              <a:t>Switch to a real Python 3.10 or 3.12 executable.</a:t>
+              <a:t>Run Setup Virtual Environment before retrying.</a:t>
             </a:r>
           </a:p>
           <a:p>
@@ -7982,7 +8203,7 @@
                 </a:solidFill>
                 <a:latin typeface="Aptos"/>
               </a:rPr>
-              <a:t>Run Setup Virtual Environment before retrying.</a:t>
+              <a:t>Enable .NET Framework 3.5 for older 3.10 MSI flows.</a:t>
             </a:r>
           </a:p>
           <a:p>
@@ -8001,7 +8222,7 @@
                 </a:solidFill>
                 <a:latin typeface="Aptos"/>
               </a:rPr>
-              <a:t>Enable .NET Framework 3.5 for older 3.10 MSI flows.</a:t>
+              <a:t>Treat Git warnings as informational when building from extracted python.org archives.</a:t>
             </a:r>
           </a:p>
         </p:txBody>

--- a/output/presentation/PSUB-Operator-Guide.pptx
+++ b/output/presentation/PSUB-Operator-Guide.pptx
@@ -6246,6 +6246,49 @@
       <p:grpSpPr/>
       <p:sp>
         <p:nvSpPr>
+          <p:cNvPr id="6" name="Rounded Rectangle 5"/>
+          <p:cNvSpPr/>
+          <p:nvPr/>
+        </p:nvSpPr>
+        <p:spPr>
+          <a:xfrm>
+            <a:off x="658368" y="1828800"/>
+            <a:ext cx="7479792" cy="4133087"/>
+          </a:xfrm>
+          <a:prstGeom prst="roundRect">
+            <a:avLst/>
+          </a:prstGeom>
+          <a:solidFill>
+            <a:srgbClr val="040A12"/>
+          </a:solidFill>
+          <a:ln>
+            <a:noFill/>
+          </a:ln>
+        </p:spPr>
+        <p:style>
+          <a:lnRef idx="1">
+            <a:schemeClr val="accent1"/>
+          </a:lnRef>
+          <a:fillRef idx="3">
+            <a:schemeClr val="accent1"/>
+          </a:fillRef>
+          <a:effectRef idx="2">
+            <a:schemeClr val="accent1"/>
+          </a:effectRef>
+          <a:fontRef idx="minor">
+            <a:schemeClr val="lt1"/>
+          </a:fontRef>
+        </p:style>
+        <p:txBody>
+          <a:bodyPr rtlCol="0" anchor="ctr"/>
+          <a:lstStyle/>
+          <a:p>
+            <a:pPr algn="ctr"/>
+          </a:p>
+        </p:txBody>
+      </p:sp>
+      <p:sp>
+        <p:nvSpPr>
           <p:cNvPr id="2" name="Rectangle 1"/>
           <p:cNvSpPr/>
           <p:nvPr/>
@@ -6400,20 +6443,20 @@
       </p:sp>
       <p:sp>
         <p:nvSpPr>
-          <p:cNvPr id="6" name="Rounded Rectangle 5"/>
+          <p:cNvPr id="7" name="Rounded Rectangle 6"/>
           <p:cNvSpPr/>
           <p:nvPr/>
         </p:nvSpPr>
         <p:spPr>
           <a:xfrm>
-            <a:off x="502920" y="1664208"/>
-            <a:ext cx="7818120" cy="4434840"/>
+            <a:off x="530352" y="1700784"/>
+            <a:ext cx="7479792" cy="4133087"/>
           </a:xfrm>
           <a:prstGeom prst="roundRect">
             <a:avLst/>
           </a:prstGeom>
           <a:solidFill>
-            <a:srgbClr val="F5F8FC"/>
+            <a:srgbClr val="F8FAFC"/>
           </a:solidFill>
           <a:ln>
             <a:solidFill>
@@ -6443,9 +6486,60 @@
           </a:p>
         </p:txBody>
       </p:sp>
+      <p:sp>
+        <p:nvSpPr>
+          <p:cNvPr id="8" name="Rounded Rectangle 7"/>
+          <p:cNvSpPr/>
+          <p:nvPr/>
+        </p:nvSpPr>
+        <p:spPr>
+          <a:xfrm>
+            <a:off x="749808" y="1874519"/>
+            <a:ext cx="1207008" cy="256032"/>
+          </a:xfrm>
+          <a:prstGeom prst="roundRect">
+            <a:avLst/>
+          </a:prstGeom>
+          <a:solidFill>
+            <a:srgbClr val="E6BE5A"/>
+          </a:solidFill>
+          <a:ln>
+            <a:noFill/>
+          </a:ln>
+        </p:spPr>
+        <p:style>
+          <a:lnRef idx="1">
+            <a:schemeClr val="accent1"/>
+          </a:lnRef>
+          <a:fillRef idx="3">
+            <a:schemeClr val="accent1"/>
+          </a:fillRef>
+          <a:effectRef idx="2">
+            <a:schemeClr val="accent1"/>
+          </a:effectRef>
+          <a:fontRef idx="minor">
+            <a:schemeClr val="lt1"/>
+          </a:fontRef>
+        </p:style>
+        <p:txBody>
+          <a:bodyPr rtlCol="0" anchor="ctr"/>
+          <a:lstStyle/>
+          <a:p>
+            <a:pPr algn="ctr"/>
+            <a:r>
+              <a:rPr sz="1000" b="1">
+                <a:solidFill>
+                  <a:srgbClr val="121B26"/>
+                </a:solidFill>
+              </a:rPr>
+              <a:t>Web UI</a:t>
+            </a:r>
+          </a:p>
+        </p:txBody>
+      </p:sp>
       <p:pic>
         <p:nvPicPr>
-          <p:cNvPr id="7" name="Picture 6" descr="configuration-settings.png"/>
+          <p:cNvPr id="9" name="Picture 8" descr="configuration-settings.png"/>
           <p:cNvPicPr>
             <a:picLocks noChangeAspect="1"/>
           </p:cNvPicPr>
@@ -6460,8 +6554,8 @@
         </p:blipFill>
         <p:spPr>
           <a:xfrm>
-            <a:off x="667512" y="1828800"/>
-            <a:ext cx="7498079" cy="4114800"/>
+            <a:off x="713232" y="2084831"/>
+            <a:ext cx="7132320" cy="3511296"/>
           </a:xfrm>
           <a:prstGeom prst="rect">
             <a:avLst/>
@@ -6470,7 +6564,7 @@
       </p:pic>
       <p:sp>
         <p:nvSpPr>
-          <p:cNvPr id="8" name="Rounded Rectangle 7"/>
+          <p:cNvPr id="10" name="Rounded Rectangle 9"/>
           <p:cNvSpPr/>
           <p:nvPr/>
         </p:nvSpPr>
@@ -6515,7 +6609,7 @@
       </p:sp>
       <p:sp>
         <p:nvSpPr>
-          <p:cNvPr id="9" name="TextBox 8"/>
+          <p:cNvPr id="11" name="TextBox 10"/>
           <p:cNvSpPr txBox="1"/>
           <p:nvPr/>
         </p:nvSpPr>
@@ -6548,7 +6642,7 @@
       </p:sp>
       <p:sp>
         <p:nvSpPr>
-          <p:cNvPr id="10" name="TextBox 9"/>
+          <p:cNvPr id="12" name="TextBox 11"/>
           <p:cNvSpPr txBox="1"/>
           <p:nvPr/>
         </p:nvSpPr>
@@ -6666,7 +6760,7 @@
       </p:sp>
       <p:sp>
         <p:nvSpPr>
-          <p:cNvPr id="11" name="TextBox 10"/>
+          <p:cNvPr id="13" name="TextBox 12"/>
           <p:cNvSpPr txBox="1"/>
           <p:nvPr/>
         </p:nvSpPr>
@@ -6700,7 +6794,7 @@
       </p:sp>
       <p:sp>
         <p:nvSpPr>
-          <p:cNvPr id="12" name="TextBox 11"/>
+          <p:cNvPr id="14" name="TextBox 13"/>
           <p:cNvSpPr txBox="1"/>
           <p:nvPr/>
         </p:nvSpPr>
